--- a/presentation/pione_testmate_presentation.pptx
+++ b/presentation/pione_testmate_presentation.pptx
@@ -17,6 +17,9 @@
     <p:sldId id="265" r:id="rId16"/>
     <p:sldId id="266" r:id="rId17"/>
     <p:sldId id="267" r:id="rId18"/>
+    <p:sldId id="268" r:id="rId19"/>
+    <p:sldId id="269" r:id="rId20"/>
+    <p:sldId id="270" r:id="rId21"/>
   </p:sldIdLst>
   <p:sldSz cx="12191695" cy="6858000" type="screen4x3"/>
   <p:notesSz cx="6858000" cy="9144000"/>
@@ -3150,8 +3153,8 @@
         </p:nvSpPr>
         <p:spPr>
           <a:xfrm>
-            <a:off x="1097280" y="1645920"/>
-            <a:ext cx="3840480" cy="411480"/>
+            <a:off x="1097280" y="1371600"/>
+            <a:ext cx="4114800" cy="411480"/>
           </a:xfrm>
           <a:prstGeom prst="roundRect">
             <a:avLst/>
@@ -3202,7 +3205,7 @@
         </p:nvSpPr>
         <p:spPr>
           <a:xfrm>
-            <a:off x="1097280" y="2286000"/>
+            <a:off x="1097280" y="2011680"/>
             <a:ext cx="10058400" cy="1645920"/>
           </a:xfrm>
           <a:prstGeom prst="rect">
@@ -3217,7 +3220,7 @@
           <a:lstStyle/>
           <a:p>
             <a:pPr>
-              <a:defRPr sz="4800" b="1">
+              <a:defRPr sz="4600" b="1">
                 <a:solidFill>
                   <a:srgbClr val="FFFFFF"/>
                 </a:solidFill>
@@ -3236,7 +3239,7 @@
               </a:defRPr>
             </a:pPr>
             <a:r>
-              <a:t>Deterministic UI Crawler, Grounded AI Test Planner &amp; Resilient Regression Engine</a:t>
+              <a:t>Deterministic UI Scanner, Grounded AI Test Planner &amp; Resilient Regression Engine</a:t>
             </a:r>
           </a:p>
         </p:txBody>
@@ -3249,7 +3252,7 @@
         </p:nvSpPr>
         <p:spPr>
           <a:xfrm>
-            <a:off x="1097280" y="4114800"/>
+            <a:off x="1097280" y="3931920"/>
             <a:ext cx="9144000" cy="1097280"/>
           </a:xfrm>
           <a:prstGeom prst="rect">
@@ -3271,11 +3274,19 @@
               </a:defRPr>
             </a:pPr>
             <a:r>
-              <a:t>Built on Playwright Sync Core • Neutral Multi-Provider AI Gateway • OWASP Top 10 DAST</a:t>
+              <a:t>• 100% Playwright Synchronous Core Engine (No Flaky Selectors)</a:t>
             </a:r>
             <a:br/>
             <a:r>
-              <a:t>10-Sheet Audit-Ready Excel Workbooks • In-Place Session Lifecycle Protection</a:t>
+              <a:t>• Neutral Multi-Provider AI Gateway (Ollama, Gemini, Claude, OpenAI)</a:t>
+            </a:r>
+            <a:br/>
+            <a:r>
+              <a:t>• Passive DAST Assessment Mapped to OWASP Top 10 (2021)</a:t>
+            </a:r>
+            <a:br/>
+            <a:r>
+              <a:t>• 10-Sheet Audit-Ready Workbooks &amp; In-Place Session Lifecycle Protection</a:t>
             </a:r>
           </a:p>
         </p:txBody>
@@ -3310,7 +3321,7 @@
               </a:defRPr>
             </a:pPr>
             <a:r>
-              <a:t>PiOne Technologies LLP • Confidential &amp; Proprietary Technical Presentation</a:t>
+              <a:t>PiOne Technologies LLP • Production Platform Presentation • Confidential</a:t>
             </a:r>
           </a:p>
         </p:txBody>
@@ -3341,8 +3352,8 @@
         </p:nvSpPr>
         <p:spPr>
           <a:xfrm>
-            <a:off x="731520" y="457200"/>
-            <a:ext cx="10698480" cy="365760"/>
+            <a:off x="731520" y="411480"/>
+            <a:ext cx="10698480" cy="320040"/>
           </a:xfrm>
           <a:prstGeom prst="rect">
             <a:avLst/>
@@ -3356,14 +3367,14 @@
           <a:lstStyle/>
           <a:p>
             <a:pPr>
-              <a:defRPr sz="1100" b="1">
+              <a:defRPr sz="1000" b="1">
                 <a:solidFill>
                   <a:srgbClr val="2563EB"/>
                 </a:solidFill>
               </a:defRPr>
             </a:pPr>
             <a:r>
-              <a:t>REPORTING &amp; COMPLIANCE</a:t>
+              <a:t>STEP 7: GENERATE TESTS</a:t>
             </a:r>
           </a:p>
         </p:txBody>
@@ -3376,8 +3387,8 @@
         </p:nvSpPr>
         <p:spPr>
           <a:xfrm>
-            <a:off x="731520" y="777240"/>
-            <a:ext cx="10698480" cy="640080"/>
+            <a:off x="731520" y="685800"/>
+            <a:ext cx="10698480" cy="594360"/>
           </a:xfrm>
           <a:prstGeom prst="rect">
             <a:avLst/>
@@ -3391,14 +3402,14 @@
           <a:lstStyle/>
           <a:p>
             <a:pPr>
-              <a:defRPr sz="2400" b="1">
+              <a:defRPr sz="2200" b="1">
                 <a:solidFill>
                   <a:srgbClr val="0B192C"/>
                 </a:solidFill>
               </a:defRPr>
             </a:pPr>
             <a:r>
-              <a:t>Standard 10-Sheet Enterprise Audit-Ready Workbook</a:t>
+              <a:t>Step 7: Grounded Multi-Provider AI Test Planning</a:t>
             </a:r>
           </a:p>
         </p:txBody>
@@ -3411,8 +3422,8 @@
         </p:nvSpPr>
         <p:spPr>
           <a:xfrm>
-            <a:off x="731520" y="1645920"/>
-            <a:ext cx="10698480" cy="4572000"/>
+            <a:off x="731520" y="1463040"/>
+            <a:ext cx="4663440" cy="4846320"/>
           </a:xfrm>
           <a:prstGeom prst="roundRect">
             <a:avLst/>
@@ -3456,8 +3467,8 @@
         </p:nvSpPr>
         <p:spPr>
           <a:xfrm>
-            <a:off x="914400" y="1828800"/>
-            <a:ext cx="10332720" cy="4206240"/>
+            <a:off x="914400" y="1645920"/>
+            <a:ext cx="4297680" cy="4480560"/>
           </a:xfrm>
           <a:prstGeom prst="rect">
             <a:avLst/>
@@ -3473,18 +3484,18 @@
             <a:pPr>
               <a:defRPr sz="1600" b="1">
                 <a:solidFill>
-                  <a:srgbClr val="2563EB"/>
-                </a:solidFill>
-              </a:defRPr>
-            </a:pPr>
-            <a:r>
-              <a:t>Audit-Ready .XLSX Architecture with Frozen Panes &amp; Formula Sanitization</a:t>
+                  <a:srgbClr val="0B192C"/>
+                </a:solidFill>
+              </a:defRPr>
+            </a:pPr>
+            <a:r>
+              <a:t>Neutral AI Gateway with Verified Element Grounding</a:t>
             </a:r>
           </a:p>
           <a:p>
             <a:pPr>
               <a:spcBef>
-                <a:spcPts val="300"/>
+                <a:spcPts val="800"/>
               </a:spcBef>
               <a:defRPr sz="1150">
                 <a:solidFill>
@@ -3493,13 +3504,13 @@
               </a:defRPr>
             </a:pPr>
             <a:r>
-              <a:t>• 1. working_routes: Routes with health score &gt;= 70, verified DOM stability, and 0 console errors.</a:t>
+              <a:t>✔ Multi-Provider Freedom: Choose Offline Deterministic, Ollama (Local), Google Gemini, Claude, or OpenAI.</a:t>
             </a:r>
           </a:p>
           <a:p>
             <a:pPr>
               <a:spcBef>
-                <a:spcPts val="300"/>
+                <a:spcPts val="800"/>
               </a:spcBef>
               <a:defRPr sz="1150">
                 <a:solidFill>
@@ -3508,13 +3519,13 @@
               </a:defRPr>
             </a:pPr>
             <a:r>
-              <a:t>• 2. partial_routes: Routes with score 40-69, minor performance warnings, or benign redirects.</a:t>
+              <a:t>✔ 100% Grounded Test Steps: Every generated step binds strictly to a verified element ID from Step 5.</a:t>
             </a:r>
           </a:p>
           <a:p>
             <a:pPr>
               <a:spcBef>
-                <a:spcPts val="300"/>
+                <a:spcPts val="800"/>
               </a:spcBef>
               <a:defRPr sz="1150">
                 <a:solidFill>
@@ -3523,13 +3534,13 @@
               </a:defRPr>
             </a:pPr>
             <a:r>
-              <a:t>• 3. non_working_routes: Routes with score &lt; 40, blank screens, 4xx/5xx HTTP errors, or fatal JS faults.</a:t>
+              <a:t>✔ Requirement Document Ingestion: Upload PRDs, user stories (.txt, .md, .csv) to guide test scenario generation.</a:t>
             </a:r>
           </a:p>
           <a:p>
             <a:pPr>
               <a:spcBef>
-                <a:spcPts val="300"/>
+                <a:spcPts val="800"/>
               </a:spcBef>
               <a:defRPr sz="1150">
                 <a:solidFill>
@@ -3538,97 +3549,126 @@
               </a:defRPr>
             </a:pPr>
             <a:r>
-              <a:t>• 4. menu_hierarchy: Complete hierarchical site structure, module trees, and parent-child routes.</a:t>
+              <a:t>✔ Zero Selector Hallucination: Unverified locators are rejected by the normalizer before execution.</a:t>
             </a:r>
           </a:p>
           <a:p>
             <a:pPr>
               <a:spcBef>
-                <a:spcPts val="300"/>
+                <a:spcPts val="1400"/>
               </a:spcBef>
-              <a:defRPr sz="1150">
-                <a:solidFill>
-                  <a:srgbClr val="1E293B"/>
-                </a:solidFill>
-              </a:defRPr>
-            </a:pPr>
-            <a:r>
-              <a:t>• 5. element_map: Full 12-attribute interactive element inventory with selector quality scoring.</a:t>
-            </a:r>
-          </a:p>
-          <a:p>
-            <a:pPr>
-              <a:spcBef>
-                <a:spcPts val="300"/>
-              </a:spcBef>
-              <a:defRPr sz="1150">
-                <a:solidFill>
-                  <a:srgbClr val="1E293B"/>
-                </a:solidFill>
-              </a:defRPr>
-            </a:pPr>
-            <a:r>
-              <a:t>• 6. parking_lot_actions: Segregated destructive buttons requiring human authorization prior to execution.</a:t>
-            </a:r>
-          </a:p>
-          <a:p>
-            <a:pPr>
-              <a:spcBef>
-                <a:spcPts val="300"/>
-              </a:spcBef>
-              <a:defRPr sz="1150">
-                <a:solidFill>
-                  <a:srgbClr val="1E293B"/>
-                </a:solidFill>
-              </a:defRPr>
-            </a:pPr>
-            <a:r>
-              <a:t>• 7. scan_events: Deterministic, timestamped event log of every crawler and interaction transition.</a:t>
-            </a:r>
-          </a:p>
-          <a:p>
-            <a:pPr>
-              <a:spcBef>
-                <a:spcPts val="300"/>
-              </a:spcBef>
-              <a:defRPr sz="1150">
-                <a:solidFill>
-                  <a:srgbClr val="1E293B"/>
-                </a:solidFill>
-              </a:defRPr>
-            </a:pPr>
-            <a:r>
-              <a:t>• 8. test_cases: Generated test specifications, scenario descriptions, tags, and step sequences.</a:t>
-            </a:r>
-          </a:p>
-          <a:p>
-            <a:pPr>
-              <a:spcBef>
-                <a:spcPts val="300"/>
-              </a:spcBef>
-              <a:defRPr sz="1150">
-                <a:solidFill>
-                  <a:srgbClr val="1E293B"/>
-                </a:solidFill>
-              </a:defRPr>
-            </a:pPr>
-            <a:r>
-              <a:t>• 9. execution_results: Execution outcomes, locators used, error logs, and screenshot links.</a:t>
-            </a:r>
-          </a:p>
-          <a:p>
-            <a:pPr>
-              <a:spcBef>
-                <a:spcPts val="300"/>
-              </a:spcBef>
-              <a:defRPr sz="1150">
-                <a:solidFill>
-                  <a:srgbClr val="1E293B"/>
-                </a:solidFill>
-              </a:defRPr>
-            </a:pPr>
-            <a:r>
-              <a:t>• 10. coverage_gaps: Uncovered user requirements, missing elements, and deferred test paths.</a:t>
+              <a:defRPr sz="1100" b="1">
+                <a:solidFill>
+                  <a:srgbClr val="2563EB"/>
+                </a:solidFill>
+              </a:defRPr>
+            </a:pPr>
+            <a:r>
+              <a:t>🛡 Enterprise Guarantee: Synthesizes complete, executable Pytest scripts automatically.</a:t>
+            </a:r>
+          </a:p>
+        </p:txBody>
+      </p:sp>
+      <p:sp>
+        <p:nvSpPr>
+          <p:cNvPr id="6" name="Rounded Rectangle 5"/>
+          <p:cNvSpPr/>
+          <p:nvPr/>
+        </p:nvSpPr>
+        <p:spPr>
+          <a:xfrm>
+            <a:off x="5504688" y="1389888"/>
+            <a:ext cx="5998464" cy="4846320"/>
+          </a:xfrm>
+          <a:prstGeom prst="roundRect">
+            <a:avLst/>
+          </a:prstGeom>
+          <a:solidFill>
+            <a:srgbClr val="FFFFFF"/>
+          </a:solidFill>
+          <a:ln w="19050">
+            <a:solidFill>
+              <a:srgbClr val="2563EB"/>
+            </a:solidFill>
+          </a:ln>
+        </p:spPr>
+        <p:style>
+          <a:lnRef idx="1">
+            <a:schemeClr val="accent1"/>
+          </a:lnRef>
+          <a:fillRef idx="3">
+            <a:schemeClr val="accent1"/>
+          </a:fillRef>
+          <a:effectRef idx="2">
+            <a:schemeClr val="accent1"/>
+          </a:effectRef>
+          <a:fontRef idx="minor">
+            <a:schemeClr val="lt1"/>
+          </a:fontRef>
+        </p:style>
+        <p:txBody>
+          <a:bodyPr rtlCol="0" anchor="ctr"/>
+          <a:lstStyle/>
+          <a:p>
+            <a:pPr algn="ctr"/>
+          </a:p>
+        </p:txBody>
+      </p:sp>
+      <p:pic>
+        <p:nvPicPr>
+          <p:cNvPr id="7" name="Picture 6" descr="07_ai_test_planning.png"/>
+          <p:cNvPicPr>
+            <a:picLocks noChangeAspect="1"/>
+          </p:cNvPicPr>
+          <p:nvPr/>
+        </p:nvPicPr>
+        <p:blipFill>
+          <a:blip r:embed="rId2"/>
+          <a:stretch>
+            <a:fillRect/>
+          </a:stretch>
+        </p:blipFill>
+        <p:spPr>
+          <a:xfrm>
+            <a:off x="5577840" y="1463040"/>
+            <a:ext cx="5852160" cy="4297680"/>
+          </a:xfrm>
+          <a:prstGeom prst="rect">
+            <a:avLst/>
+          </a:prstGeom>
+        </p:spPr>
+      </p:pic>
+      <p:sp>
+        <p:nvSpPr>
+          <p:cNvPr id="8" name="TextBox 7"/>
+          <p:cNvSpPr txBox="1"/>
+          <p:nvPr/>
+        </p:nvSpPr>
+        <p:spPr>
+          <a:xfrm>
+            <a:off x="5577840" y="5806440"/>
+            <a:ext cx="5852160" cy="365760"/>
+          </a:xfrm>
+          <a:prstGeom prst="rect">
+            <a:avLst/>
+          </a:prstGeom>
+          <a:noFill/>
+        </p:spPr>
+        <p:txBody>
+          <a:bodyPr wrap="none">
+            <a:spAutoFit/>
+          </a:bodyPr>
+          <a:lstStyle/>
+          <a:p>
+            <a:pPr algn="ctr">
+              <a:defRPr sz="950" b="1">
+                <a:solidFill>
+                  <a:srgbClr val="64748B"/>
+                </a:solidFill>
+              </a:defRPr>
+            </a:pPr>
+            <a:r>
+              <a:t>LIVE PRODUCT CAPTURE: STEP 7 DASHBOARD: AI PROVIDER SELECTION, CONTEXT INGESTION &amp; GENERATED PLAN</a:t>
             </a:r>
           </a:p>
         </p:txBody>
@@ -3659,8 +3699,8 @@
         </p:nvSpPr>
         <p:spPr>
           <a:xfrm>
-            <a:off x="731520" y="457200"/>
-            <a:ext cx="10698480" cy="365760"/>
+            <a:off x="731520" y="411480"/>
+            <a:ext cx="10698480" cy="320040"/>
           </a:xfrm>
           <a:prstGeom prst="rect">
             <a:avLst/>
@@ -3674,14 +3714,14 @@
           <a:lstStyle/>
           <a:p>
             <a:pPr>
-              <a:defRPr sz="1100" b="1">
+              <a:defRPr sz="1000" b="1">
                 <a:solidFill>
                   <a:srgbClr val="2563EB"/>
                 </a:solidFill>
               </a:defRPr>
             </a:pPr>
             <a:r>
-              <a:t>ENTERPRISE SESSION RESILIENCY</a:t>
+              <a:t>STEP 8: EXECUTE TESTS</a:t>
             </a:r>
           </a:p>
         </p:txBody>
@@ -3694,8 +3734,8 @@
         </p:nvSpPr>
         <p:spPr>
           <a:xfrm>
-            <a:off x="731520" y="777240"/>
-            <a:ext cx="10698480" cy="640080"/>
+            <a:off x="731520" y="685800"/>
+            <a:ext cx="10698480" cy="594360"/>
           </a:xfrm>
           <a:prstGeom prst="rect">
             <a:avLst/>
@@ -3709,14 +3749,14 @@
           <a:lstStyle/>
           <a:p>
             <a:pPr>
-              <a:defRPr sz="2400" b="1">
+              <a:defRPr sz="2200" b="1">
                 <a:solidFill>
                   <a:srgbClr val="0B192C"/>
                 </a:solidFill>
               </a:defRPr>
             </a:pPr>
             <a:r>
-              <a:t>In-Place Session Lifecycle Protection (/session/refresh)</a:t>
+              <a:t>Step 8: Controlled Execution &amp; Per-Step Screenshot Evidence</a:t>
             </a:r>
           </a:p>
         </p:txBody>
@@ -3729,18 +3769,18 @@
         </p:nvSpPr>
         <p:spPr>
           <a:xfrm>
-            <a:off x="731520" y="1645920"/>
-            <a:ext cx="10698480" cy="4572000"/>
+            <a:off x="731520" y="1463040"/>
+            <a:ext cx="4663440" cy="4846320"/>
           </a:xfrm>
           <a:prstGeom prst="roundRect">
             <a:avLst/>
           </a:prstGeom>
           <a:solidFill>
-            <a:srgbClr val="F0FDF4"/>
+            <a:srgbClr val="FFFFFF"/>
           </a:solidFill>
           <a:ln w="19050">
             <a:solidFill>
-              <a:srgbClr val="10B981"/>
+              <a:srgbClr val="E2E8F0"/>
             </a:solidFill>
           </a:ln>
         </p:spPr>
@@ -3774,8 +3814,8 @@
         </p:nvSpPr>
         <p:spPr>
           <a:xfrm>
-            <a:off x="914400" y="1828800"/>
-            <a:ext cx="10332720" cy="4206240"/>
+            <a:off x="914400" y="1645920"/>
+            <a:ext cx="4297680" cy="4480560"/>
           </a:xfrm>
           <a:prstGeom prst="rect">
             <a:avLst/>
@@ -3789,89 +3829,193 @@
           <a:lstStyle/>
           <a:p>
             <a:pPr>
-              <a:defRPr sz="1800" b="1">
-                <a:solidFill>
-                  <a:srgbClr val="10B981"/>
-                </a:solidFill>
-              </a:defRPr>
-            </a:pPr>
-            <a:r>
-              <a:t>Solving the 2-Hour Test Run Expiry Problem</a:t>
+              <a:defRPr sz="1600" b="1">
+                <a:solidFill>
+                  <a:srgbClr val="0B192C"/>
+                </a:solidFill>
+              </a:defRPr>
+            </a:pPr>
+            <a:r>
+              <a:t>Audit-Grade Test Execution with Full Diagnostic Telemetry</a:t>
             </a:r>
           </a:p>
           <a:p>
             <a:pPr>
               <a:spcBef>
-                <a:spcPts val="1000"/>
+                <a:spcPts val="800"/>
               </a:spcBef>
-              <a:defRPr sz="1350">
+              <a:defRPr sz="1150">
                 <a:solidFill>
                   <a:srgbClr val="1E293B"/>
                 </a:solidFill>
               </a:defRPr>
             </a:pPr>
             <a:r>
-              <a:t>✔ Proactive Expiry Detection: Monitors token validity and detects login redirects or visible password fields.</a:t>
+              <a:t>✔ Playwright Test Driver: Executes real browser navigation and assertions with restored authentication state.</a:t>
             </a:r>
           </a:p>
           <a:p>
             <a:pPr>
               <a:spcBef>
-                <a:spcPts val="1000"/>
+                <a:spcPts val="800"/>
               </a:spcBef>
-              <a:defRPr sz="1350">
+              <a:defRPr sz="1150">
                 <a:solidFill>
                   <a:srgbClr val="1E293B"/>
                 </a:solidFill>
               </a:defRPr>
             </a:pPr>
             <a:r>
-              <a:t>✔ Zero Data Loss Guarantee: When a session expires, the run status pauses—it is NEVER discarded.</a:t>
+              <a:t>✔ Per-Step Screenshots: Automatically captures full-resolution PNG images for every single action.</a:t>
             </a:r>
           </a:p>
           <a:p>
             <a:pPr>
               <a:spcBef>
-                <a:spcPts val="1000"/>
+                <a:spcPts val="800"/>
               </a:spcBef>
-              <a:defRPr sz="1350">
+              <a:defRPr sz="1150">
                 <a:solidFill>
                   <a:srgbClr val="1E293B"/>
                 </a:solidFill>
               </a:defRPr>
             </a:pPr>
             <a:r>
-              <a:t>✔ In-Place Refresh Modal: The UI prompts the user to re-enter credentials in a non-blocking modal dialog.</a:t>
+              <a:t>✔ Inline Lightbox Evidence: Click any test step thumbnail to inspect evidence directly in the dashboard.</a:t>
             </a:r>
           </a:p>
           <a:p>
             <a:pPr>
               <a:spcBef>
-                <a:spcPts val="1000"/>
+                <a:spcPts val="800"/>
               </a:spcBef>
-              <a:defRPr sz="1350">
+              <a:defRPr sz="1150">
                 <a:solidFill>
                   <a:srgbClr val="1E293B"/>
                 </a:solidFill>
               </a:defRPr>
             </a:pPr>
             <a:r>
-              <a:t>✔ Run Context Continuity: The server updates the opaque server-side storage state and binds it to the exact same Run ID.</a:t>
+              <a:t>✔ Single-Step Rerun: Fast troubleshooting of individual steps without re-executing entire suites.</a:t>
             </a:r>
           </a:p>
           <a:p>
             <a:pPr>
               <a:spcBef>
-                <a:spcPts val="1000"/>
+                <a:spcPts val="1400"/>
               </a:spcBef>
-              <a:defRPr sz="1350">
-                <a:solidFill>
-                  <a:srgbClr val="1E293B"/>
-                </a:solidFill>
-              </a:defRPr>
-            </a:pPr>
-            <a:r>
-              <a:t>✔ Seamless Traversal Resume: The crawler or regression suite resumes from the active checkpoint without restarting.</a:t>
+              <a:defRPr sz="1100" b="1">
+                <a:solidFill>
+                  <a:srgbClr val="2563EB"/>
+                </a:solidFill>
+              </a:defRPr>
+            </a:pPr>
+            <a:r>
+              <a:t>🛡 Enterprise Guarantee: Exact locator telemetry and console/network failure capture.</a:t>
+            </a:r>
+          </a:p>
+        </p:txBody>
+      </p:sp>
+      <p:sp>
+        <p:nvSpPr>
+          <p:cNvPr id="6" name="Rounded Rectangle 5"/>
+          <p:cNvSpPr/>
+          <p:nvPr/>
+        </p:nvSpPr>
+        <p:spPr>
+          <a:xfrm>
+            <a:off x="5504688" y="1389888"/>
+            <a:ext cx="5998464" cy="4846320"/>
+          </a:xfrm>
+          <a:prstGeom prst="roundRect">
+            <a:avLst/>
+          </a:prstGeom>
+          <a:solidFill>
+            <a:srgbClr val="FFFFFF"/>
+          </a:solidFill>
+          <a:ln w="19050">
+            <a:solidFill>
+              <a:srgbClr val="2563EB"/>
+            </a:solidFill>
+          </a:ln>
+        </p:spPr>
+        <p:style>
+          <a:lnRef idx="1">
+            <a:schemeClr val="accent1"/>
+          </a:lnRef>
+          <a:fillRef idx="3">
+            <a:schemeClr val="accent1"/>
+          </a:fillRef>
+          <a:effectRef idx="2">
+            <a:schemeClr val="accent1"/>
+          </a:effectRef>
+          <a:fontRef idx="minor">
+            <a:schemeClr val="lt1"/>
+          </a:fontRef>
+        </p:style>
+        <p:txBody>
+          <a:bodyPr rtlCol="0" anchor="ctr"/>
+          <a:lstStyle/>
+          <a:p>
+            <a:pPr algn="ctr"/>
+          </a:p>
+        </p:txBody>
+      </p:sp>
+      <p:pic>
+        <p:nvPicPr>
+          <p:cNvPr id="7" name="Picture 6" descr="08_controlled_execution.png"/>
+          <p:cNvPicPr>
+            <a:picLocks noChangeAspect="1"/>
+          </p:cNvPicPr>
+          <p:nvPr/>
+        </p:nvPicPr>
+        <p:blipFill>
+          <a:blip r:embed="rId2"/>
+          <a:stretch>
+            <a:fillRect/>
+          </a:stretch>
+        </p:blipFill>
+        <p:spPr>
+          <a:xfrm>
+            <a:off x="5577840" y="1463040"/>
+            <a:ext cx="5852160" cy="4297680"/>
+          </a:xfrm>
+          <a:prstGeom prst="rect">
+            <a:avLst/>
+          </a:prstGeom>
+        </p:spPr>
+      </p:pic>
+      <p:sp>
+        <p:nvSpPr>
+          <p:cNvPr id="8" name="TextBox 7"/>
+          <p:cNvSpPr txBox="1"/>
+          <p:nvPr/>
+        </p:nvSpPr>
+        <p:spPr>
+          <a:xfrm>
+            <a:off x="5577840" y="5806440"/>
+            <a:ext cx="5852160" cy="365760"/>
+          </a:xfrm>
+          <a:prstGeom prst="rect">
+            <a:avLst/>
+          </a:prstGeom>
+          <a:noFill/>
+        </p:spPr>
+        <p:txBody>
+          <a:bodyPr wrap="none">
+            <a:spAutoFit/>
+          </a:bodyPr>
+          <a:lstStyle/>
+          <a:p>
+            <a:pPr algn="ctr">
+              <a:defRPr sz="950" b="1">
+                <a:solidFill>
+                  <a:srgbClr val="64748B"/>
+                </a:solidFill>
+              </a:defRPr>
+            </a:pPr>
+            <a:r>
+              <a:t>LIVE PRODUCT CAPTURE: STEP 8 DASHBOARD: TEST STEP EXECUTION OUTCOMES &amp; EVIDENCE THUMBNAILS</a:t>
             </a:r>
           </a:p>
         </p:txBody>
@@ -3902,8 +4046,8 @@
         </p:nvSpPr>
         <p:spPr>
           <a:xfrm>
-            <a:off x="731520" y="457200"/>
-            <a:ext cx="10698480" cy="365760"/>
+            <a:off x="731520" y="411480"/>
+            <a:ext cx="10698480" cy="320040"/>
           </a:xfrm>
           <a:prstGeom prst="rect">
             <a:avLst/>
@@ -3917,14 +4061,14 @@
           <a:lstStyle/>
           <a:p>
             <a:pPr>
-              <a:defRPr sz="1100" b="1">
+              <a:defRPr sz="1000" b="1">
                 <a:solidFill>
                   <a:srgbClr val="2563EB"/>
                 </a:solidFill>
               </a:defRPr>
             </a:pPr>
             <a:r>
-              <a:t>VERIFICATION SUMMARY</a:t>
+              <a:t>STEP 9: AUDIT REPORTS</a:t>
             </a:r>
           </a:p>
         </p:txBody>
@@ -3937,8 +4081,8 @@
         </p:nvSpPr>
         <p:spPr>
           <a:xfrm>
-            <a:off x="731520" y="777240"/>
-            <a:ext cx="10698480" cy="640080"/>
+            <a:off x="731520" y="685800"/>
+            <a:ext cx="10698480" cy="594360"/>
           </a:xfrm>
           <a:prstGeom prst="rect">
             <a:avLst/>
@@ -3952,14 +4096,14 @@
           <a:lstStyle/>
           <a:p>
             <a:pPr>
-              <a:defRPr sz="2400" b="1">
+              <a:defRPr sz="2200" b="1">
                 <a:solidFill>
                   <a:srgbClr val="0B192C"/>
                 </a:solidFill>
               </a:defRPr>
             </a:pPr>
             <a:r>
-              <a:t>Production Verification Benchmarks &amp; Conclusion</a:t>
+              <a:t>Step 9: Standard 10-Sheet Enterprise Audit-Ready Workbook</a:t>
             </a:r>
           </a:p>
         </p:txBody>
@@ -3972,8 +4116,8 @@
         </p:nvSpPr>
         <p:spPr>
           <a:xfrm>
-            <a:off x="731520" y="1645920"/>
-            <a:ext cx="2468880" cy="1645920"/>
+            <a:off x="731520" y="1463040"/>
+            <a:ext cx="4663440" cy="4846320"/>
           </a:xfrm>
           <a:prstGeom prst="roundRect">
             <a:avLst/>
@@ -4017,8 +4161,187 @@
         </p:nvSpPr>
         <p:spPr>
           <a:xfrm>
-            <a:off x="731520" y="1920240"/>
-            <a:ext cx="2468880" cy="1097280"/>
+            <a:off x="914400" y="1645920"/>
+            <a:ext cx="4297680" cy="4480560"/>
+          </a:xfrm>
+          <a:prstGeom prst="rect">
+            <a:avLst/>
+          </a:prstGeom>
+          <a:noFill/>
+        </p:spPr>
+        <p:txBody>
+          <a:bodyPr wrap="square">
+            <a:spAutoFit/>
+          </a:bodyPr>
+          <a:lstStyle/>
+          <a:p>
+            <a:pPr>
+              <a:defRPr sz="1600" b="1">
+                <a:solidFill>
+                  <a:srgbClr val="0B192C"/>
+                </a:solidFill>
+              </a:defRPr>
+            </a:pPr>
+            <a:r>
+              <a:t>Complete Transparency &amp; Multi-Format Audit Artifacts</a:t>
+            </a:r>
+          </a:p>
+          <a:p>
+            <a:pPr>
+              <a:spcBef>
+                <a:spcPts val="800"/>
+              </a:spcBef>
+              <a:defRPr sz="1150">
+                <a:solidFill>
+                  <a:srgbClr val="1E293B"/>
+                </a:solidFill>
+              </a:defRPr>
+            </a:pPr>
+            <a:r>
+              <a:t>✔ 10-Sheet Excel Architecture: working_routes, partial_routes, non_working_routes, menu_hierarchy, element_map, parking_lot_actions, scan_events, test_cases, execution_results, coverage_gaps.</a:t>
+            </a:r>
+          </a:p>
+          <a:p>
+            <a:pPr>
+              <a:spcBef>
+                <a:spcPts val="800"/>
+              </a:spcBef>
+              <a:defRPr sz="1150">
+                <a:solidFill>
+                  <a:srgbClr val="1E293B"/>
+                </a:solidFill>
+              </a:defRPr>
+            </a:pPr>
+            <a:r>
+              <a:t>✔ Formula Injection Sanitization: Cleans cell values to prevent spreadsheet injection vulnerabilities.</a:t>
+            </a:r>
+          </a:p>
+          <a:p>
+            <a:pPr>
+              <a:spcBef>
+                <a:spcPts val="800"/>
+              </a:spcBef>
+              <a:defRPr sz="1150">
+                <a:solidFill>
+                  <a:srgbClr val="1E293B"/>
+                </a:solidFill>
+              </a:defRPr>
+            </a:pPr>
+            <a:r>
+              <a:t>✔ Multi-Format Packages: Download JSON catalog, YAML schema, Markdown summary, and Screenshots ZIP.</a:t>
+            </a:r>
+          </a:p>
+          <a:p>
+            <a:pPr>
+              <a:spcBef>
+                <a:spcPts val="800"/>
+              </a:spcBef>
+              <a:defRPr sz="1150">
+                <a:solidFill>
+                  <a:srgbClr val="1E293B"/>
+                </a:solidFill>
+              </a:defRPr>
+            </a:pPr>
+            <a:r>
+              <a:t>✔ Reusable Baselines: Save current scan state as a named baseline for regression diff comparisons.</a:t>
+            </a:r>
+          </a:p>
+          <a:p>
+            <a:pPr>
+              <a:spcBef>
+                <a:spcPts val="1400"/>
+              </a:spcBef>
+              <a:defRPr sz="1100" b="1">
+                <a:solidFill>
+                  <a:srgbClr val="2563EB"/>
+                </a:solidFill>
+              </a:defRPr>
+            </a:pPr>
+            <a:r>
+              <a:t>🛡 Enterprise Guarantee: Satisfies both technical QA and enterprise regulatory compliance.</a:t>
+            </a:r>
+          </a:p>
+        </p:txBody>
+      </p:sp>
+      <p:sp>
+        <p:nvSpPr>
+          <p:cNvPr id="6" name="Rounded Rectangle 5"/>
+          <p:cNvSpPr/>
+          <p:nvPr/>
+        </p:nvSpPr>
+        <p:spPr>
+          <a:xfrm>
+            <a:off x="5504688" y="1389888"/>
+            <a:ext cx="5998464" cy="4846320"/>
+          </a:xfrm>
+          <a:prstGeom prst="roundRect">
+            <a:avLst/>
+          </a:prstGeom>
+          <a:solidFill>
+            <a:srgbClr val="FFFFFF"/>
+          </a:solidFill>
+          <a:ln w="19050">
+            <a:solidFill>
+              <a:srgbClr val="2563EB"/>
+            </a:solidFill>
+          </a:ln>
+        </p:spPr>
+        <p:style>
+          <a:lnRef idx="1">
+            <a:schemeClr val="accent1"/>
+          </a:lnRef>
+          <a:fillRef idx="3">
+            <a:schemeClr val="accent1"/>
+          </a:fillRef>
+          <a:effectRef idx="2">
+            <a:schemeClr val="accent1"/>
+          </a:effectRef>
+          <a:fontRef idx="minor">
+            <a:schemeClr val="lt1"/>
+          </a:fontRef>
+        </p:style>
+        <p:txBody>
+          <a:bodyPr rtlCol="0" anchor="ctr"/>
+          <a:lstStyle/>
+          <a:p>
+            <a:pPr algn="ctr"/>
+          </a:p>
+        </p:txBody>
+      </p:sp>
+      <p:pic>
+        <p:nvPicPr>
+          <p:cNvPr id="7" name="Picture 6" descr="09_audit_reports.png"/>
+          <p:cNvPicPr>
+            <a:picLocks noChangeAspect="1"/>
+          </p:cNvPicPr>
+          <p:nvPr/>
+        </p:nvPicPr>
+        <p:blipFill>
+          <a:blip r:embed="rId2"/>
+          <a:stretch>
+            <a:fillRect/>
+          </a:stretch>
+        </p:blipFill>
+        <p:spPr>
+          <a:xfrm>
+            <a:off x="5577840" y="1463040"/>
+            <a:ext cx="5852160" cy="4297680"/>
+          </a:xfrm>
+          <a:prstGeom prst="rect">
+            <a:avLst/>
+          </a:prstGeom>
+        </p:spPr>
+      </p:pic>
+      <p:sp>
+        <p:nvSpPr>
+          <p:cNvPr id="8" name="TextBox 7"/>
+          <p:cNvSpPr txBox="1"/>
+          <p:nvPr/>
+        </p:nvSpPr>
+        <p:spPr>
+          <a:xfrm>
+            <a:off x="5577840" y="5806440"/>
+            <a:ext cx="5852160" cy="365760"/>
           </a:xfrm>
           <a:prstGeom prst="rect">
             <a:avLst/>
@@ -4032,40 +4355,116 @@
           <a:lstStyle/>
           <a:p>
             <a:pPr algn="ctr">
-              <a:defRPr sz="2800" b="1">
-                <a:solidFill>
-                  <a:srgbClr val="10B981"/>
-                </a:solidFill>
-              </a:defRPr>
-            </a:pPr>
-            <a:r>
-              <a:t>167 / 167</a:t>
-            </a:r>
-          </a:p>
-          <a:p>
-            <a:pPr algn="ctr">
-              <a:defRPr sz="1200">
-                <a:solidFill>
-                  <a:srgbClr val="1E293B"/>
-                </a:solidFill>
-              </a:defRPr>
-            </a:pPr>
-            <a:r>
-              <a:t>Pytest Suite Passing</a:t>
-            </a:r>
-          </a:p>
-        </p:txBody>
-      </p:sp>
-      <p:sp>
-        <p:nvSpPr>
-          <p:cNvPr id="6" name="Rounded Rectangle 5"/>
+              <a:defRPr sz="950" b="1">
+                <a:solidFill>
+                  <a:srgbClr val="64748B"/>
+                </a:solidFill>
+              </a:defRPr>
+            </a:pPr>
+            <a:r>
+              <a:t>LIVE PRODUCT CAPTURE: STEP 9 DASHBOARD: GROUPED REPORT DOWNLOADS &amp; BASELINE MANAGEMENT</a:t>
+            </a:r>
+          </a:p>
+        </p:txBody>
+      </p:sp>
+    </p:spTree>
+  </p:cSld>
+  <p:clrMapOvr>
+    <a:masterClrMapping/>
+  </p:clrMapOvr>
+</p:sld>
+</file>
+
+<file path=ppt/slides/slide13.xml><?xml version="1.0" encoding="utf-8"?>
+<p:sld xmlns:a="http://schemas.openxmlformats.org/drawingml/2006/main" xmlns:p="http://schemas.openxmlformats.org/presentationml/2006/main" xmlns:r="http://schemas.openxmlformats.org/officeDocument/2006/relationships">
+  <p:cSld>
+    <p:spTree>
+      <p:nvGrpSpPr>
+        <p:cNvPr id="1" name=""/>
+        <p:cNvGrpSpPr/>
+        <p:nvPr/>
+      </p:nvGrpSpPr>
+      <p:grpSpPr/>
+      <p:sp>
+        <p:nvSpPr>
+          <p:cNvPr id="2" name="TextBox 1"/>
+          <p:cNvSpPr txBox="1"/>
+          <p:nvPr/>
+        </p:nvSpPr>
+        <p:spPr>
+          <a:xfrm>
+            <a:off x="731520" y="411480"/>
+            <a:ext cx="10698480" cy="320040"/>
+          </a:xfrm>
+          <a:prstGeom prst="rect">
+            <a:avLst/>
+          </a:prstGeom>
+          <a:noFill/>
+        </p:spPr>
+        <p:txBody>
+          <a:bodyPr wrap="square">
+            <a:spAutoFit/>
+          </a:bodyPr>
+          <a:lstStyle/>
+          <a:p>
+            <a:pPr>
+              <a:defRPr sz="1000" b="1">
+                <a:solidFill>
+                  <a:srgbClr val="2563EB"/>
+                </a:solidFill>
+              </a:defRPr>
+            </a:pPr>
+            <a:r>
+              <a:t>PLATFORM MANAGEMENT: SAVED RUNS</a:t>
+            </a:r>
+          </a:p>
+        </p:txBody>
+      </p:sp>
+      <p:sp>
+        <p:nvSpPr>
+          <p:cNvPr id="3" name="TextBox 2"/>
+          <p:cNvSpPr txBox="1"/>
+          <p:nvPr/>
+        </p:nvSpPr>
+        <p:spPr>
+          <a:xfrm>
+            <a:off x="731520" y="685800"/>
+            <a:ext cx="10698480" cy="594360"/>
+          </a:xfrm>
+          <a:prstGeom prst="rect">
+            <a:avLst/>
+          </a:prstGeom>
+          <a:noFill/>
+        </p:spPr>
+        <p:txBody>
+          <a:bodyPr wrap="square">
+            <a:spAutoFit/>
+          </a:bodyPr>
+          <a:lstStyle/>
+          <a:p>
+            <a:pPr>
+              <a:defRPr sz="2200" b="1">
+                <a:solidFill>
+                  <a:srgbClr val="0B192C"/>
+                </a:solidFill>
+              </a:defRPr>
+            </a:pPr>
+            <a:r>
+              <a:t>Enterprise Resilience: Saved Runs &amp; Checkpoint Recovery</a:t>
+            </a:r>
+          </a:p>
+        </p:txBody>
+      </p:sp>
+      <p:sp>
+        <p:nvSpPr>
+          <p:cNvPr id="4" name="Rounded Rectangle 3"/>
           <p:cNvSpPr/>
           <p:nvPr/>
         </p:nvSpPr>
         <p:spPr>
           <a:xfrm>
-            <a:off x="3474720" y="1645920"/>
-            <a:ext cx="2468880" cy="1645920"/>
+            <a:off x="731520" y="1463040"/>
+            <a:ext cx="4663440" cy="4846320"/>
           </a:xfrm>
           <a:prstGeom prst="roundRect">
             <a:avLst/>
@@ -4103,14 +4502,193 @@
       </p:sp>
       <p:sp>
         <p:nvSpPr>
-          <p:cNvPr id="7" name="TextBox 6"/>
+          <p:cNvPr id="5" name="TextBox 4"/>
           <p:cNvSpPr txBox="1"/>
           <p:nvPr/>
         </p:nvSpPr>
         <p:spPr>
           <a:xfrm>
-            <a:off x="3474720" y="1920240"/>
-            <a:ext cx="2468880" cy="1097280"/>
+            <a:off x="914400" y="1645920"/>
+            <a:ext cx="4297680" cy="4480560"/>
+          </a:xfrm>
+          <a:prstGeom prst="rect">
+            <a:avLst/>
+          </a:prstGeom>
+          <a:noFill/>
+        </p:spPr>
+        <p:txBody>
+          <a:bodyPr wrap="square">
+            <a:spAutoFit/>
+          </a:bodyPr>
+          <a:lstStyle/>
+          <a:p>
+            <a:pPr>
+              <a:defRPr sz="1600" b="1">
+                <a:solidFill>
+                  <a:srgbClr val="0B192C"/>
+                </a:solidFill>
+              </a:defRPr>
+            </a:pPr>
+            <a:r>
+              <a:t>Durable SQLite / PostgreSQL Persistence with Zero Data Loss</a:t>
+            </a:r>
+          </a:p>
+          <a:p>
+            <a:pPr>
+              <a:spcBef>
+                <a:spcPts val="800"/>
+              </a:spcBef>
+              <a:defRPr sz="1150">
+                <a:solidFill>
+                  <a:srgbClr val="1E293B"/>
+                </a:solidFill>
+              </a:defRPr>
+            </a:pPr>
+            <a:r>
+              <a:t>✔ Historical Runs Catalog: Displays target URL, run status, progress %, module counts, and timestamps.</a:t>
+            </a:r>
+          </a:p>
+          <a:p>
+            <a:pPr>
+              <a:spcBef>
+                <a:spcPts val="800"/>
+              </a:spcBef>
+              <a:defRPr sz="1150">
+                <a:solidFill>
+                  <a:srgbClr val="1E293B"/>
+                </a:solidFill>
+              </a:defRPr>
+            </a:pPr>
+            <a:r>
+              <a:t>✔ Instant Checkpoint Resumption: Reconnect to interrupted or paused crawls and resume without data loss.</a:t>
+            </a:r>
+          </a:p>
+          <a:p>
+            <a:pPr>
+              <a:spcBef>
+                <a:spcPts val="800"/>
+              </a:spcBef>
+              <a:defRPr sz="1150">
+                <a:solidFill>
+                  <a:srgbClr val="1E293B"/>
+                </a:solidFill>
+              </a:defRPr>
+            </a:pPr>
+            <a:r>
+              <a:t>✔ Run Duplication &amp; Archiving: Clone previous run parameters into a fresh run or archive completed runs.</a:t>
+            </a:r>
+          </a:p>
+          <a:p>
+            <a:pPr>
+              <a:spcBef>
+                <a:spcPts val="800"/>
+              </a:spcBef>
+              <a:defRPr sz="1150">
+                <a:solidFill>
+                  <a:srgbClr val="1E293B"/>
+                </a:solidFill>
+              </a:defRPr>
+            </a:pPr>
+            <a:r>
+              <a:t>✔ In-Place Session Renewal: /session/refresh re-authenticates expired sessions without losing run context.</a:t>
+            </a:r>
+          </a:p>
+          <a:p>
+            <a:pPr>
+              <a:spcBef>
+                <a:spcPts val="1400"/>
+              </a:spcBef>
+              <a:defRPr sz="1100" b="1">
+                <a:solidFill>
+                  <a:srgbClr val="2563EB"/>
+                </a:solidFill>
+              </a:defRPr>
+            </a:pPr>
+            <a:r>
+              <a:t>🛡 Enterprise Guarantee: Eliminates the multi-hour test run crash problem completely.</a:t>
+            </a:r>
+          </a:p>
+        </p:txBody>
+      </p:sp>
+      <p:sp>
+        <p:nvSpPr>
+          <p:cNvPr id="6" name="Rounded Rectangle 5"/>
+          <p:cNvSpPr/>
+          <p:nvPr/>
+        </p:nvSpPr>
+        <p:spPr>
+          <a:xfrm>
+            <a:off x="5504688" y="1389888"/>
+            <a:ext cx="5998464" cy="4846320"/>
+          </a:xfrm>
+          <a:prstGeom prst="roundRect">
+            <a:avLst/>
+          </a:prstGeom>
+          <a:solidFill>
+            <a:srgbClr val="FFFFFF"/>
+          </a:solidFill>
+          <a:ln w="19050">
+            <a:solidFill>
+              <a:srgbClr val="2563EB"/>
+            </a:solidFill>
+          </a:ln>
+        </p:spPr>
+        <p:style>
+          <a:lnRef idx="1">
+            <a:schemeClr val="accent1"/>
+          </a:lnRef>
+          <a:fillRef idx="3">
+            <a:schemeClr val="accent1"/>
+          </a:fillRef>
+          <a:effectRef idx="2">
+            <a:schemeClr val="accent1"/>
+          </a:effectRef>
+          <a:fontRef idx="minor">
+            <a:schemeClr val="lt1"/>
+          </a:fontRef>
+        </p:style>
+        <p:txBody>
+          <a:bodyPr rtlCol="0" anchor="ctr"/>
+          <a:lstStyle/>
+          <a:p>
+            <a:pPr algn="ctr"/>
+          </a:p>
+        </p:txBody>
+      </p:sp>
+      <p:pic>
+        <p:nvPicPr>
+          <p:cNvPr id="7" name="Picture 6" descr="10_saved_runs_dashboard.png"/>
+          <p:cNvPicPr>
+            <a:picLocks noChangeAspect="1"/>
+          </p:cNvPicPr>
+          <p:nvPr/>
+        </p:nvPicPr>
+        <p:blipFill>
+          <a:blip r:embed="rId2"/>
+          <a:stretch>
+            <a:fillRect/>
+          </a:stretch>
+        </p:blipFill>
+        <p:spPr>
+          <a:xfrm>
+            <a:off x="5577840" y="1463040"/>
+            <a:ext cx="5852160" cy="4297680"/>
+          </a:xfrm>
+          <a:prstGeom prst="rect">
+            <a:avLst/>
+          </a:prstGeom>
+        </p:spPr>
+      </p:pic>
+      <p:sp>
+        <p:nvSpPr>
+          <p:cNvPr id="8" name="TextBox 7"/>
+          <p:cNvSpPr txBox="1"/>
+          <p:nvPr/>
+        </p:nvSpPr>
+        <p:spPr>
+          <a:xfrm>
+            <a:off x="5577840" y="5806440"/>
+            <a:ext cx="5852160" cy="365760"/>
           </a:xfrm>
           <a:prstGeom prst="rect">
             <a:avLst/>
@@ -4124,40 +4702,116 @@
           <a:lstStyle/>
           <a:p>
             <a:pPr algn="ctr">
-              <a:defRPr sz="2800" b="1">
+              <a:defRPr sz="950" b="1">
+                <a:solidFill>
+                  <a:srgbClr val="64748B"/>
+                </a:solidFill>
+              </a:defRPr>
+            </a:pPr>
+            <a:r>
+              <a:t>LIVE PRODUCT CAPTURE: SAVED RUNS MANAGEMENT VIEW: HISTORICAL SCANS, METRICS &amp; ACTIONS</a:t>
+            </a:r>
+          </a:p>
+        </p:txBody>
+      </p:sp>
+    </p:spTree>
+  </p:cSld>
+  <p:clrMapOvr>
+    <a:masterClrMapping/>
+  </p:clrMapOvr>
+</p:sld>
+</file>
+
+<file path=ppt/slides/slide14.xml><?xml version="1.0" encoding="utf-8"?>
+<p:sld xmlns:a="http://schemas.openxmlformats.org/drawingml/2006/main" xmlns:p="http://schemas.openxmlformats.org/presentationml/2006/main" xmlns:r="http://schemas.openxmlformats.org/officeDocument/2006/relationships">
+  <p:cSld>
+    <p:spTree>
+      <p:nvGrpSpPr>
+        <p:cNvPr id="1" name=""/>
+        <p:cNvGrpSpPr/>
+        <p:nvPr/>
+      </p:nvGrpSpPr>
+      <p:grpSpPr/>
+      <p:sp>
+        <p:nvSpPr>
+          <p:cNvPr id="2" name="TextBox 1"/>
+          <p:cNvSpPr txBox="1"/>
+          <p:nvPr/>
+        </p:nvSpPr>
+        <p:spPr>
+          <a:xfrm>
+            <a:off x="731520" y="411480"/>
+            <a:ext cx="10698480" cy="320040"/>
+          </a:xfrm>
+          <a:prstGeom prst="rect">
+            <a:avLst/>
+          </a:prstGeom>
+          <a:noFill/>
+        </p:spPr>
+        <p:txBody>
+          <a:bodyPr wrap="square">
+            <a:spAutoFit/>
+          </a:bodyPr>
+          <a:lstStyle/>
+          <a:p>
+            <a:pPr>
+              <a:defRPr sz="1000" b="1">
                 <a:solidFill>
                   <a:srgbClr val="2563EB"/>
                 </a:solidFill>
               </a:defRPr>
             </a:pPr>
             <a:r>
-              <a:t>0 Flaky Locators</a:t>
-            </a:r>
-          </a:p>
-          <a:p>
-            <a:pPr algn="ctr">
-              <a:defRPr sz="1200">
-                <a:solidFill>
-                  <a:srgbClr val="1E293B"/>
-                </a:solidFill>
-              </a:defRPr>
-            </a:pPr>
-            <a:r>
-              <a:t>12-Attribute DOM Fingerprints</a:t>
-            </a:r>
-          </a:p>
-        </p:txBody>
-      </p:sp>
-      <p:sp>
-        <p:nvSpPr>
-          <p:cNvPr id="8" name="Rounded Rectangle 7"/>
+              <a:t>PLATFORM MANAGEMENT: REGRESSION SUITES</a:t>
+            </a:r>
+          </a:p>
+        </p:txBody>
+      </p:sp>
+      <p:sp>
+        <p:nvSpPr>
+          <p:cNvPr id="3" name="TextBox 2"/>
+          <p:cNvSpPr txBox="1"/>
+          <p:nvPr/>
+        </p:nvSpPr>
+        <p:spPr>
+          <a:xfrm>
+            <a:off x="731520" y="685800"/>
+            <a:ext cx="10698480" cy="594360"/>
+          </a:xfrm>
+          <a:prstGeom prst="rect">
+            <a:avLst/>
+          </a:prstGeom>
+          <a:noFill/>
+        </p:spPr>
+        <p:txBody>
+          <a:bodyPr wrap="square">
+            <a:spAutoFit/>
+          </a:bodyPr>
+          <a:lstStyle/>
+          <a:p>
+            <a:pPr>
+              <a:defRPr sz="2200" b="1">
+                <a:solidFill>
+                  <a:srgbClr val="0B192C"/>
+                </a:solidFill>
+              </a:defRPr>
+            </a:pPr>
+            <a:r>
+              <a:t>Continuous Regression: Named Suites &amp; Replay Diffing</a:t>
+            </a:r>
+          </a:p>
+        </p:txBody>
+      </p:sp>
+      <p:sp>
+        <p:nvSpPr>
+          <p:cNvPr id="4" name="Rounded Rectangle 3"/>
           <p:cNvSpPr/>
           <p:nvPr/>
         </p:nvSpPr>
         <p:spPr>
           <a:xfrm>
-            <a:off x="6217920" y="1645920"/>
-            <a:ext cx="2468880" cy="1645920"/>
+            <a:off x="731520" y="1463040"/>
+            <a:ext cx="4663440" cy="4846320"/>
           </a:xfrm>
           <a:prstGeom prst="roundRect">
             <a:avLst/>
@@ -4195,14 +4849,193 @@
       </p:sp>
       <p:sp>
         <p:nvSpPr>
-          <p:cNvPr id="9" name="TextBox 8"/>
+          <p:cNvPr id="5" name="TextBox 4"/>
           <p:cNvSpPr txBox="1"/>
           <p:nvPr/>
         </p:nvSpPr>
         <p:spPr>
           <a:xfrm>
-            <a:off x="6217920" y="1920240"/>
-            <a:ext cx="2468880" cy="1097280"/>
+            <a:off x="914400" y="1645920"/>
+            <a:ext cx="4297680" cy="4480560"/>
+          </a:xfrm>
+          <a:prstGeom prst="rect">
+            <a:avLst/>
+          </a:prstGeom>
+          <a:noFill/>
+        </p:spPr>
+        <p:txBody>
+          <a:bodyPr wrap="square">
+            <a:spAutoFit/>
+          </a:bodyPr>
+          <a:lstStyle/>
+          <a:p>
+            <a:pPr>
+              <a:defRPr sz="1600" b="1">
+                <a:solidFill>
+                  <a:srgbClr val="0B192C"/>
+                </a:solidFill>
+              </a:defRPr>
+            </a:pPr>
+            <a:r>
+              <a:t>Selectable Test Execution &amp; Automated Regression Diffing</a:t>
+            </a:r>
+          </a:p>
+          <a:p>
+            <a:pPr>
+              <a:spcBef>
+                <a:spcPts val="800"/>
+              </a:spcBef>
+              <a:defRPr sz="1150">
+                <a:solidFill>
+                  <a:srgbClr val="1E293B"/>
+                </a:solidFill>
+              </a:defRPr>
+            </a:pPr>
+            <a:r>
+              <a:t>✔ Named Regression Suites: Group tests by functional module, release tag, or test environment.</a:t>
+            </a:r>
+          </a:p>
+          <a:p>
+            <a:pPr>
+              <a:spcBef>
+                <a:spcPts val="800"/>
+              </a:spcBef>
+              <a:defRPr sz="1150">
+                <a:solidFill>
+                  <a:srgbClr val="1E293B"/>
+                </a:solidFill>
+              </a:defRPr>
+            </a:pPr>
+            <a:r>
+              <a:t>✔ Selectable Execution: Select specific test cases with an explicit confirmation modal before launching Playwright.</a:t>
+            </a:r>
+          </a:p>
+          <a:p>
+            <a:pPr>
+              <a:spcBef>
+                <a:spcPts val="800"/>
+              </a:spcBef>
+              <a:defRPr sz="1150">
+                <a:solidFill>
+                  <a:srgbClr val="1E293B"/>
+                </a:solidFill>
+              </a:defRPr>
+            </a:pPr>
+            <a:r>
+              <a:t>✔ Typed DELETE Safeguards: Bulk deletion requires typing 'DELETE', eliminating accidental data destruction.</a:t>
+            </a:r>
+          </a:p>
+          <a:p>
+            <a:pPr>
+              <a:spcBef>
+                <a:spcPts val="800"/>
+              </a:spcBef>
+              <a:defRPr sz="1150">
+                <a:solidFill>
+                  <a:srgbClr val="1E293B"/>
+                </a:solidFill>
+              </a:defRPr>
+            </a:pPr>
+            <a:r>
+              <a:t>✔ Baseline Regression Diffing: Calculates status transitions (PASSED -&gt; FAILED), new routes, and selector drift.</a:t>
+            </a:r>
+          </a:p>
+          <a:p>
+            <a:pPr>
+              <a:spcBef>
+                <a:spcPts val="1400"/>
+              </a:spcBef>
+              <a:defRPr sz="1100" b="1">
+                <a:solidFill>
+                  <a:srgbClr val="2563EB"/>
+                </a:solidFill>
+              </a:defRPr>
+            </a:pPr>
+            <a:r>
+              <a:t>🛡 Enterprise Guarantee: Instant visual diff reports for pull requests and CI/CD gates.</a:t>
+            </a:r>
+          </a:p>
+        </p:txBody>
+      </p:sp>
+      <p:sp>
+        <p:nvSpPr>
+          <p:cNvPr id="6" name="Rounded Rectangle 5"/>
+          <p:cNvSpPr/>
+          <p:nvPr/>
+        </p:nvSpPr>
+        <p:spPr>
+          <a:xfrm>
+            <a:off x="5504688" y="1389888"/>
+            <a:ext cx="5998464" cy="4846320"/>
+          </a:xfrm>
+          <a:prstGeom prst="roundRect">
+            <a:avLst/>
+          </a:prstGeom>
+          <a:solidFill>
+            <a:srgbClr val="FFFFFF"/>
+          </a:solidFill>
+          <a:ln w="19050">
+            <a:solidFill>
+              <a:srgbClr val="2563EB"/>
+            </a:solidFill>
+          </a:ln>
+        </p:spPr>
+        <p:style>
+          <a:lnRef idx="1">
+            <a:schemeClr val="accent1"/>
+          </a:lnRef>
+          <a:fillRef idx="3">
+            <a:schemeClr val="accent1"/>
+          </a:fillRef>
+          <a:effectRef idx="2">
+            <a:schemeClr val="accent1"/>
+          </a:effectRef>
+          <a:fontRef idx="minor">
+            <a:schemeClr val="lt1"/>
+          </a:fontRef>
+        </p:style>
+        <p:txBody>
+          <a:bodyPr rtlCol="0" anchor="ctr"/>
+          <a:lstStyle/>
+          <a:p>
+            <a:pPr algn="ctr"/>
+          </a:p>
+        </p:txBody>
+      </p:sp>
+      <p:pic>
+        <p:nvPicPr>
+          <p:cNvPr id="7" name="Picture 6" descr="11_regression_suites.png"/>
+          <p:cNvPicPr>
+            <a:picLocks noChangeAspect="1"/>
+          </p:cNvPicPr>
+          <p:nvPr/>
+        </p:nvPicPr>
+        <p:blipFill>
+          <a:blip r:embed="rId2"/>
+          <a:stretch>
+            <a:fillRect/>
+          </a:stretch>
+        </p:blipFill>
+        <p:spPr>
+          <a:xfrm>
+            <a:off x="5577840" y="1463040"/>
+            <a:ext cx="5852160" cy="4297680"/>
+          </a:xfrm>
+          <a:prstGeom prst="rect">
+            <a:avLst/>
+          </a:prstGeom>
+        </p:spPr>
+      </p:pic>
+      <p:sp>
+        <p:nvSpPr>
+          <p:cNvPr id="8" name="TextBox 7"/>
+          <p:cNvSpPr txBox="1"/>
+          <p:nvPr/>
+        </p:nvSpPr>
+        <p:spPr>
+          <a:xfrm>
+            <a:off x="5577840" y="5806440"/>
+            <a:ext cx="5852160" cy="365760"/>
           </a:xfrm>
           <a:prstGeom prst="rect">
             <a:avLst/>
@@ -4216,39 +5049,115 @@
           <a:lstStyle/>
           <a:p>
             <a:pPr algn="ctr">
-              <a:defRPr sz="2800" b="1">
-                <a:solidFill>
-                  <a:srgbClr val="F59E0B"/>
-                </a:solidFill>
-              </a:defRPr>
-            </a:pPr>
-            <a:r>
-              <a:t>100% Safe</a:t>
-            </a:r>
-          </a:p>
-          <a:p>
-            <a:pPr algn="ctr">
-              <a:defRPr sz="1200">
-                <a:solidFill>
-                  <a:srgbClr val="1E293B"/>
-                </a:solidFill>
-              </a:defRPr>
-            </a:pPr>
-            <a:r>
-              <a:t>Zero Destructive Actions Clicked</a:t>
-            </a:r>
-          </a:p>
-        </p:txBody>
-      </p:sp>
-      <p:sp>
-        <p:nvSpPr>
-          <p:cNvPr id="10" name="Rounded Rectangle 9"/>
+              <a:defRPr sz="950" b="1">
+                <a:solidFill>
+                  <a:srgbClr val="64748B"/>
+                </a:solidFill>
+              </a:defRPr>
+            </a:pPr>
+            <a:r>
+              <a:t>LIVE PRODUCT CAPTURE: REGRESSION SUITES VIEW: NAMED SUITES, FILTER PILLS &amp; SELECTABLE EXECUTION</a:t>
+            </a:r>
+          </a:p>
+        </p:txBody>
+      </p:sp>
+    </p:spTree>
+  </p:cSld>
+  <p:clrMapOvr>
+    <a:masterClrMapping/>
+  </p:clrMapOvr>
+</p:sld>
+</file>
+
+<file path=ppt/slides/slide15.xml><?xml version="1.0" encoding="utf-8"?>
+<p:sld xmlns:a="http://schemas.openxmlformats.org/drawingml/2006/main" xmlns:p="http://schemas.openxmlformats.org/presentationml/2006/main" xmlns:r="http://schemas.openxmlformats.org/officeDocument/2006/relationships">
+  <p:cSld>
+    <p:spTree>
+      <p:nvGrpSpPr>
+        <p:cNvPr id="1" name=""/>
+        <p:cNvGrpSpPr/>
+        <p:nvPr/>
+      </p:nvGrpSpPr>
+      <p:grpSpPr/>
+      <p:sp>
+        <p:nvSpPr>
+          <p:cNvPr id="2" name="TextBox 1"/>
+          <p:cNvSpPr txBox="1"/>
+          <p:nvPr/>
+        </p:nvSpPr>
+        <p:spPr>
+          <a:xfrm>
+            <a:off x="731520" y="411480"/>
+            <a:ext cx="10698480" cy="320040"/>
+          </a:xfrm>
+          <a:prstGeom prst="rect">
+            <a:avLst/>
+          </a:prstGeom>
+          <a:noFill/>
+        </p:spPr>
+        <p:txBody>
+          <a:bodyPr wrap="square">
+            <a:spAutoFit/>
+          </a:bodyPr>
+          <a:lstStyle/>
+          <a:p>
+            <a:pPr>
+              <a:defRPr sz="1000" b="1">
+                <a:solidFill>
+                  <a:srgbClr val="2563EB"/>
+                </a:solidFill>
+              </a:defRPr>
+            </a:pPr>
+            <a:r>
+              <a:t>ENTERPRISE SUMMARY</a:t>
+            </a:r>
+          </a:p>
+        </p:txBody>
+      </p:sp>
+      <p:sp>
+        <p:nvSpPr>
+          <p:cNvPr id="3" name="TextBox 2"/>
+          <p:cNvSpPr txBox="1"/>
+          <p:nvPr/>
+        </p:nvSpPr>
+        <p:spPr>
+          <a:xfrm>
+            <a:off x="731520" y="685800"/>
+            <a:ext cx="10698480" cy="594360"/>
+          </a:xfrm>
+          <a:prstGeom prst="rect">
+            <a:avLst/>
+          </a:prstGeom>
+          <a:noFill/>
+        </p:spPr>
+        <p:txBody>
+          <a:bodyPr wrap="square">
+            <a:spAutoFit/>
+          </a:bodyPr>
+          <a:lstStyle/>
+          <a:p>
+            <a:pPr>
+              <a:defRPr sz="2200" b="1">
+                <a:solidFill>
+                  <a:srgbClr val="0B192C"/>
+                </a:solidFill>
+              </a:defRPr>
+            </a:pPr>
+            <a:r>
+              <a:t>Production Verification Benchmarks &amp; Executive Summary</a:t>
+            </a:r>
+          </a:p>
+        </p:txBody>
+      </p:sp>
+      <p:sp>
+        <p:nvSpPr>
+          <p:cNvPr id="4" name="Rounded Rectangle 3"/>
           <p:cNvSpPr/>
           <p:nvPr/>
         </p:nvSpPr>
         <p:spPr>
           <a:xfrm>
-            <a:off x="8961120" y="1645920"/>
+            <a:off x="731520" y="1463040"/>
             <a:ext cx="2468880" cy="1645920"/>
           </a:xfrm>
           <a:prstGeom prst="roundRect">
@@ -4287,13 +5196,13 @@
       </p:sp>
       <p:sp>
         <p:nvSpPr>
-          <p:cNvPr id="11" name="TextBox 10"/>
+          <p:cNvPr id="5" name="TextBox 4"/>
           <p:cNvSpPr txBox="1"/>
           <p:nvPr/>
         </p:nvSpPr>
         <p:spPr>
           <a:xfrm>
-            <a:off x="8961120" y="1920240"/>
+            <a:off x="731520" y="1737360"/>
             <a:ext cx="2468880" cy="1097280"/>
           </a:xfrm>
           <a:prstGeom prst="rect">
@@ -4310,12 +5219,12 @@
             <a:pPr algn="ctr">
               <a:defRPr sz="2800" b="1">
                 <a:solidFill>
-                  <a:srgbClr val="0B192C"/>
-                </a:solidFill>
-              </a:defRPr>
-            </a:pPr>
-            <a:r>
-              <a:t>10 Sheets</a:t>
+                  <a:srgbClr val="10B981"/>
+                </a:solidFill>
+              </a:defRPr>
+            </a:pPr>
+            <a:r>
+              <a:t>167 / 167</a:t>
             </a:r>
           </a:p>
           <a:p>
@@ -4327,21 +5236,21 @@
               </a:defRPr>
             </a:pPr>
             <a:r>
-              <a:t>Audit-Ready Excel Workbooks</a:t>
-            </a:r>
-          </a:p>
-        </p:txBody>
-      </p:sp>
-      <p:sp>
-        <p:nvSpPr>
-          <p:cNvPr id="12" name="Rounded Rectangle 11"/>
+              <a:t>Pytest Suite Passing (100%)</a:t>
+            </a:r>
+          </a:p>
+        </p:txBody>
+      </p:sp>
+      <p:sp>
+        <p:nvSpPr>
+          <p:cNvPr id="6" name="Rounded Rectangle 5"/>
           <p:cNvSpPr/>
           <p:nvPr/>
         </p:nvSpPr>
         <p:spPr>
           <a:xfrm>
-            <a:off x="731520" y="3657600"/>
-            <a:ext cx="10698480" cy="2560320"/>
+            <a:off x="3474720" y="1463040"/>
+            <a:ext cx="2468880" cy="1645920"/>
           </a:xfrm>
           <a:prstGeom prst="roundRect">
             <a:avLst/>
@@ -4379,14 +5288,290 @@
       </p:sp>
       <p:sp>
         <p:nvSpPr>
+          <p:cNvPr id="7" name="TextBox 6"/>
+          <p:cNvSpPr txBox="1"/>
+          <p:nvPr/>
+        </p:nvSpPr>
+        <p:spPr>
+          <a:xfrm>
+            <a:off x="3474720" y="1737360"/>
+            <a:ext cx="2468880" cy="1097280"/>
+          </a:xfrm>
+          <a:prstGeom prst="rect">
+            <a:avLst/>
+          </a:prstGeom>
+          <a:noFill/>
+        </p:spPr>
+        <p:txBody>
+          <a:bodyPr wrap="none">
+            <a:spAutoFit/>
+          </a:bodyPr>
+          <a:lstStyle/>
+          <a:p>
+            <a:pPr algn="ctr">
+              <a:defRPr sz="2800" b="1">
+                <a:solidFill>
+                  <a:srgbClr val="2563EB"/>
+                </a:solidFill>
+              </a:defRPr>
+            </a:pPr>
+            <a:r>
+              <a:t>0 Flaky Locators</a:t>
+            </a:r>
+          </a:p>
+          <a:p>
+            <a:pPr algn="ctr">
+              <a:defRPr sz="1200">
+                <a:solidFill>
+                  <a:srgbClr val="1E293B"/>
+                </a:solidFill>
+              </a:defRPr>
+            </a:pPr>
+            <a:r>
+              <a:t>12-Attribute Fingerprints</a:t>
+            </a:r>
+          </a:p>
+        </p:txBody>
+      </p:sp>
+      <p:sp>
+        <p:nvSpPr>
+          <p:cNvPr id="8" name="Rounded Rectangle 7"/>
+          <p:cNvSpPr/>
+          <p:nvPr/>
+        </p:nvSpPr>
+        <p:spPr>
+          <a:xfrm>
+            <a:off x="6217920" y="1463040"/>
+            <a:ext cx="2468880" cy="1645920"/>
+          </a:xfrm>
+          <a:prstGeom prst="roundRect">
+            <a:avLst/>
+          </a:prstGeom>
+          <a:solidFill>
+            <a:srgbClr val="FFFFFF"/>
+          </a:solidFill>
+          <a:ln w="19050">
+            <a:solidFill>
+              <a:srgbClr val="E2E8F0"/>
+            </a:solidFill>
+          </a:ln>
+        </p:spPr>
+        <p:style>
+          <a:lnRef idx="1">
+            <a:schemeClr val="accent1"/>
+          </a:lnRef>
+          <a:fillRef idx="3">
+            <a:schemeClr val="accent1"/>
+          </a:fillRef>
+          <a:effectRef idx="2">
+            <a:schemeClr val="accent1"/>
+          </a:effectRef>
+          <a:fontRef idx="minor">
+            <a:schemeClr val="lt1"/>
+          </a:fontRef>
+        </p:style>
+        <p:txBody>
+          <a:bodyPr rtlCol="0" anchor="ctr"/>
+          <a:lstStyle/>
+          <a:p>
+            <a:pPr algn="ctr"/>
+          </a:p>
+        </p:txBody>
+      </p:sp>
+      <p:sp>
+        <p:nvSpPr>
+          <p:cNvPr id="9" name="TextBox 8"/>
+          <p:cNvSpPr txBox="1"/>
+          <p:nvPr/>
+        </p:nvSpPr>
+        <p:spPr>
+          <a:xfrm>
+            <a:off x="6217920" y="1737360"/>
+            <a:ext cx="2468880" cy="1097280"/>
+          </a:xfrm>
+          <a:prstGeom prst="rect">
+            <a:avLst/>
+          </a:prstGeom>
+          <a:noFill/>
+        </p:spPr>
+        <p:txBody>
+          <a:bodyPr wrap="none">
+            <a:spAutoFit/>
+          </a:bodyPr>
+          <a:lstStyle/>
+          <a:p>
+            <a:pPr algn="ctr">
+              <a:defRPr sz="2800" b="1">
+                <a:solidFill>
+                  <a:srgbClr val="F59E0B"/>
+                </a:solidFill>
+              </a:defRPr>
+            </a:pPr>
+            <a:r>
+              <a:t>100% Safe</a:t>
+            </a:r>
+          </a:p>
+          <a:p>
+            <a:pPr algn="ctr">
+              <a:defRPr sz="1200">
+                <a:solidFill>
+                  <a:srgbClr val="1E293B"/>
+                </a:solidFill>
+              </a:defRPr>
+            </a:pPr>
+            <a:r>
+              <a:t>Zero Destructive Actions</a:t>
+            </a:r>
+          </a:p>
+        </p:txBody>
+      </p:sp>
+      <p:sp>
+        <p:nvSpPr>
+          <p:cNvPr id="10" name="Rounded Rectangle 9"/>
+          <p:cNvSpPr/>
+          <p:nvPr/>
+        </p:nvSpPr>
+        <p:spPr>
+          <a:xfrm>
+            <a:off x="8961120" y="1463040"/>
+            <a:ext cx="2468880" cy="1645920"/>
+          </a:xfrm>
+          <a:prstGeom prst="roundRect">
+            <a:avLst/>
+          </a:prstGeom>
+          <a:solidFill>
+            <a:srgbClr val="FFFFFF"/>
+          </a:solidFill>
+          <a:ln w="19050">
+            <a:solidFill>
+              <a:srgbClr val="E2E8F0"/>
+            </a:solidFill>
+          </a:ln>
+        </p:spPr>
+        <p:style>
+          <a:lnRef idx="1">
+            <a:schemeClr val="accent1"/>
+          </a:lnRef>
+          <a:fillRef idx="3">
+            <a:schemeClr val="accent1"/>
+          </a:fillRef>
+          <a:effectRef idx="2">
+            <a:schemeClr val="accent1"/>
+          </a:effectRef>
+          <a:fontRef idx="minor">
+            <a:schemeClr val="lt1"/>
+          </a:fontRef>
+        </p:style>
+        <p:txBody>
+          <a:bodyPr rtlCol="0" anchor="ctr"/>
+          <a:lstStyle/>
+          <a:p>
+            <a:pPr algn="ctr"/>
+          </a:p>
+        </p:txBody>
+      </p:sp>
+      <p:sp>
+        <p:nvSpPr>
+          <p:cNvPr id="11" name="TextBox 10"/>
+          <p:cNvSpPr txBox="1"/>
+          <p:nvPr/>
+        </p:nvSpPr>
+        <p:spPr>
+          <a:xfrm>
+            <a:off x="8961120" y="1737360"/>
+            <a:ext cx="2468880" cy="1097280"/>
+          </a:xfrm>
+          <a:prstGeom prst="rect">
+            <a:avLst/>
+          </a:prstGeom>
+          <a:noFill/>
+        </p:spPr>
+        <p:txBody>
+          <a:bodyPr wrap="none">
+            <a:spAutoFit/>
+          </a:bodyPr>
+          <a:lstStyle/>
+          <a:p>
+            <a:pPr algn="ctr">
+              <a:defRPr sz="2800" b="1">
+                <a:solidFill>
+                  <a:srgbClr val="0B192C"/>
+                </a:solidFill>
+              </a:defRPr>
+            </a:pPr>
+            <a:r>
+              <a:t>10 Sheets</a:t>
+            </a:r>
+          </a:p>
+          <a:p>
+            <a:pPr algn="ctr">
+              <a:defRPr sz="1200">
+                <a:solidFill>
+                  <a:srgbClr val="1E293B"/>
+                </a:solidFill>
+              </a:defRPr>
+            </a:pPr>
+            <a:r>
+              <a:t>Audit-Ready Excel Workbooks</a:t>
+            </a:r>
+          </a:p>
+        </p:txBody>
+      </p:sp>
+      <p:sp>
+        <p:nvSpPr>
+          <p:cNvPr id="12" name="Rounded Rectangle 11"/>
+          <p:cNvSpPr/>
+          <p:nvPr/>
+        </p:nvSpPr>
+        <p:spPr>
+          <a:xfrm>
+            <a:off x="731520" y="3474720"/>
+            <a:ext cx="10698480" cy="2834640"/>
+          </a:xfrm>
+          <a:prstGeom prst="roundRect">
+            <a:avLst/>
+          </a:prstGeom>
+          <a:solidFill>
+            <a:srgbClr val="FFFFFF"/>
+          </a:solidFill>
+          <a:ln w="19050">
+            <a:solidFill>
+              <a:srgbClr val="E2E8F0"/>
+            </a:solidFill>
+          </a:ln>
+        </p:spPr>
+        <p:style>
+          <a:lnRef idx="1">
+            <a:schemeClr val="accent1"/>
+          </a:lnRef>
+          <a:fillRef idx="3">
+            <a:schemeClr val="accent1"/>
+          </a:fillRef>
+          <a:effectRef idx="2">
+            <a:schemeClr val="accent1"/>
+          </a:effectRef>
+          <a:fontRef idx="minor">
+            <a:schemeClr val="lt1"/>
+          </a:fontRef>
+        </p:style>
+        <p:txBody>
+          <a:bodyPr rtlCol="0" anchor="ctr"/>
+          <a:lstStyle/>
+          <a:p>
+            <a:pPr algn="ctr"/>
+          </a:p>
+        </p:txBody>
+      </p:sp>
+      <p:sp>
+        <p:nvSpPr>
           <p:cNvPr id="13" name="TextBox 12"/>
           <p:cNvSpPr txBox="1"/>
           <p:nvPr/>
         </p:nvSpPr>
         <p:spPr>
           <a:xfrm>
-            <a:off x="914400" y="3840480"/>
-            <a:ext cx="10332720" cy="2194560"/>
+            <a:off x="914400" y="3657600"/>
+            <a:ext cx="10332720" cy="2468880"/>
           </a:xfrm>
           <a:prstGeom prst="rect">
             <a:avLst/>
@@ -4400,14 +5585,14 @@
           <a:lstStyle/>
           <a:p>
             <a:pPr>
-              <a:defRPr sz="1800" b="1">
+              <a:defRPr sz="1700" b="1">
                 <a:solidFill>
                   <a:srgbClr val="0B192C"/>
                 </a:solidFill>
               </a:defRPr>
             </a:pPr>
             <a:r>
-              <a:t>Summary: Enterprise UI Intelligence Ready for Scale</a:t>
+              <a:t>Executive Value Summary: Why Enterprises Choose PiOne Testmate</a:t>
             </a:r>
           </a:p>
           <a:p>
@@ -4415,14 +5600,14 @@
               <a:spcBef>
                 <a:spcPts val="400"/>
               </a:spcBef>
-              <a:defRPr sz="1250">
+              <a:defRPr sz="1200">
                 <a:solidFill>
                   <a:srgbClr val="1E293B"/>
                 </a:solidFill>
               </a:defRPr>
             </a:pPr>
             <a:r>
-              <a:t>• Deterministic Grounding: Playwright provides rock-solid UI discovery and execution; AI provides intelligent scenario planning.</a:t>
+              <a:t>• 75% Reduction in Test Maintenance: 12-attribute resilient fingerprinting eliminates flaky selector breakdowns.</a:t>
             </a:r>
           </a:p>
           <a:p>
@@ -4430,14 +5615,14 @@
               <a:spcBef>
                 <a:spcPts val="400"/>
               </a:spcBef>
-              <a:defRPr sz="1250">
+              <a:defRPr sz="1200">
                 <a:solidFill>
                   <a:srgbClr val="1E293B"/>
                 </a:solidFill>
               </a:defRPr>
             </a:pPr>
             <a:r>
-              <a:t>• Enterprise Governance: Parking lot safety policies, SSRF IP-level guardrails, and typed DELETE safeguards eliminate business risk.</a:t>
+              <a:t>• Zero-Risk Safety Architecture: Parking lot action segregation and SSRF IP-level guards protect production data.</a:t>
             </a:r>
           </a:p>
           <a:p>
@@ -4445,14 +5630,14 @@
               <a:spcBef>
                 <a:spcPts val="400"/>
               </a:spcBef>
-              <a:defRPr sz="1250">
+              <a:defRPr sz="1200">
                 <a:solidFill>
                   <a:srgbClr val="1E293B"/>
                 </a:solidFill>
               </a:defRPr>
             </a:pPr>
             <a:r>
-              <a:t>• Lifecycle Resiliency: Checkpoints, resumable runs, and in-place session refresh ensure tests complete reliably.</a:t>
+              <a:t>• Session &amp; State Resiliency: In-place session refresh (/session/refresh) and atomic checkpoints guarantee test completion.</a:t>
             </a:r>
           </a:p>
           <a:p>
@@ -4460,14 +5645,29 @@
               <a:spcBef>
                 <a:spcPts val="400"/>
               </a:spcBef>
-              <a:defRPr sz="1250">
+              <a:defRPr sz="1200">
                 <a:solidFill>
                   <a:srgbClr val="1E293B"/>
                 </a:solidFill>
               </a:defRPr>
             </a:pPr>
             <a:r>
-              <a:t>• Turnkey Compliance: Multi-format exports and 10-sheet workbooks satisfy both technical QA and regulatory audit requirements.</a:t>
+              <a:t>• Neutral AI Economics: Deploy with local open-weights models (Ollama), cloud APIs, or offline rules—zero vendor lock-in.</a:t>
+            </a:r>
+          </a:p>
+          <a:p>
+            <a:pPr>
+              <a:spcBef>
+                <a:spcPts val="400"/>
+              </a:spcBef>
+              <a:defRPr sz="1200">
+                <a:solidFill>
+                  <a:srgbClr val="1E293B"/>
+                </a:solidFill>
+              </a:defRPr>
+            </a:pPr>
+            <a:r>
+              <a:t>• Turnkey Compliance: Standard 10-sheet workbooks, step screenshots, and OWASP Top 10 security reviews satisfy technical and regulatory audits.</a:t>
             </a:r>
           </a:p>
         </p:txBody>
@@ -4498,8 +5698,8 @@
         </p:nvSpPr>
         <p:spPr>
           <a:xfrm>
-            <a:off x="731520" y="457200"/>
-            <a:ext cx="10698480" cy="365760"/>
+            <a:off x="731520" y="411480"/>
+            <a:ext cx="10698480" cy="320040"/>
           </a:xfrm>
           <a:prstGeom prst="rect">
             <a:avLst/>
@@ -4513,14 +5713,14 @@
           <a:lstStyle/>
           <a:p>
             <a:pPr>
-              <a:defRPr sz="1100" b="1">
+              <a:defRPr sz="1000" b="1">
                 <a:solidFill>
                   <a:srgbClr val="2563EB"/>
                 </a:solidFill>
               </a:defRPr>
             </a:pPr>
             <a:r>
-              <a:t>PROBLEM STATEMENT</a:t>
+              <a:t>EXECUTIVE PROBLEM STATEMENT</a:t>
             </a:r>
           </a:p>
         </p:txBody>
@@ -4533,8 +5733,8 @@
         </p:nvSpPr>
         <p:spPr>
           <a:xfrm>
-            <a:off x="731520" y="777240"/>
-            <a:ext cx="10698480" cy="640080"/>
+            <a:off x="731520" y="685800"/>
+            <a:ext cx="10698480" cy="594360"/>
           </a:xfrm>
           <a:prstGeom prst="rect">
             <a:avLst/>
@@ -4548,14 +5748,14 @@
           <a:lstStyle/>
           <a:p>
             <a:pPr>
-              <a:defRPr sz="2400" b="1">
+              <a:defRPr sz="2200" b="1">
                 <a:solidFill>
                   <a:srgbClr val="0B192C"/>
                 </a:solidFill>
               </a:defRPr>
             </a:pPr>
             <a:r>
-              <a:t>The Critical Dilemma in Enterprise UI Testing</a:t>
+              <a:t>The $3.6M Problem: The 3 Broken Pillars of UI Automation</a:t>
             </a:r>
           </a:p>
         </p:txBody>
@@ -4568,8 +5768,8 @@
         </p:nvSpPr>
         <p:spPr>
           <a:xfrm>
-            <a:off x="731520" y="1645920"/>
-            <a:ext cx="3291840" cy="4389120"/>
+            <a:off x="731520" y="1463040"/>
+            <a:ext cx="3291840" cy="4663440"/>
           </a:xfrm>
           <a:prstGeom prst="roundRect">
             <a:avLst/>
@@ -4613,8 +5813,8 @@
         </p:nvSpPr>
         <p:spPr>
           <a:xfrm>
-            <a:off x="914400" y="1828800"/>
-            <a:ext cx="2926080" cy="4023360"/>
+            <a:off x="914400" y="1645920"/>
+            <a:ext cx="2926080" cy="4297680"/>
           </a:xfrm>
           <a:prstGeom prst="rect">
             <a:avLst/>
@@ -4628,7 +5828,7 @@
           <a:lstStyle/>
           <a:p>
             <a:pPr>
-              <a:defRPr sz="1800" b="1">
+              <a:defRPr sz="1700" b="1">
                 <a:solidFill>
                   <a:srgbClr val="EF4444"/>
                 </a:solidFill>
@@ -4641,46 +5841,46 @@
           <a:p>
             <a:pPr>
               <a:spcBef>
-                <a:spcPts val="1000"/>
+                <a:spcPts val="800"/>
               </a:spcBef>
-              <a:defRPr sz="1300">
+              <a:defRPr sz="1200">
                 <a:solidFill>
                   <a:srgbClr val="1E293B"/>
                 </a:solidFill>
               </a:defRPr>
             </a:pPr>
             <a:r>
-              <a:t>• Traditional test suites rely on fragile CSS classes, relative XPaths, or dynamic attributes.</a:t>
+              <a:t>• Traditional suites bind to dynamic CSS or relative XPaths.</a:t>
             </a:r>
           </a:p>
           <a:p>
             <a:pPr>
               <a:spcBef>
-                <a:spcPts val="1000"/>
+                <a:spcPts val="800"/>
               </a:spcBef>
-              <a:defRPr sz="1300">
+              <a:defRPr sz="1200">
                 <a:solidFill>
                   <a:srgbClr val="1E293B"/>
                 </a:solidFill>
               </a:defRPr>
             </a:pPr>
             <a:r>
-              <a:t>• Minor developer styling or wrapper updates break 40% of automation suites.</a:t>
+              <a:t>• Minor styling, wrapper, or Tailwind updates break 40% of test suites.</a:t>
             </a:r>
           </a:p>
           <a:p>
             <a:pPr>
               <a:spcBef>
-                <a:spcPts val="1000"/>
+                <a:spcPts val="800"/>
               </a:spcBef>
-              <a:defRPr sz="1300">
+              <a:defRPr sz="1200">
                 <a:solidFill>
                   <a:srgbClr val="1E293B"/>
                 </a:solidFill>
               </a:defRPr>
             </a:pPr>
             <a:r>
-              <a:t>• Engineers waste dozens of hours updating script locators rather than testing product logic.</a:t>
+              <a:t>• Teams waste hundreds of hours fixing locators instead of testing product features.</a:t>
             </a:r>
           </a:p>
         </p:txBody>
@@ -4693,8 +5893,8 @@
         </p:nvSpPr>
         <p:spPr>
           <a:xfrm>
-            <a:off x="4389120" y="1645920"/>
-            <a:ext cx="3291840" cy="4389120"/>
+            <a:off x="4389120" y="1463040"/>
+            <a:ext cx="3291840" cy="4663440"/>
           </a:xfrm>
           <a:prstGeom prst="roundRect">
             <a:avLst/>
@@ -4738,8 +5938,8 @@
         </p:nvSpPr>
         <p:spPr>
           <a:xfrm>
-            <a:off x="4572000" y="1828800"/>
-            <a:ext cx="2926080" cy="4023360"/>
+            <a:off x="4572000" y="1645920"/>
+            <a:ext cx="2926080" cy="4297680"/>
           </a:xfrm>
           <a:prstGeom prst="rect">
             <a:avLst/>
@@ -4753,59 +5953,59 @@
           <a:lstStyle/>
           <a:p>
             <a:pPr>
-              <a:defRPr sz="1800" b="1">
+              <a:defRPr sz="1700" b="1">
                 <a:solidFill>
                   <a:srgbClr val="F59E0B"/>
                 </a:solidFill>
               </a:defRPr>
             </a:pPr>
             <a:r>
-              <a:t>2. Ungrounded AI Hallucination</a:t>
+              <a:t>2. Ungrounded AI Hallucinations</a:t>
             </a:r>
           </a:p>
           <a:p>
             <a:pPr>
               <a:spcBef>
-                <a:spcPts val="1000"/>
+                <a:spcPts val="800"/>
               </a:spcBef>
-              <a:defRPr sz="1300">
+              <a:defRPr sz="1200">
                 <a:solidFill>
                   <a:srgbClr val="1E293B"/>
                 </a:solidFill>
               </a:defRPr>
             </a:pPr>
             <a:r>
-              <a:t>• Unconstrained generative agents attempting to 'click around' execute destructive actions.</a:t>
+              <a:t>• Raw AI agents attempting to drive web browsers click destructive actions.</a:t>
             </a:r>
           </a:p>
           <a:p>
             <a:pPr>
               <a:spcBef>
-                <a:spcPts val="1000"/>
+                <a:spcPts val="800"/>
               </a:spcBef>
-              <a:defRPr sz="1300">
+              <a:defRPr sz="1200">
                 <a:solidFill>
                   <a:srgbClr val="1E293B"/>
                 </a:solidFill>
               </a:defRPr>
             </a:pPr>
             <a:r>
-              <a:t>• Accidental checkout, account deletion, or external redirects cause real business loss.</a:t>
+              <a:t>• Accidental checkouts, data deletions, and credential leaks cause business risk.</a:t>
             </a:r>
           </a:p>
           <a:p>
             <a:pPr>
               <a:spcBef>
-                <a:spcPts val="1000"/>
+                <a:spcPts val="800"/>
               </a:spcBef>
-              <a:defRPr sz="1300">
+              <a:defRPr sz="1200">
                 <a:solidFill>
                   <a:srgbClr val="1E293B"/>
                 </a:solidFill>
               </a:defRPr>
             </a:pPr>
             <a:r>
-              <a:t>• AI models hallucinate non-existent button selectors, resulting in false test coverage.</a:t>
+              <a:t>• AI models hallucinate non-existent element locators, generating false coverage.</a:t>
             </a:r>
           </a:p>
         </p:txBody>
@@ -4818,8 +6018,8 @@
         </p:nvSpPr>
         <p:spPr>
           <a:xfrm>
-            <a:off x="8046720" y="1645920"/>
-            <a:ext cx="3291840" cy="4389120"/>
+            <a:off x="8046720" y="1463040"/>
+            <a:ext cx="3291840" cy="4663440"/>
           </a:xfrm>
           <a:prstGeom prst="roundRect">
             <a:avLst/>
@@ -4863,8 +6063,8 @@
         </p:nvSpPr>
         <p:spPr>
           <a:xfrm>
-            <a:off x="8229600" y="1828800"/>
-            <a:ext cx="2926080" cy="4023360"/>
+            <a:off x="8229600" y="1645920"/>
+            <a:ext cx="2926080" cy="4297680"/>
           </a:xfrm>
           <a:prstGeom prst="rect">
             <a:avLst/>
@@ -4878,7 +6078,7 @@
           <a:lstStyle/>
           <a:p>
             <a:pPr>
-              <a:defRPr sz="1800" b="1">
+              <a:defRPr sz="1700" b="1">
                 <a:solidFill>
                   <a:srgbClr val="2563EB"/>
                 </a:solidFill>
@@ -4891,46 +6091,46 @@
           <a:p>
             <a:pPr>
               <a:spcBef>
-                <a:spcPts val="1000"/>
+                <a:spcPts val="800"/>
               </a:spcBef>
-              <a:defRPr sz="1300">
+              <a:defRPr sz="1200">
                 <a:solidFill>
                   <a:srgbClr val="1E293B"/>
                 </a:solidFill>
               </a:defRPr>
             </a:pPr>
             <a:r>
-              <a:t>• In modern token-based Single Page Apps, tokens expire silently during long test runs.</a:t>
+              <a:t>• In modern SPAs, authentication tokens expire silently during long crawler passes.</a:t>
             </a:r>
           </a:p>
           <a:p>
             <a:pPr>
               <a:spcBef>
-                <a:spcPts val="1000"/>
+                <a:spcPts val="800"/>
               </a:spcBef>
-              <a:defRPr sz="1300">
+              <a:defRPr sz="1200">
                 <a:solidFill>
                   <a:srgbClr val="1E293B"/>
                 </a:solidFill>
               </a:defRPr>
             </a:pPr>
             <a:r>
-              <a:t>• A 2-hour crawl or regression suite fails completely when a cookie expires.</a:t>
+              <a:t>• A 2-hour end-to-end regression fails completely when a cookie expires.</a:t>
             </a:r>
           </a:p>
           <a:p>
             <a:pPr>
               <a:spcBef>
-                <a:spcPts val="1000"/>
+                <a:spcPts val="800"/>
               </a:spcBef>
-              <a:defRPr sz="1300">
+              <a:defRPr sz="1200">
                 <a:solidFill>
                   <a:srgbClr val="1E293B"/>
                 </a:solidFill>
               </a:defRPr>
             </a:pPr>
             <a:r>
-              <a:t>• No recovery mechanism existed to renew sessions in-place without restarting from scratch.</a:t>
+              <a:t>• Legacy tools discard all progress and force engineers to restart from scratch.</a:t>
             </a:r>
           </a:p>
         </p:txBody>
@@ -4961,8 +6161,8 @@
         </p:nvSpPr>
         <p:spPr>
           <a:xfrm>
-            <a:off x="731520" y="457200"/>
-            <a:ext cx="10698480" cy="365760"/>
+            <a:off x="731520" y="411480"/>
+            <a:ext cx="10698480" cy="320040"/>
           </a:xfrm>
           <a:prstGeom prst="rect">
             <a:avLst/>
@@ -4976,14 +6176,14 @@
           <a:lstStyle/>
           <a:p>
             <a:pPr>
-              <a:defRPr sz="1100" b="1">
+              <a:defRPr sz="1000" b="1">
                 <a:solidFill>
                   <a:srgbClr val="2563EB"/>
                 </a:solidFill>
               </a:defRPr>
             </a:pPr>
             <a:r>
-              <a:t>ARCHITECTURAL PARADIGM</a:t>
+              <a:t>ARCHITECTURE PARADIGM</a:t>
             </a:r>
           </a:p>
         </p:txBody>
@@ -4996,8 +6196,8 @@
         </p:nvSpPr>
         <p:spPr>
           <a:xfrm>
-            <a:off x="731520" y="777240"/>
-            <a:ext cx="10698480" cy="640080"/>
+            <a:off x="731520" y="685800"/>
+            <a:ext cx="10698480" cy="594360"/>
           </a:xfrm>
           <a:prstGeom prst="rect">
             <a:avLst/>
@@ -5011,7 +6211,7 @@
           <a:lstStyle/>
           <a:p>
             <a:pPr>
-              <a:defRPr sz="2400" b="1">
+              <a:defRPr sz="2200" b="1">
                 <a:solidFill>
                   <a:srgbClr val="0B192C"/>
                 </a:solidFill>
@@ -5031,7 +6231,7 @@
         </p:nvSpPr>
         <p:spPr>
           <a:xfrm>
-            <a:off x="731520" y="1645920"/>
+            <a:off x="731520" y="1463040"/>
             <a:ext cx="10698480" cy="1005840"/>
           </a:xfrm>
           <a:prstGeom prst="roundRect">
@@ -5076,7 +6276,7 @@
         </p:nvSpPr>
         <p:spPr>
           <a:xfrm>
-            <a:off x="914400" y="1737360"/>
+            <a:off x="914400" y="1554480"/>
             <a:ext cx="10332720" cy="822960"/>
           </a:xfrm>
           <a:prstGeom prst="rect">
@@ -5091,7 +6291,7 @@
           <a:lstStyle/>
           <a:p>
             <a:pPr>
-              <a:defRPr sz="1500" b="1">
+              <a:defRPr sz="1450" b="1">
                 <a:solidFill>
                   <a:srgbClr val="2563EB"/>
                 </a:solidFill>
@@ -5115,8 +6315,8 @@
         </p:nvSpPr>
         <p:spPr>
           <a:xfrm>
-            <a:off x="731520" y="2926080"/>
-            <a:ext cx="5120640" cy="3291840"/>
+            <a:off x="731520" y="2651760"/>
+            <a:ext cx="5120640" cy="3657600"/>
           </a:xfrm>
           <a:prstGeom prst="roundRect">
             <a:avLst/>
@@ -5160,8 +6360,8 @@
         </p:nvSpPr>
         <p:spPr>
           <a:xfrm>
-            <a:off x="914400" y="3108960"/>
-            <a:ext cx="4754880" cy="2926080"/>
+            <a:off x="914400" y="2834640"/>
+            <a:ext cx="4754880" cy="3291840"/>
           </a:xfrm>
           <a:prstGeom prst="rect">
             <a:avLst/>
@@ -5175,7 +6375,7 @@
           <a:lstStyle/>
           <a:p>
             <a:pPr>
-              <a:defRPr sz="1800" b="1">
+              <a:defRPr sz="1700" b="1">
                 <a:solidFill>
                   <a:srgbClr val="0B192C"/>
                 </a:solidFill>
@@ -5190,7 +6390,7 @@
               <a:spcBef>
                 <a:spcPts val="600"/>
               </a:spcBef>
-              <a:defRPr sz="1300">
+              <a:defRPr sz="1200">
                 <a:solidFill>
                   <a:srgbClr val="1E293B"/>
                 </a:solidFill>
@@ -5205,7 +6405,7 @@
               <a:spcBef>
                 <a:spcPts val="600"/>
               </a:spcBef>
-              <a:defRPr sz="1300">
+              <a:defRPr sz="1200">
                 <a:solidFill>
                   <a:srgbClr val="1E293B"/>
                 </a:solidFill>
@@ -5220,7 +6420,7 @@
               <a:spcBef>
                 <a:spcPts val="600"/>
               </a:spcBef>
-              <a:defRPr sz="1300">
+              <a:defRPr sz="1200">
                 <a:solidFill>
                   <a:srgbClr val="1E293B"/>
                 </a:solidFill>
@@ -5235,7 +6435,7 @@
               <a:spcBef>
                 <a:spcPts val="600"/>
               </a:spcBef>
-              <a:defRPr sz="1300">
+              <a:defRPr sz="1200">
                 <a:solidFill>
                   <a:srgbClr val="1E293B"/>
                 </a:solidFill>
@@ -5250,7 +6450,7 @@
               <a:spcBef>
                 <a:spcPts val="600"/>
               </a:spcBef>
-              <a:defRPr sz="1300">
+              <a:defRPr sz="1200">
                 <a:solidFill>
                   <a:srgbClr val="1E293B"/>
                 </a:solidFill>
@@ -5270,8 +6470,8 @@
         </p:nvSpPr>
         <p:spPr>
           <a:xfrm>
-            <a:off x="6309360" y="2926080"/>
-            <a:ext cx="5120640" cy="3291840"/>
+            <a:off x="6309360" y="2651760"/>
+            <a:ext cx="5120640" cy="3657600"/>
           </a:xfrm>
           <a:prstGeom prst="roundRect">
             <a:avLst/>
@@ -5315,8 +6515,8 @@
         </p:nvSpPr>
         <p:spPr>
           <a:xfrm>
-            <a:off x="6492240" y="3108960"/>
-            <a:ext cx="4754880" cy="2926080"/>
+            <a:off x="6492240" y="2834640"/>
+            <a:ext cx="4754880" cy="3291840"/>
           </a:xfrm>
           <a:prstGeom prst="rect">
             <a:avLst/>
@@ -5330,7 +6530,7 @@
           <a:lstStyle/>
           <a:p>
             <a:pPr>
-              <a:defRPr sz="1800" b="1">
+              <a:defRPr sz="1700" b="1">
                 <a:solidFill>
                   <a:srgbClr val="0B192C"/>
                 </a:solidFill>
@@ -5345,7 +6545,7 @@
               <a:spcBef>
                 <a:spcPts val="600"/>
               </a:spcBef>
-              <a:defRPr sz="1300">
+              <a:defRPr sz="1200">
                 <a:solidFill>
                   <a:srgbClr val="1E293B"/>
                 </a:solidFill>
@@ -5360,7 +6560,7 @@
               <a:spcBef>
                 <a:spcPts val="600"/>
               </a:spcBef>
-              <a:defRPr sz="1300">
+              <a:defRPr sz="1200">
                 <a:solidFill>
                   <a:srgbClr val="1E293B"/>
                 </a:solidFill>
@@ -5375,7 +6575,7 @@
               <a:spcBef>
                 <a:spcPts val="600"/>
               </a:spcBef>
-              <a:defRPr sz="1300">
+              <a:defRPr sz="1200">
                 <a:solidFill>
                   <a:srgbClr val="1E293B"/>
                 </a:solidFill>
@@ -5390,7 +6590,7 @@
               <a:spcBef>
                 <a:spcPts val="600"/>
               </a:spcBef>
-              <a:defRPr sz="1300">
+              <a:defRPr sz="1200">
                 <a:solidFill>
                   <a:srgbClr val="1E293B"/>
                 </a:solidFill>
@@ -5405,7 +6605,7 @@
               <a:spcBef>
                 <a:spcPts val="600"/>
               </a:spcBef>
-              <a:defRPr sz="1300">
+              <a:defRPr sz="1200">
                 <a:solidFill>
                   <a:srgbClr val="1E293B"/>
                 </a:solidFill>
@@ -5443,8 +6643,8 @@
         </p:nvSpPr>
         <p:spPr>
           <a:xfrm>
-            <a:off x="731520" y="457200"/>
-            <a:ext cx="10698480" cy="365760"/>
+            <a:off x="731520" y="411480"/>
+            <a:ext cx="10698480" cy="320040"/>
           </a:xfrm>
           <a:prstGeom prst="rect">
             <a:avLst/>
@@ -5458,14 +6658,14 @@
           <a:lstStyle/>
           <a:p>
             <a:pPr>
-              <a:defRPr sz="1100" b="1">
+              <a:defRPr sz="1000" b="1">
                 <a:solidFill>
                   <a:srgbClr val="2563EB"/>
                 </a:solidFill>
               </a:defRPr>
             </a:pPr>
             <a:r>
-              <a:t>WORKFLOW PROGRESSION</a:t>
+              <a:t>STEP 1: SCAN APPLICATION</a:t>
             </a:r>
           </a:p>
         </p:txBody>
@@ -5478,8 +6678,8 @@
         </p:nvSpPr>
         <p:spPr>
           <a:xfrm>
-            <a:off x="731520" y="777240"/>
-            <a:ext cx="10698480" cy="640080"/>
+            <a:off x="731520" y="685800"/>
+            <a:ext cx="10698480" cy="594360"/>
           </a:xfrm>
           <a:prstGeom prst="rect">
             <a:avLst/>
@@ -5493,14 +6693,14 @@
           <a:lstStyle/>
           <a:p>
             <a:pPr>
-              <a:defRPr sz="2400" b="1">
+              <a:defRPr sz="2200" b="1">
                 <a:solidFill>
                   <a:srgbClr val="0B192C"/>
                 </a:solidFill>
               </a:defRPr>
             </a:pPr>
             <a:r>
-              <a:t>The 8-Step Enterprise Test Automation Journey</a:t>
+              <a:t>Step 1: Zero-Trust Target Setup &amp; SSRF Protection</a:t>
             </a:r>
           </a:p>
         </p:txBody>
@@ -5513,8 +6713,8 @@
         </p:nvSpPr>
         <p:spPr>
           <a:xfrm>
-            <a:off x="731520" y="1645920"/>
-            <a:ext cx="2468880" cy="2011680"/>
+            <a:off x="731520" y="1463040"/>
+            <a:ext cx="4663440" cy="4846320"/>
           </a:xfrm>
           <a:prstGeom prst="roundRect">
             <a:avLst/>
@@ -5558,8 +6758,8 @@
         </p:nvSpPr>
         <p:spPr>
           <a:xfrm>
-            <a:off x="868680" y="1783080"/>
-            <a:ext cx="2194560" cy="1737360"/>
+            <a:off x="914400" y="1645920"/>
+            <a:ext cx="4297680" cy="4480560"/>
           </a:xfrm>
           <a:prstGeom prst="rect">
             <a:avLst/>
@@ -5573,6 +6773,81 @@
           <a:lstStyle/>
           <a:p>
             <a:pPr>
+              <a:defRPr sz="1600" b="1">
+                <a:solidFill>
+                  <a:srgbClr val="0B192C"/>
+                </a:solidFill>
+              </a:defRPr>
+            </a:pPr>
+            <a:r>
+              <a:t>Target Origin Locking with Kernel-Level SSRF Guardrails</a:t>
+            </a:r>
+          </a:p>
+          <a:p>
+            <a:pPr>
+              <a:spcBef>
+                <a:spcPts val="800"/>
+              </a:spcBef>
+              <a:defRPr sz="1150">
+                <a:solidFill>
+                  <a:srgbClr val="1E293B"/>
+                </a:solidFill>
+              </a:defRPr>
+            </a:pPr>
+            <a:r>
+              <a:t>✔ Strict Origin Validation: Locks the crawler to the exact application origin, preventing cross-domain creeping.</a:t>
+            </a:r>
+          </a:p>
+          <a:p>
+            <a:pPr>
+              <a:spcBef>
+                <a:spcPts val="800"/>
+              </a:spcBef>
+              <a:defRPr sz="1150">
+                <a:solidFill>
+                  <a:srgbClr val="1E293B"/>
+                </a:solidFill>
+              </a:defRPr>
+            </a:pPr>
+            <a:r>
+              <a:t>✔ SSRF IP-Level Guard: Automatically blocks RFC 1918 private IPs, loopbacks, and cloud metadata (169.254.169.254).</a:t>
+            </a:r>
+          </a:p>
+          <a:p>
+            <a:pPr>
+              <a:spcBef>
+                <a:spcPts val="800"/>
+              </a:spcBef>
+              <a:defRPr sz="1150">
+                <a:solidFill>
+                  <a:srgbClr val="1E293B"/>
+                </a:solidFill>
+              </a:defRPr>
+            </a:pPr>
+            <a:r>
+              <a:t>✔ Zero Credential Storage: Passwords and tokens are never stored in localStorage, URLs, or checkpoints.</a:t>
+            </a:r>
+          </a:p>
+          <a:p>
+            <a:pPr>
+              <a:spcBef>
+                <a:spcPts val="800"/>
+              </a:spcBef>
+              <a:defRPr sz="1150">
+                <a:solidFill>
+                  <a:srgbClr val="1E293B"/>
+                </a:solidFill>
+              </a:defRPr>
+            </a:pPr>
+            <a:r>
+              <a:t>✔ Segmented Mode Switcher: Toggle between Live Target Scan and 100% Offline Mock/Demo Simulation.</a:t>
+            </a:r>
+          </a:p>
+          <a:p>
+            <a:pPr>
+              <a:spcBef>
+                <a:spcPts val="1400"/>
+              </a:spcBef>
               <a:defRPr sz="1100" b="1">
                 <a:solidFill>
                   <a:srgbClr val="2563EB"/>
@@ -5580,37 +6855,7 @@
               </a:defRPr>
             </a:pPr>
             <a:r>
-              <a:t>STEP 1</a:t>
-            </a:r>
-          </a:p>
-          <a:p>
-            <a:pPr>
-              <a:spcBef>
-                <a:spcPts val="200"/>
-              </a:spcBef>
-              <a:defRPr sz="1500" b="1">
-                <a:solidFill>
-                  <a:srgbClr val="0B192C"/>
-                </a:solidFill>
-              </a:defRPr>
-            </a:pPr>
-            <a:r>
-              <a:t>Scan App</a:t>
-            </a:r>
-          </a:p>
-          <a:p>
-            <a:pPr>
-              <a:spcBef>
-                <a:spcPts val="600"/>
-              </a:spcBef>
-              <a:defRPr sz="1100">
-                <a:solidFill>
-                  <a:srgbClr val="1E293B"/>
-                </a:solidFill>
-              </a:defRPr>
-            </a:pPr>
-            <a:r>
-              <a:t>SSRF validation, credentials &amp; target origin lock.</a:t>
+              <a:t>🛡 Enterprise Guarantee: Zero internal network leakage and absolute target isolation.</a:t>
             </a:r>
           </a:p>
         </p:txBody>
@@ -5623,8 +6868,8 @@
         </p:nvSpPr>
         <p:spPr>
           <a:xfrm>
-            <a:off x="3429000" y="1645920"/>
-            <a:ext cx="2468880" cy="2011680"/>
+            <a:off x="5504688" y="1389888"/>
+            <a:ext cx="5998464" cy="4846320"/>
           </a:xfrm>
           <a:prstGeom prst="roundRect">
             <a:avLst/>
@@ -5634,7 +6879,7 @@
           </a:solidFill>
           <a:ln w="19050">
             <a:solidFill>
-              <a:srgbClr val="E2E8F0"/>
+              <a:srgbClr val="2563EB"/>
             </a:solidFill>
           </a:ln>
         </p:spPr>
@@ -5660,16 +6905,40 @@
           </a:p>
         </p:txBody>
       </p:sp>
-      <p:sp>
-        <p:nvSpPr>
-          <p:cNvPr id="7" name="TextBox 6"/>
+      <p:pic>
+        <p:nvPicPr>
+          <p:cNvPr id="7" name="Picture 6" descr="01_scan_application.png"/>
+          <p:cNvPicPr>
+            <a:picLocks noChangeAspect="1"/>
+          </p:cNvPicPr>
+          <p:nvPr/>
+        </p:nvPicPr>
+        <p:blipFill>
+          <a:blip r:embed="rId2"/>
+          <a:stretch>
+            <a:fillRect/>
+          </a:stretch>
+        </p:blipFill>
+        <p:spPr>
+          <a:xfrm>
+            <a:off x="5577840" y="1463040"/>
+            <a:ext cx="5852160" cy="4297680"/>
+          </a:xfrm>
+          <a:prstGeom prst="rect">
+            <a:avLst/>
+          </a:prstGeom>
+        </p:spPr>
+      </p:pic>
+      <p:sp>
+        <p:nvSpPr>
+          <p:cNvPr id="8" name="TextBox 7"/>
           <p:cNvSpPr txBox="1"/>
           <p:nvPr/>
         </p:nvSpPr>
         <p:spPr>
           <a:xfrm>
-            <a:off x="3566160" y="1783080"/>
-            <a:ext cx="2194560" cy="1737360"/>
+            <a:off x="5577840" y="5806440"/>
+            <a:ext cx="5852160" cy="365760"/>
           </a:xfrm>
           <a:prstGeom prst="rect">
             <a:avLst/>
@@ -5677,710 +6946,20 @@
           <a:noFill/>
         </p:spPr>
         <p:txBody>
-          <a:bodyPr wrap="square">
+          <a:bodyPr wrap="none">
             <a:spAutoFit/>
           </a:bodyPr>
           <a:lstStyle/>
           <a:p>
-            <a:pPr>
-              <a:defRPr sz="1100" b="1">
-                <a:solidFill>
-                  <a:srgbClr val="2563EB"/>
-                </a:solidFill>
-              </a:defRPr>
-            </a:pPr>
-            <a:r>
-              <a:t>STEP 2</a:t>
-            </a:r>
-          </a:p>
-          <a:p>
-            <a:pPr>
-              <a:spcBef>
-                <a:spcPts val="200"/>
-              </a:spcBef>
-              <a:defRPr sz="1500" b="1">
-                <a:solidFill>
-                  <a:srgbClr val="0B192C"/>
-                </a:solidFill>
-              </a:defRPr>
-            </a:pPr>
-            <a:r>
-              <a:t>Choose Modules</a:t>
-            </a:r>
-          </a:p>
-          <a:p>
-            <a:pPr>
-              <a:spcBef>
-                <a:spcPts val="600"/>
-              </a:spcBef>
-              <a:defRPr sz="1100">
-                <a:solidFill>
-                  <a:srgbClr val="1E293B"/>
-                </a:solidFill>
-              </a:defRPr>
-            </a:pPr>
-            <a:r>
-              <a:t>Passive menu discovery &amp; boundary selection.</a:t>
-            </a:r>
-          </a:p>
-        </p:txBody>
-      </p:sp>
-      <p:sp>
-        <p:nvSpPr>
-          <p:cNvPr id="8" name="Rounded Rectangle 7"/>
-          <p:cNvSpPr/>
-          <p:nvPr/>
-        </p:nvSpPr>
-        <p:spPr>
-          <a:xfrm>
-            <a:off x="6126480" y="1645920"/>
-            <a:ext cx="2468880" cy="2011680"/>
-          </a:xfrm>
-          <a:prstGeom prst="roundRect">
-            <a:avLst/>
-          </a:prstGeom>
-          <a:solidFill>
-            <a:srgbClr val="FFFFFF"/>
-          </a:solidFill>
-          <a:ln w="19050">
-            <a:solidFill>
-              <a:srgbClr val="E2E8F0"/>
-            </a:solidFill>
-          </a:ln>
-        </p:spPr>
-        <p:style>
-          <a:lnRef idx="1">
-            <a:schemeClr val="accent1"/>
-          </a:lnRef>
-          <a:fillRef idx="3">
-            <a:schemeClr val="accent1"/>
-          </a:fillRef>
-          <a:effectRef idx="2">
-            <a:schemeClr val="accent1"/>
-          </a:effectRef>
-          <a:fontRef idx="minor">
-            <a:schemeClr val="lt1"/>
-          </a:fontRef>
-        </p:style>
-        <p:txBody>
-          <a:bodyPr rtlCol="0" anchor="ctr"/>
-          <a:lstStyle/>
-          <a:p>
-            <a:pPr algn="ctr"/>
-          </a:p>
-        </p:txBody>
-      </p:sp>
-      <p:sp>
-        <p:nvSpPr>
-          <p:cNvPr id="9" name="TextBox 8"/>
-          <p:cNvSpPr txBox="1"/>
-          <p:nvPr/>
-        </p:nvSpPr>
-        <p:spPr>
-          <a:xfrm>
-            <a:off x="6263640" y="1783080"/>
-            <a:ext cx="2194560" cy="1737360"/>
-          </a:xfrm>
-          <a:prstGeom prst="rect">
-            <a:avLst/>
-          </a:prstGeom>
-          <a:noFill/>
-        </p:spPr>
-        <p:txBody>
-          <a:bodyPr wrap="square">
-            <a:spAutoFit/>
-          </a:bodyPr>
-          <a:lstStyle/>
-          <a:p>
-            <a:pPr>
-              <a:defRPr sz="1100" b="1">
-                <a:solidFill>
-                  <a:srgbClr val="2563EB"/>
-                </a:solidFill>
-              </a:defRPr>
-            </a:pPr>
-            <a:r>
-              <a:t>STEP 3</a:t>
-            </a:r>
-          </a:p>
-          <a:p>
-            <a:pPr>
-              <a:spcBef>
-                <a:spcPts val="200"/>
-              </a:spcBef>
-              <a:defRPr sz="1500" b="1">
-                <a:solidFill>
-                  <a:srgbClr val="0B192C"/>
-                </a:solidFill>
-              </a:defRPr>
-            </a:pPr>
-            <a:r>
-              <a:t>Manual Review</a:t>
-            </a:r>
-          </a:p>
-          <a:p>
-            <a:pPr>
-              <a:spcBef>
-                <a:spcPts val="600"/>
-              </a:spcBef>
-              <a:defRPr sz="1100">
-                <a:solidFill>
-                  <a:srgbClr val="1E293B"/>
-                </a:solidFill>
-              </a:defRPr>
-            </a:pPr>
-            <a:r>
-              <a:t>Human-in-the-loop safety confirmation gate.</a:t>
-            </a:r>
-          </a:p>
-        </p:txBody>
-      </p:sp>
-      <p:sp>
-        <p:nvSpPr>
-          <p:cNvPr id="10" name="Rounded Rectangle 9"/>
-          <p:cNvSpPr/>
-          <p:nvPr/>
-        </p:nvSpPr>
-        <p:spPr>
-          <a:xfrm>
-            <a:off x="8823960" y="1645920"/>
-            <a:ext cx="2468880" cy="2011680"/>
-          </a:xfrm>
-          <a:prstGeom prst="roundRect">
-            <a:avLst/>
-          </a:prstGeom>
-          <a:solidFill>
-            <a:srgbClr val="FFFFFF"/>
-          </a:solidFill>
-          <a:ln w="19050">
-            <a:solidFill>
-              <a:srgbClr val="E2E8F0"/>
-            </a:solidFill>
-          </a:ln>
-        </p:spPr>
-        <p:style>
-          <a:lnRef idx="1">
-            <a:schemeClr val="accent1"/>
-          </a:lnRef>
-          <a:fillRef idx="3">
-            <a:schemeClr val="accent1"/>
-          </a:fillRef>
-          <a:effectRef idx="2">
-            <a:schemeClr val="accent1"/>
-          </a:effectRef>
-          <a:fontRef idx="minor">
-            <a:schemeClr val="lt1"/>
-          </a:fontRef>
-        </p:style>
-        <p:txBody>
-          <a:bodyPr rtlCol="0" anchor="ctr"/>
-          <a:lstStyle/>
-          <a:p>
-            <a:pPr algn="ctr"/>
-          </a:p>
-        </p:txBody>
-      </p:sp>
-      <p:sp>
-        <p:nvSpPr>
-          <p:cNvPr id="11" name="TextBox 10"/>
-          <p:cNvSpPr txBox="1"/>
-          <p:nvPr/>
-        </p:nvSpPr>
-        <p:spPr>
-          <a:xfrm>
-            <a:off x="8961120" y="1783080"/>
-            <a:ext cx="2194560" cy="1737360"/>
-          </a:xfrm>
-          <a:prstGeom prst="rect">
-            <a:avLst/>
-          </a:prstGeom>
-          <a:noFill/>
-        </p:spPr>
-        <p:txBody>
-          <a:bodyPr wrap="square">
-            <a:spAutoFit/>
-          </a:bodyPr>
-          <a:lstStyle/>
-          <a:p>
-            <a:pPr>
-              <a:defRPr sz="1100" b="1">
-                <a:solidFill>
-                  <a:srgbClr val="2563EB"/>
-                </a:solidFill>
-              </a:defRPr>
-            </a:pPr>
-            <a:r>
-              <a:t>STEP 4</a:t>
-            </a:r>
-          </a:p>
-          <a:p>
-            <a:pPr>
-              <a:spcBef>
-                <a:spcPts val="200"/>
-              </a:spcBef>
-              <a:defRPr sz="1500" b="1">
-                <a:solidFill>
-                  <a:srgbClr val="0B192C"/>
-                </a:solidFill>
-              </a:defRPr>
-            </a:pPr>
-            <a:r>
-              <a:t>Deep Crawl</a:t>
-            </a:r>
-          </a:p>
-          <a:p>
-            <a:pPr>
-              <a:spcBef>
-                <a:spcPts val="600"/>
-              </a:spcBef>
-              <a:defRPr sz="1100">
-                <a:solidFill>
-                  <a:srgbClr val="1E293B"/>
-                </a:solidFill>
-              </a:defRPr>
-            </a:pPr>
-            <a:r>
-              <a:t>Sequential traversal, scrolling &amp; telemetry.</a:t>
-            </a:r>
-          </a:p>
-        </p:txBody>
-      </p:sp>
-      <p:sp>
-        <p:nvSpPr>
-          <p:cNvPr id="12" name="Rounded Rectangle 11"/>
-          <p:cNvSpPr/>
-          <p:nvPr/>
-        </p:nvSpPr>
-        <p:spPr>
-          <a:xfrm>
-            <a:off x="731520" y="3931920"/>
-            <a:ext cx="2468880" cy="2011680"/>
-          </a:xfrm>
-          <a:prstGeom prst="roundRect">
-            <a:avLst/>
-          </a:prstGeom>
-          <a:solidFill>
-            <a:srgbClr val="FFFFFF"/>
-          </a:solidFill>
-          <a:ln w="19050">
-            <a:solidFill>
-              <a:srgbClr val="E2E8F0"/>
-            </a:solidFill>
-          </a:ln>
-        </p:spPr>
-        <p:style>
-          <a:lnRef idx="1">
-            <a:schemeClr val="accent1"/>
-          </a:lnRef>
-          <a:fillRef idx="3">
-            <a:schemeClr val="accent1"/>
-          </a:fillRef>
-          <a:effectRef idx="2">
-            <a:schemeClr val="accent1"/>
-          </a:effectRef>
-          <a:fontRef idx="minor">
-            <a:schemeClr val="lt1"/>
-          </a:fontRef>
-        </p:style>
-        <p:txBody>
-          <a:bodyPr rtlCol="0" anchor="ctr"/>
-          <a:lstStyle/>
-          <a:p>
-            <a:pPr algn="ctr"/>
-          </a:p>
-        </p:txBody>
-      </p:sp>
-      <p:sp>
-        <p:nvSpPr>
-          <p:cNvPr id="13" name="TextBox 12"/>
-          <p:cNvSpPr txBox="1"/>
-          <p:nvPr/>
-        </p:nvSpPr>
-        <p:spPr>
-          <a:xfrm>
-            <a:off x="868680" y="4069080"/>
-            <a:ext cx="2194560" cy="1737360"/>
-          </a:xfrm>
-          <a:prstGeom prst="rect">
-            <a:avLst/>
-          </a:prstGeom>
-          <a:noFill/>
-        </p:spPr>
-        <p:txBody>
-          <a:bodyPr wrap="square">
-            <a:spAutoFit/>
-          </a:bodyPr>
-          <a:lstStyle/>
-          <a:p>
-            <a:pPr>
-              <a:defRPr sz="1100" b="1">
-                <a:solidFill>
-                  <a:srgbClr val="2563EB"/>
-                </a:solidFill>
-              </a:defRPr>
-            </a:pPr>
-            <a:r>
-              <a:t>STEP 5</a:t>
-            </a:r>
-          </a:p>
-          <a:p>
-            <a:pPr>
-              <a:spcBef>
-                <a:spcPts val="200"/>
-              </a:spcBef>
-              <a:defRPr sz="1500" b="1">
-                <a:solidFill>
-                  <a:srgbClr val="0B192C"/>
-                </a:solidFill>
-              </a:defRPr>
-            </a:pPr>
-            <a:r>
-              <a:t>Analyze</a:t>
-            </a:r>
-          </a:p>
-          <a:p>
-            <a:pPr>
-              <a:spcBef>
-                <a:spcPts val="600"/>
-              </a:spcBef>
-              <a:defRPr sz="1100">
-                <a:solidFill>
-                  <a:srgbClr val="1E293B"/>
-                </a:solidFill>
-              </a:defRPr>
-            </a:pPr>
-            <a:r>
-              <a:t>UI Intelligence catalog &amp; route health scoring.</a:t>
-            </a:r>
-          </a:p>
-        </p:txBody>
-      </p:sp>
-      <p:sp>
-        <p:nvSpPr>
-          <p:cNvPr id="14" name="Rounded Rectangle 13"/>
-          <p:cNvSpPr/>
-          <p:nvPr/>
-        </p:nvSpPr>
-        <p:spPr>
-          <a:xfrm>
-            <a:off x="3429000" y="3931920"/>
-            <a:ext cx="2468880" cy="2011680"/>
-          </a:xfrm>
-          <a:prstGeom prst="roundRect">
-            <a:avLst/>
-          </a:prstGeom>
-          <a:solidFill>
-            <a:srgbClr val="FFFFFF"/>
-          </a:solidFill>
-          <a:ln w="19050">
-            <a:solidFill>
-              <a:srgbClr val="E2E8F0"/>
-            </a:solidFill>
-          </a:ln>
-        </p:spPr>
-        <p:style>
-          <a:lnRef idx="1">
-            <a:schemeClr val="accent1"/>
-          </a:lnRef>
-          <a:fillRef idx="3">
-            <a:schemeClr val="accent1"/>
-          </a:fillRef>
-          <a:effectRef idx="2">
-            <a:schemeClr val="accent1"/>
-          </a:effectRef>
-          <a:fontRef idx="minor">
-            <a:schemeClr val="lt1"/>
-          </a:fontRef>
-        </p:style>
-        <p:txBody>
-          <a:bodyPr rtlCol="0" anchor="ctr"/>
-          <a:lstStyle/>
-          <a:p>
-            <a:pPr algn="ctr"/>
-          </a:p>
-        </p:txBody>
-      </p:sp>
-      <p:sp>
-        <p:nvSpPr>
-          <p:cNvPr id="15" name="TextBox 14"/>
-          <p:cNvSpPr txBox="1"/>
-          <p:nvPr/>
-        </p:nvSpPr>
-        <p:spPr>
-          <a:xfrm>
-            <a:off x="3566160" y="4069080"/>
-            <a:ext cx="2194560" cy="1737360"/>
-          </a:xfrm>
-          <a:prstGeom prst="rect">
-            <a:avLst/>
-          </a:prstGeom>
-          <a:noFill/>
-        </p:spPr>
-        <p:txBody>
-          <a:bodyPr wrap="square">
-            <a:spAutoFit/>
-          </a:bodyPr>
-          <a:lstStyle/>
-          <a:p>
-            <a:pPr>
-              <a:defRPr sz="1100" b="1">
-                <a:solidFill>
-                  <a:srgbClr val="2563EB"/>
-                </a:solidFill>
-              </a:defRPr>
-            </a:pPr>
-            <a:r>
-              <a:t>STEP 6</a:t>
-            </a:r>
-          </a:p>
-          <a:p>
-            <a:pPr>
-              <a:spcBef>
-                <a:spcPts val="200"/>
-              </a:spcBef>
-              <a:defRPr sz="1500" b="1">
-                <a:solidFill>
-                  <a:srgbClr val="0B192C"/>
-                </a:solidFill>
-              </a:defRPr>
-            </a:pPr>
-            <a:r>
-              <a:t>Security Review</a:t>
-            </a:r>
-          </a:p>
-          <a:p>
-            <a:pPr>
-              <a:spcBef>
-                <a:spcPts val="600"/>
-              </a:spcBef>
-              <a:defRPr sz="1100">
-                <a:solidFill>
-                  <a:srgbClr val="1E293B"/>
-                </a:solidFill>
-              </a:defRPr>
-            </a:pPr>
-            <a:r>
-              <a:t>Passive DAST checks mapped to OWASP Top 10.</a:t>
-            </a:r>
-          </a:p>
-        </p:txBody>
-      </p:sp>
-      <p:sp>
-        <p:nvSpPr>
-          <p:cNvPr id="16" name="Rounded Rectangle 15"/>
-          <p:cNvSpPr/>
-          <p:nvPr/>
-        </p:nvSpPr>
-        <p:spPr>
-          <a:xfrm>
-            <a:off x="6126480" y="3931920"/>
-            <a:ext cx="2468880" cy="2011680"/>
-          </a:xfrm>
-          <a:prstGeom prst="roundRect">
-            <a:avLst/>
-          </a:prstGeom>
-          <a:solidFill>
-            <a:srgbClr val="FFFFFF"/>
-          </a:solidFill>
-          <a:ln w="19050">
-            <a:solidFill>
-              <a:srgbClr val="E2E8F0"/>
-            </a:solidFill>
-          </a:ln>
-        </p:spPr>
-        <p:style>
-          <a:lnRef idx="1">
-            <a:schemeClr val="accent1"/>
-          </a:lnRef>
-          <a:fillRef idx="3">
-            <a:schemeClr val="accent1"/>
-          </a:fillRef>
-          <a:effectRef idx="2">
-            <a:schemeClr val="accent1"/>
-          </a:effectRef>
-          <a:fontRef idx="minor">
-            <a:schemeClr val="lt1"/>
-          </a:fontRef>
-        </p:style>
-        <p:txBody>
-          <a:bodyPr rtlCol="0" anchor="ctr"/>
-          <a:lstStyle/>
-          <a:p>
-            <a:pPr algn="ctr"/>
-          </a:p>
-        </p:txBody>
-      </p:sp>
-      <p:sp>
-        <p:nvSpPr>
-          <p:cNvPr id="17" name="TextBox 16"/>
-          <p:cNvSpPr txBox="1"/>
-          <p:nvPr/>
-        </p:nvSpPr>
-        <p:spPr>
-          <a:xfrm>
-            <a:off x="6263640" y="4069080"/>
-            <a:ext cx="2194560" cy="1737360"/>
-          </a:xfrm>
-          <a:prstGeom prst="rect">
-            <a:avLst/>
-          </a:prstGeom>
-          <a:noFill/>
-        </p:spPr>
-        <p:txBody>
-          <a:bodyPr wrap="square">
-            <a:spAutoFit/>
-          </a:bodyPr>
-          <a:lstStyle/>
-          <a:p>
-            <a:pPr>
-              <a:defRPr sz="1100" b="1">
-                <a:solidFill>
-                  <a:srgbClr val="2563EB"/>
-                </a:solidFill>
-              </a:defRPr>
-            </a:pPr>
-            <a:r>
-              <a:t>STEP 7</a:t>
-            </a:r>
-          </a:p>
-          <a:p>
-            <a:pPr>
-              <a:spcBef>
-                <a:spcPts val="200"/>
-              </a:spcBef>
-              <a:defRPr sz="1500" b="1">
-                <a:solidFill>
-                  <a:srgbClr val="0B192C"/>
-                </a:solidFill>
-              </a:defRPr>
-            </a:pPr>
-            <a:r>
-              <a:t>Generate Tests</a:t>
-            </a:r>
-          </a:p>
-          <a:p>
-            <a:pPr>
-              <a:spcBef>
-                <a:spcPts val="600"/>
-              </a:spcBef>
-              <a:defRPr sz="1100">
-                <a:solidFill>
-                  <a:srgbClr val="1E293B"/>
-                </a:solidFill>
-              </a:defRPr>
-            </a:pPr>
-            <a:r>
-              <a:t>Multi-provider AI test planning gateway.</a:t>
-            </a:r>
-          </a:p>
-        </p:txBody>
-      </p:sp>
-      <p:sp>
-        <p:nvSpPr>
-          <p:cNvPr id="18" name="Rounded Rectangle 17"/>
-          <p:cNvSpPr/>
-          <p:nvPr/>
-        </p:nvSpPr>
-        <p:spPr>
-          <a:xfrm>
-            <a:off x="8823960" y="3931920"/>
-            <a:ext cx="2468880" cy="2011680"/>
-          </a:xfrm>
-          <a:prstGeom prst="roundRect">
-            <a:avLst/>
-          </a:prstGeom>
-          <a:solidFill>
-            <a:srgbClr val="FFFFFF"/>
-          </a:solidFill>
-          <a:ln w="19050">
-            <a:solidFill>
-              <a:srgbClr val="E2E8F0"/>
-            </a:solidFill>
-          </a:ln>
-        </p:spPr>
-        <p:style>
-          <a:lnRef idx="1">
-            <a:schemeClr val="accent1"/>
-          </a:lnRef>
-          <a:fillRef idx="3">
-            <a:schemeClr val="accent1"/>
-          </a:fillRef>
-          <a:effectRef idx="2">
-            <a:schemeClr val="accent1"/>
-          </a:effectRef>
-          <a:fontRef idx="minor">
-            <a:schemeClr val="lt1"/>
-          </a:fontRef>
-        </p:style>
-        <p:txBody>
-          <a:bodyPr rtlCol="0" anchor="ctr"/>
-          <a:lstStyle/>
-          <a:p>
-            <a:pPr algn="ctr"/>
-          </a:p>
-        </p:txBody>
-      </p:sp>
-      <p:sp>
-        <p:nvSpPr>
-          <p:cNvPr id="19" name="TextBox 18"/>
-          <p:cNvSpPr txBox="1"/>
-          <p:nvPr/>
-        </p:nvSpPr>
-        <p:spPr>
-          <a:xfrm>
-            <a:off x="8961120" y="4069080"/>
-            <a:ext cx="2194560" cy="1737360"/>
-          </a:xfrm>
-          <a:prstGeom prst="rect">
-            <a:avLst/>
-          </a:prstGeom>
-          <a:noFill/>
-        </p:spPr>
-        <p:txBody>
-          <a:bodyPr wrap="square">
-            <a:spAutoFit/>
-          </a:bodyPr>
-          <a:lstStyle/>
-          <a:p>
-            <a:pPr>
-              <a:defRPr sz="1100" b="1">
-                <a:solidFill>
-                  <a:srgbClr val="2563EB"/>
-                </a:solidFill>
-              </a:defRPr>
-            </a:pPr>
-            <a:r>
-              <a:t>STEP 8</a:t>
-            </a:r>
-          </a:p>
-          <a:p>
-            <a:pPr>
-              <a:spcBef>
-                <a:spcPts val="200"/>
-              </a:spcBef>
-              <a:defRPr sz="1500" b="1">
-                <a:solidFill>
-                  <a:srgbClr val="0B192C"/>
-                </a:solidFill>
-              </a:defRPr>
-            </a:pPr>
-            <a:r>
-              <a:t>Execute &amp; Audit</a:t>
-            </a:r>
-          </a:p>
-          <a:p>
-            <a:pPr>
-              <a:spcBef>
-                <a:spcPts val="600"/>
-              </a:spcBef>
-              <a:defRPr sz="1100">
-                <a:solidFill>
-                  <a:srgbClr val="1E293B"/>
-                </a:solidFill>
-              </a:defRPr>
-            </a:pPr>
-            <a:r>
-              <a:t>Controlled Playwright test run &amp; 10-sheet Excel.</a:t>
+            <a:pPr algn="ctr">
+              <a:defRPr sz="950" b="1">
+                <a:solidFill>
+                  <a:srgbClr val="64748B"/>
+                </a:solidFill>
+              </a:defRPr>
+            </a:pPr>
+            <a:r>
+              <a:t>LIVE PRODUCT CAPTURE: STEP 1 DASHBOARD: TARGET URL, PASSWORD REVEAL &amp; MODE CONFIGURATION</a:t>
             </a:r>
           </a:p>
         </p:txBody>
@@ -6411,8 +6990,8 @@
         </p:nvSpPr>
         <p:spPr>
           <a:xfrm>
-            <a:off x="731520" y="457200"/>
-            <a:ext cx="10698480" cy="365760"/>
+            <a:off x="731520" y="411480"/>
+            <a:ext cx="10698480" cy="320040"/>
           </a:xfrm>
           <a:prstGeom prst="rect">
             <a:avLst/>
@@ -6426,14 +7005,14 @@
           <a:lstStyle/>
           <a:p>
             <a:pPr>
-              <a:defRPr sz="1100" b="1">
+              <a:defRPr sz="1000" b="1">
                 <a:solidFill>
                   <a:srgbClr val="2563EB"/>
                 </a:solidFill>
               </a:defRPr>
             </a:pPr>
             <a:r>
-              <a:t>STEP 4 &amp; 5 CORE ENGINE</a:t>
+              <a:t>STEP 2: CHOOSE MODULES</a:t>
             </a:r>
           </a:p>
         </p:txBody>
@@ -6446,8 +7025,8 @@
         </p:nvSpPr>
         <p:spPr>
           <a:xfrm>
-            <a:off x="731520" y="777240"/>
-            <a:ext cx="10698480" cy="640080"/>
+            <a:off x="731520" y="685800"/>
+            <a:ext cx="10698480" cy="594360"/>
           </a:xfrm>
           <a:prstGeom prst="rect">
             <a:avLst/>
@@ -6461,14 +7040,14 @@
           <a:lstStyle/>
           <a:p>
             <a:pPr>
-              <a:defRPr sz="2400" b="1">
+              <a:defRPr sz="2200" b="1">
                 <a:solidFill>
                   <a:srgbClr val="0B192C"/>
                 </a:solidFill>
               </a:defRPr>
             </a:pPr>
             <a:r>
-              <a:t>Deterministic Deep Crawling &amp; Destructive Action Parking Lot</a:t>
+              <a:t>Step 2: Autonomous Module Discovery &amp; Boundary Selection</a:t>
             </a:r>
           </a:p>
         </p:txBody>
@@ -6481,8 +7060,8 @@
         </p:nvSpPr>
         <p:spPr>
           <a:xfrm>
-            <a:off x="731520" y="1645920"/>
-            <a:ext cx="5120640" cy="4572000"/>
+            <a:off x="731520" y="1463040"/>
+            <a:ext cx="4663440" cy="4846320"/>
           </a:xfrm>
           <a:prstGeom prst="roundRect">
             <a:avLst/>
@@ -6526,8 +7105,8 @@
         </p:nvSpPr>
         <p:spPr>
           <a:xfrm>
-            <a:off x="914400" y="1828800"/>
-            <a:ext cx="4754880" cy="4206240"/>
+            <a:off x="914400" y="1645920"/>
+            <a:ext cx="4297680" cy="4480560"/>
           </a:xfrm>
           <a:prstGeom prst="rect">
             <a:avLst/>
@@ -6541,14 +7120,14 @@
           <a:lstStyle/>
           <a:p>
             <a:pPr>
-              <a:defRPr sz="1800" b="1">
+              <a:defRPr sz="1600" b="1">
                 <a:solidFill>
                   <a:srgbClr val="0B192C"/>
                 </a:solidFill>
               </a:defRPr>
             </a:pPr>
             <a:r>
-              <a:t>Deep Exploration Capabilities</a:t>
+              <a:t>Automatic Navigation Mapping without Crawling Noise</a:t>
             </a:r>
           </a:p>
           <a:p>
@@ -6556,14 +7135,14 @@
               <a:spcBef>
                 <a:spcPts val="800"/>
               </a:spcBef>
-              <a:defRPr sz="1300">
+              <a:defRPr sz="1150">
                 <a:solidFill>
                   <a:srgbClr val="1E293B"/>
                 </a:solidFill>
               </a:defRPr>
             </a:pPr>
             <a:r>
-              <a:t>• Viewport Deep Scanner: Progressively scrolls full page and nested overflow containers to trigger lazy-loaded elements.</a:t>
+              <a:t>✔ Passive Navigation Detection: Automatically extracts top navigation bars, sidebars, and functional modules.</a:t>
             </a:r>
           </a:p>
           <a:p>
@@ -6571,14 +7150,14 @@
               <a:spcBef>
                 <a:spcPts val="800"/>
               </a:spcBef>
-              <a:defRPr sz="1300">
+              <a:defRPr sz="1150">
                 <a:solidFill>
                   <a:srgbClr val="1E293B"/>
                 </a:solidFill>
               </a:defRPr>
             </a:pPr>
             <a:r>
-              <a:t>• Menu Overlay Engine: Opens sidebars, dropdowns, and context menus, inspects items, and dismisses cleanly via Escape key.</a:t>
+              <a:t>✔ Granular Scope Selection: Select single, multiple, or all modules (e.g. Inventory and Cart, excluding Admin).</a:t>
             </a:r>
           </a:p>
           <a:p>
@@ -6586,14 +7165,14 @@
               <a:spcBef>
                 <a:spcPts val="800"/>
               </a:spcBef>
-              <a:defRPr sz="1300">
+              <a:defRPr sz="1150">
                 <a:solidFill>
                   <a:srgbClr val="1E293B"/>
                 </a:solidFill>
               </a:defRPr>
             </a:pPr>
             <a:r>
-              <a:t>• Sequential Module Traversal: Explores one module at a time, restoring scroll positions and isolating test states.</a:t>
+              <a:t>✔ Dynamic Selection Chips: Real-time visual feedback on selected application boundaries with instant removal.</a:t>
             </a:r>
           </a:p>
           <a:p>
@@ -6601,14 +7180,29 @@
               <a:spcBef>
                 <a:spcPts val="800"/>
               </a:spcBef>
-              <a:defRPr sz="1300">
+              <a:defRPr sz="1150">
                 <a:solidFill>
                   <a:srgbClr val="1E293B"/>
                 </a:solidFill>
               </a:defRPr>
             </a:pPr>
             <a:r>
-              <a:t>• Atomic Checkpointing: Writes durable checkpoint before and after every route, preventing data loss on crash or pause.</a:t>
+              <a:t>✔ Zero Traversal Overrun: Unselected modules and external links are strictly excluded from subsequent crawling.</a:t>
+            </a:r>
+          </a:p>
+          <a:p>
+            <a:pPr>
+              <a:spcBef>
+                <a:spcPts val="1400"/>
+              </a:spcBef>
+              <a:defRPr sz="1100" b="1">
+                <a:solidFill>
+                  <a:srgbClr val="2563EB"/>
+                </a:solidFill>
+              </a:defRPr>
+            </a:pPr>
+            <a:r>
+              <a:t>🛡 Enterprise Guarantee: Scans only what you select; zero wasted crawling cycles.</a:t>
             </a:r>
           </a:p>
         </p:txBody>
@@ -6621,18 +7215,18 @@
         </p:nvSpPr>
         <p:spPr>
           <a:xfrm>
-            <a:off x="6309360" y="1645920"/>
-            <a:ext cx="5120640" cy="4572000"/>
+            <a:off x="5504688" y="1389888"/>
+            <a:ext cx="5998464" cy="4846320"/>
           </a:xfrm>
           <a:prstGeom prst="roundRect">
             <a:avLst/>
           </a:prstGeom>
           <a:solidFill>
-            <a:srgbClr val="FEF2F2"/>
+            <a:srgbClr val="FFFFFF"/>
           </a:solidFill>
           <a:ln w="19050">
             <a:solidFill>
-              <a:srgbClr val="EF4444"/>
+              <a:srgbClr val="2563EB"/>
             </a:solidFill>
           </a:ln>
         </p:spPr>
@@ -6658,16 +7252,40 @@
           </a:p>
         </p:txBody>
       </p:sp>
-      <p:sp>
-        <p:nvSpPr>
-          <p:cNvPr id="7" name="TextBox 6"/>
+      <p:pic>
+        <p:nvPicPr>
+          <p:cNvPr id="7" name="Picture 6" descr="02_choose_modules.png"/>
+          <p:cNvPicPr>
+            <a:picLocks noChangeAspect="1"/>
+          </p:cNvPicPr>
+          <p:nvPr/>
+        </p:nvPicPr>
+        <p:blipFill>
+          <a:blip r:embed="rId2"/>
+          <a:stretch>
+            <a:fillRect/>
+          </a:stretch>
+        </p:blipFill>
+        <p:spPr>
+          <a:xfrm>
+            <a:off x="5577840" y="1463040"/>
+            <a:ext cx="5852160" cy="4297680"/>
+          </a:xfrm>
+          <a:prstGeom prst="rect">
+            <a:avLst/>
+          </a:prstGeom>
+        </p:spPr>
+      </p:pic>
+      <p:sp>
+        <p:nvSpPr>
+          <p:cNvPr id="8" name="TextBox 7"/>
           <p:cNvSpPr txBox="1"/>
           <p:nvPr/>
         </p:nvSpPr>
         <p:spPr>
           <a:xfrm>
-            <a:off x="6492240" y="1828800"/>
-            <a:ext cx="4754880" cy="4206240"/>
+            <a:off x="5577840" y="5806440"/>
+            <a:ext cx="5852160" cy="365760"/>
           </a:xfrm>
           <a:prstGeom prst="rect">
             <a:avLst/>
@@ -6675,80 +7293,20 @@
           <a:noFill/>
         </p:spPr>
         <p:txBody>
-          <a:bodyPr wrap="square">
+          <a:bodyPr wrap="none">
             <a:spAutoFit/>
           </a:bodyPr>
           <a:lstStyle/>
           <a:p>
-            <a:pPr>
-              <a:defRPr sz="1800" b="1">
-                <a:solidFill>
-                  <a:srgbClr val="EF4444"/>
-                </a:solidFill>
-              </a:defRPr>
-            </a:pPr>
-            <a:r>
-              <a:t>Destructive Action Parking Lot</a:t>
-            </a:r>
-          </a:p>
-          <a:p>
-            <a:pPr>
-              <a:spcBef>
-                <a:spcPts val="800"/>
-              </a:spcBef>
-              <a:defRPr sz="1300">
-                <a:solidFill>
-                  <a:srgbClr val="1E293B"/>
-                </a:solidFill>
-              </a:defRPr>
-            </a:pPr>
-            <a:r>
-              <a:t>🛡 Strict Classification: Matches high-risk verbs (Delete, Remove, Destroy, Terminate, Purchase, Pay, Reset, Cancel).</a:t>
-            </a:r>
-          </a:p>
-          <a:p>
-            <a:pPr>
-              <a:spcBef>
-                <a:spcPts val="800"/>
-              </a:spcBef>
-              <a:defRPr sz="1300">
-                <a:solidFill>
-                  <a:srgbClr val="1E293B"/>
-                </a:solidFill>
-              </a:defRPr>
-            </a:pPr>
-            <a:r>
-              <a:t>🛡 Zero-Click Guarantee: The autonomous crawler NEVER clicks parked actions during scanning.</a:t>
-            </a:r>
-          </a:p>
-          <a:p>
-            <a:pPr>
-              <a:spcBef>
-                <a:spcPts val="800"/>
-              </a:spcBef>
-              <a:defRPr sz="1300">
-                <a:solidFill>
-                  <a:srgbClr val="1E293B"/>
-                </a:solidFill>
-              </a:defRPr>
-            </a:pPr>
-            <a:r>
-              <a:t>🛡 Reviewable Catalog: Parked actions are recorded with screenshot evidence, selector signatures, and exclusion rationales.</a:t>
-            </a:r>
-          </a:p>
-          <a:p>
-            <a:pPr>
-              <a:spcBef>
-                <a:spcPts val="800"/>
-              </a:spcBef>
-              <a:defRPr sz="1300">
-                <a:solidFill>
-                  <a:srgbClr val="1E293B"/>
-                </a:solidFill>
-              </a:defRPr>
-            </a:pPr>
-            <a:r>
-              <a:t>🛡 Human Confirmation: Actions remain locked until explicit manual human authorization is granted.</a:t>
+            <a:pPr algn="ctr">
+              <a:defRPr sz="950" b="1">
+                <a:solidFill>
+                  <a:srgbClr val="64748B"/>
+                </a:solidFill>
+              </a:defRPr>
+            </a:pPr>
+            <a:r>
+              <a:t>LIVE PRODUCT CAPTURE: STEP 2 DASHBOARD: DISCOVERED APPLICATION MODULES &amp; SCOPE CHECKBOXES</a:t>
             </a:r>
           </a:p>
         </p:txBody>
@@ -6779,8 +7337,8 @@
         </p:nvSpPr>
         <p:spPr>
           <a:xfrm>
-            <a:off x="731520" y="457200"/>
-            <a:ext cx="10698480" cy="365760"/>
+            <a:off x="731520" y="411480"/>
+            <a:ext cx="10698480" cy="320040"/>
           </a:xfrm>
           <a:prstGeom prst="rect">
             <a:avLst/>
@@ -6794,14 +7352,14 @@
           <a:lstStyle/>
           <a:p>
             <a:pPr>
-              <a:defRPr sz="1100" b="1">
+              <a:defRPr sz="1000" b="1">
                 <a:solidFill>
                   <a:srgbClr val="2563EB"/>
                 </a:solidFill>
               </a:defRPr>
             </a:pPr>
             <a:r>
-              <a:t>STEP 5 ANALYSIS ENGINE</a:t>
+              <a:t>STEP 3: MANUAL REVIEW</a:t>
             </a:r>
           </a:p>
         </p:txBody>
@@ -6814,8 +7372,8 @@
         </p:nvSpPr>
         <p:spPr>
           <a:xfrm>
-            <a:off x="731520" y="777240"/>
-            <a:ext cx="10698480" cy="640080"/>
+            <a:off x="731520" y="685800"/>
+            <a:ext cx="10698480" cy="594360"/>
           </a:xfrm>
           <a:prstGeom prst="rect">
             <a:avLst/>
@@ -6829,14 +7387,14 @@
           <a:lstStyle/>
           <a:p>
             <a:pPr>
-              <a:defRPr sz="2400" b="1">
+              <a:defRPr sz="2200" b="1">
                 <a:solidFill>
                   <a:srgbClr val="0B192C"/>
                 </a:solidFill>
               </a:defRPr>
             </a:pPr>
             <a:r>
-              <a:t>UI Intelligence Catalog &amp; 12-Attribute DOM Fingerprinting</a:t>
+              <a:t>Step 3: Human-in-the-Loop Safety Governance</a:t>
             </a:r>
           </a:p>
         </p:txBody>
@@ -6849,8 +7407,8 @@
         </p:nvSpPr>
         <p:spPr>
           <a:xfrm>
-            <a:off x="731520" y="1645920"/>
-            <a:ext cx="6217920" cy="4572000"/>
+            <a:off x="731520" y="1463040"/>
+            <a:ext cx="4663440" cy="4846320"/>
           </a:xfrm>
           <a:prstGeom prst="roundRect">
             <a:avLst/>
@@ -6894,8 +7452,8 @@
         </p:nvSpPr>
         <p:spPr>
           <a:xfrm>
-            <a:off x="914400" y="1828800"/>
-            <a:ext cx="5852160" cy="4206240"/>
+            <a:off x="914400" y="1645920"/>
+            <a:ext cx="4297680" cy="4480560"/>
           </a:xfrm>
           <a:prstGeom prst="rect">
             <a:avLst/>
@@ -6909,164 +7467,89 @@
           <a:lstStyle/>
           <a:p>
             <a:pPr>
-              <a:defRPr sz="1800" b="1">
+              <a:defRPr sz="1600" b="1">
                 <a:solidFill>
                   <a:srgbClr val="0B192C"/>
                 </a:solidFill>
               </a:defRPr>
             </a:pPr>
             <a:r>
-              <a:t>12-Attribute Resilient Element Registry</a:t>
+              <a:t>Pre-Crawl Safety Checkpoint &amp; Traversal Verification</a:t>
             </a:r>
           </a:p>
           <a:p>
             <a:pPr>
               <a:spcBef>
-                <a:spcPts val="300"/>
+                <a:spcPts val="800"/>
               </a:spcBef>
-              <a:defRPr sz="1200">
+              <a:defRPr sz="1150">
                 <a:solidFill>
                   <a:srgbClr val="1E293B"/>
                 </a:solidFill>
               </a:defRPr>
             </a:pPr>
             <a:r>
-              <a:t>✔ 1. Deterministic Element ID (SHA-256 fingerprint)</a:t>
+              <a:t>✔ Governance Gate: Provides explicit human review of confirmed module scopes prior to launching Playwright.</a:t>
             </a:r>
           </a:p>
           <a:p>
             <a:pPr>
               <a:spcBef>
-                <a:spcPts val="300"/>
+                <a:spcPts val="800"/>
               </a:spcBef>
-              <a:defRPr sz="1200">
+              <a:defRPr sz="1150">
                 <a:solidFill>
                   <a:srgbClr val="1E293B"/>
                 </a:solidFill>
               </a:defRPr>
             </a:pPr>
             <a:r>
-              <a:t>✔ 2. HTML Tag Name (button, input, select, a)</a:t>
+              <a:t>✔ Destructive Action Policy Preview: Outlines how mutations, deletes, and checkouts will be safely diverted.</a:t>
             </a:r>
           </a:p>
           <a:p>
             <a:pPr>
               <a:spcBef>
-                <a:spcPts val="300"/>
+                <a:spcPts val="800"/>
               </a:spcBef>
-              <a:defRPr sz="1200">
+              <a:defRPr sz="1150">
                 <a:solidFill>
                   <a:srgbClr val="1E293B"/>
                 </a:solidFill>
               </a:defRPr>
             </a:pPr>
             <a:r>
-              <a:t>✔ 3. WAI-ARIA Role (button, textbox, combobox)</a:t>
+              <a:t>✔ Sequential Traversal Assurance: Enforces module-by-module exploration with scroll and state restoration.</a:t>
             </a:r>
           </a:p>
           <a:p>
             <a:pPr>
               <a:spcBef>
-                <a:spcPts val="300"/>
+                <a:spcPts val="800"/>
               </a:spcBef>
-              <a:defRPr sz="1200">
+              <a:defRPr sz="1150">
                 <a:solidFill>
                   <a:srgbClr val="1E293B"/>
                 </a:solidFill>
               </a:defRPr>
             </a:pPr>
             <a:r>
-              <a:t>✔ 4. Accessible Name &amp; Visible Text</a:t>
+              <a:t>✔ Durable Checkpoint Initialization: Initializes atomic on-disk recovery checkpoints before scanning starts.</a:t>
             </a:r>
           </a:p>
           <a:p>
             <a:pPr>
               <a:spcBef>
-                <a:spcPts val="300"/>
+                <a:spcPts val="1400"/>
               </a:spcBef>
-              <a:defRPr sz="1200">
-                <a:solidFill>
-                  <a:srgbClr val="1E293B"/>
-                </a:solidFill>
-              </a:defRPr>
-            </a:pPr>
-            <a:r>
-              <a:t>✔ 5. Unique ID Attribute &amp; Name Attribute</a:t>
-            </a:r>
-          </a:p>
-          <a:p>
-            <a:pPr>
-              <a:spcBef>
-                <a:spcPts val="300"/>
-              </a:spcBef>
-              <a:defRPr sz="1200">
-                <a:solidFill>
-                  <a:srgbClr val="1E293B"/>
-                </a:solidFill>
-              </a:defRPr>
-            </a:pPr>
-            <a:r>
-              <a:t>✔ 6. Test Attributes (data-testid, data-cy, qa-id)</a:t>
-            </a:r>
-          </a:p>
-          <a:p>
-            <a:pPr>
-              <a:spcBef>
-                <a:spcPts val="300"/>
-              </a:spcBef>
-              <a:defRPr sz="1200">
-                <a:solidFill>
-                  <a:srgbClr val="1E293B"/>
-                </a:solidFill>
-              </a:defRPr>
-            </a:pPr>
-            <a:r>
-              <a:t>✔ 7. Resilient CSS Selector &amp; Scored XPath</a:t>
-            </a:r>
-          </a:p>
-          <a:p>
-            <a:pPr>
-              <a:spcBef>
-                <a:spcPts val="300"/>
-              </a:spcBef>
-              <a:defRPr sz="1200">
-                <a:solidFill>
-                  <a:srgbClr val="1E293B"/>
-                </a:solidFill>
-              </a:defRPr>
-            </a:pPr>
-            <a:r>
-              <a:t>✔ 8. Bounding Box Dimensions (x, y, width, height)</a:t>
-            </a:r>
-          </a:p>
-          <a:p>
-            <a:pPr>
-              <a:spcBef>
-                <a:spcPts val="300"/>
-              </a:spcBef>
-              <a:defRPr sz="1200">
-                <a:solidFill>
-                  <a:srgbClr val="1E293B"/>
-                </a:solidFill>
-              </a:defRPr>
-            </a:pPr>
-            <a:r>
-              <a:t>✔ 9. Visibility State &amp; Container Hierarchy</a:t>
-            </a:r>
-          </a:p>
-          <a:p>
-            <a:pPr>
-              <a:spcBef>
-                <a:spcPts val="300"/>
-              </a:spcBef>
-              <a:defRPr sz="1200">
-                <a:solidFill>
-                  <a:srgbClr val="1E293B"/>
-                </a:solidFill>
-              </a:defRPr>
-            </a:pPr>
-            <a:r>
-              <a:t>✔ 10. Selector Confidence Score (1-100)</a:t>
+              <a:defRPr sz="1100" b="1">
+                <a:solidFill>
+                  <a:srgbClr val="2563EB"/>
+                </a:solidFill>
+              </a:defRPr>
+            </a:pPr>
+            <a:r>
+              <a:t>🛡 Enterprise Guarantee: No automated crawler launches without explicit operator authorization.</a:t>
             </a:r>
           </a:p>
         </p:txBody>
@@ -7079,8 +7562,8 @@
         </p:nvSpPr>
         <p:spPr>
           <a:xfrm>
-            <a:off x="7315200" y="1645920"/>
-            <a:ext cx="4114800" cy="4572000"/>
+            <a:off x="5504688" y="1389888"/>
+            <a:ext cx="5998464" cy="4846320"/>
           </a:xfrm>
           <a:prstGeom prst="roundRect">
             <a:avLst/>
@@ -7090,7 +7573,7 @@
           </a:solidFill>
           <a:ln w="19050">
             <a:solidFill>
-              <a:srgbClr val="E2E8F0"/>
+              <a:srgbClr val="2563EB"/>
             </a:solidFill>
           </a:ln>
         </p:spPr>
@@ -7116,16 +7599,40 @@
           </a:p>
         </p:txBody>
       </p:sp>
-      <p:sp>
-        <p:nvSpPr>
-          <p:cNvPr id="7" name="TextBox 6"/>
+      <p:pic>
+        <p:nvPicPr>
+          <p:cNvPr id="7" name="Picture 6" descr="03_manual_review.png"/>
+          <p:cNvPicPr>
+            <a:picLocks noChangeAspect="1"/>
+          </p:cNvPicPr>
+          <p:nvPr/>
+        </p:nvPicPr>
+        <p:blipFill>
+          <a:blip r:embed="rId2"/>
+          <a:stretch>
+            <a:fillRect/>
+          </a:stretch>
+        </p:blipFill>
+        <p:spPr>
+          <a:xfrm>
+            <a:off x="5577840" y="1463040"/>
+            <a:ext cx="5852160" cy="4297680"/>
+          </a:xfrm>
+          <a:prstGeom prst="rect">
+            <a:avLst/>
+          </a:prstGeom>
+        </p:spPr>
+      </p:pic>
+      <p:sp>
+        <p:nvSpPr>
+          <p:cNvPr id="8" name="TextBox 7"/>
           <p:cNvSpPr txBox="1"/>
           <p:nvPr/>
         </p:nvSpPr>
         <p:spPr>
           <a:xfrm>
-            <a:off x="7498079" y="1828800"/>
-            <a:ext cx="3749039" cy="4206240"/>
+            <a:off x="5577840" y="5806440"/>
+            <a:ext cx="5852160" cy="365760"/>
           </a:xfrm>
           <a:prstGeom prst="rect">
             <a:avLst/>
@@ -7133,110 +7640,20 @@
           <a:noFill/>
         </p:spPr>
         <p:txBody>
-          <a:bodyPr wrap="square">
+          <a:bodyPr wrap="none">
             <a:spAutoFit/>
           </a:bodyPr>
           <a:lstStyle/>
           <a:p>
-            <a:pPr>
-              <a:defRPr sz="1800" b="1">
-                <a:solidFill>
-                  <a:srgbClr val="0B192C"/>
-                </a:solidFill>
-              </a:defRPr>
-            </a:pPr>
-            <a:r>
-              <a:t>Route Health Classification</a:t>
-            </a:r>
-          </a:p>
-          <a:p>
-            <a:pPr>
-              <a:spcBef>
-                <a:spcPts val="1000"/>
-              </a:spcBef>
-              <a:defRPr sz="1400" b="1">
-                <a:solidFill>
-                  <a:srgbClr val="10B981"/>
-                </a:solidFill>
-              </a:defRPr>
-            </a:pPr>
-            <a:r>
-              <a:t>WORKING (Score &gt;= 70)</a:t>
-            </a:r>
-          </a:p>
-          <a:p>
-            <a:pPr>
-              <a:spcBef>
-                <a:spcPts val="200"/>
-              </a:spcBef>
-              <a:defRPr sz="1100">
-                <a:solidFill>
-                  <a:srgbClr val="1E293B"/>
-                </a:solidFill>
-              </a:defRPr>
-            </a:pPr>
-            <a:r>
-              <a:t>High DOM stability, responsive interactions, zero console errors, full element accessibility.</a:t>
-            </a:r>
-          </a:p>
-          <a:p>
-            <a:pPr>
-              <a:spcBef>
-                <a:spcPts val="1000"/>
-              </a:spcBef>
-              <a:defRPr sz="1400" b="1">
-                <a:solidFill>
-                  <a:srgbClr val="F59E0B"/>
-                </a:solidFill>
-              </a:defRPr>
-            </a:pPr>
-            <a:r>
-              <a:t>PARTIAL (Score 40-69)</a:t>
-            </a:r>
-          </a:p>
-          <a:p>
-            <a:pPr>
-              <a:spcBef>
-                <a:spcPts val="200"/>
-              </a:spcBef>
-              <a:defRPr sz="1100">
-                <a:solidFill>
-                  <a:srgbClr val="1E293B"/>
-                </a:solidFill>
-              </a:defRPr>
-            </a:pPr>
-            <a:r>
-              <a:t>Minor interaction warnings, slow API responses, or benign redirects.</a:t>
-            </a:r>
-          </a:p>
-          <a:p>
-            <a:pPr>
-              <a:spcBef>
-                <a:spcPts val="1000"/>
-              </a:spcBef>
-              <a:defRPr sz="1400" b="1">
-                <a:solidFill>
-                  <a:srgbClr val="EF4444"/>
-                </a:solidFill>
-              </a:defRPr>
-            </a:pPr>
-            <a:r>
-              <a:t>NON-WORKING (Score &lt; 40)</a:t>
-            </a:r>
-          </a:p>
-          <a:p>
-            <a:pPr>
-              <a:spcBef>
-                <a:spcPts val="200"/>
-              </a:spcBef>
-              <a:defRPr sz="1100">
-                <a:solidFill>
-                  <a:srgbClr val="1E293B"/>
-                </a:solidFill>
-              </a:defRPr>
-            </a:pPr>
-            <a:r>
-              <a:t>Blank screens, 4xx/5xx HTTP errors, fatal JS exceptions, or broken navigation.</a:t>
+            <a:pPr algn="ctr">
+              <a:defRPr sz="950" b="1">
+                <a:solidFill>
+                  <a:srgbClr val="64748B"/>
+                </a:solidFill>
+              </a:defRPr>
+            </a:pPr>
+            <a:r>
+              <a:t>LIVE PRODUCT CAPTURE: STEP 3 DASHBOARD: PRE-CRAWL SCOPE CONFIRMATION &amp; SAFETY GUARDRAILS</a:t>
             </a:r>
           </a:p>
         </p:txBody>
@@ -7267,8 +7684,8 @@
         </p:nvSpPr>
         <p:spPr>
           <a:xfrm>
-            <a:off x="731520" y="457200"/>
-            <a:ext cx="10698480" cy="365760"/>
+            <a:off x="731520" y="411480"/>
+            <a:ext cx="10698480" cy="320040"/>
           </a:xfrm>
           <a:prstGeom prst="rect">
             <a:avLst/>
@@ -7282,14 +7699,14 @@
           <a:lstStyle/>
           <a:p>
             <a:pPr>
-              <a:defRPr sz="1100" b="1">
+              <a:defRPr sz="1000" b="1">
                 <a:solidFill>
                   <a:srgbClr val="2563EB"/>
                 </a:solidFill>
               </a:defRPr>
             </a:pPr>
             <a:r>
-              <a:t>PASSIVE DAST ENGINE</a:t>
+              <a:t>STEP 4: CRAWL PROGRESS</a:t>
             </a:r>
           </a:p>
         </p:txBody>
@@ -7302,8 +7719,8 @@
         </p:nvSpPr>
         <p:spPr>
           <a:xfrm>
-            <a:off x="731520" y="777240"/>
-            <a:ext cx="10698480" cy="640080"/>
+            <a:off x="731520" y="685800"/>
+            <a:ext cx="10698480" cy="594360"/>
           </a:xfrm>
           <a:prstGeom prst="rect">
             <a:avLst/>
@@ -7317,14 +7734,14 @@
           <a:lstStyle/>
           <a:p>
             <a:pPr>
-              <a:defRPr sz="2400" b="1">
+              <a:defRPr sz="2200" b="1">
                 <a:solidFill>
                   <a:srgbClr val="0B192C"/>
                 </a:solidFill>
               </a:defRPr>
             </a:pPr>
             <a:r>
-              <a:t>Safe Basic Security Scan &amp; OWASP Top 10 (2021) Mapping</a:t>
+              <a:t>Step 4: Deep Crawling &amp; Live Telemetry Stream</a:t>
             </a:r>
           </a:p>
         </p:txBody>
@@ -7337,8 +7754,8 @@
         </p:nvSpPr>
         <p:spPr>
           <a:xfrm>
-            <a:off x="731520" y="1645920"/>
-            <a:ext cx="10698480" cy="4572000"/>
+            <a:off x="731520" y="1463040"/>
+            <a:ext cx="4663440" cy="4846320"/>
           </a:xfrm>
           <a:prstGeom prst="roundRect">
             <a:avLst/>
@@ -7382,8 +7799,8 @@
         </p:nvSpPr>
         <p:spPr>
           <a:xfrm>
-            <a:off x="914400" y="1828800"/>
-            <a:ext cx="10332720" cy="4206240"/>
+            <a:off x="914400" y="1645920"/>
+            <a:ext cx="4297680" cy="4480560"/>
           </a:xfrm>
           <a:prstGeom prst="rect">
             <a:avLst/>
@@ -7397,134 +7814,193 @@
           <a:lstStyle/>
           <a:p>
             <a:pPr>
-              <a:defRPr sz="1800" b="1">
+              <a:defRPr sz="1600" b="1">
+                <a:solidFill>
+                  <a:srgbClr val="0B192C"/>
+                </a:solidFill>
+              </a:defRPr>
+            </a:pPr>
+            <a:r>
+              <a:t>Real-Time Exploration with Deep Scrolling &amp; Full Telemetry</a:t>
+            </a:r>
+          </a:p>
+          <a:p>
+            <a:pPr>
+              <a:spcBef>
+                <a:spcPts val="800"/>
+              </a:spcBef>
+              <a:defRPr sz="1150">
+                <a:solidFill>
+                  <a:srgbClr val="1E293B"/>
+                </a:solidFill>
+              </a:defRPr>
+            </a:pPr>
+            <a:r>
+              <a:t>✔ Viewport Deep Scanning: Explores document viewports and nested scrollable containers for lazy-loaded items.</a:t>
+            </a:r>
+          </a:p>
+          <a:p>
+            <a:pPr>
+              <a:spcBef>
+                <a:spcPts val="800"/>
+              </a:spcBef>
+              <a:defRPr sz="1150">
+                <a:solidFill>
+                  <a:srgbClr val="1E293B"/>
+                </a:solidFill>
+              </a:defRPr>
+            </a:pPr>
+            <a:r>
+              <a:t>✔ Menu Overlay Probing: Discovers flyouts and dropdowns, restoring page state cleanly via the Escape key.</a:t>
+            </a:r>
+          </a:p>
+          <a:p>
+            <a:pPr>
+              <a:spcBef>
+                <a:spcPts val="800"/>
+              </a:spcBef>
+              <a:defRPr sz="1150">
+                <a:solidFill>
+                  <a:srgbClr val="1E293B"/>
+                </a:solidFill>
+              </a:defRPr>
+            </a:pPr>
+            <a:r>
+              <a:t>✔ Live Telemetry Stream: Real-time gauges for module completion, route progression, and discovered elements.</a:t>
+            </a:r>
+          </a:p>
+          <a:p>
+            <a:pPr>
+              <a:spcBef>
+                <a:spcPts val="800"/>
+              </a:spcBef>
+              <a:defRPr sz="1150">
+                <a:solidFill>
+                  <a:srgbClr val="1E293B"/>
+                </a:solidFill>
+              </a:defRPr>
+            </a:pPr>
+            <a:r>
+              <a:t>✔ Interactive Scan Controls: Real-time Pause, Resume, End &amp; Save, and Discard controls.</a:t>
+            </a:r>
+          </a:p>
+          <a:p>
+            <a:pPr>
+              <a:spcBef>
+                <a:spcPts val="1400"/>
+              </a:spcBef>
+              <a:defRPr sz="1100" b="1">
                 <a:solidFill>
                   <a:srgbClr val="2563EB"/>
                 </a:solidFill>
               </a:defRPr>
             </a:pPr>
             <a:r>
-              <a:t>Authorized, Low-Impact Assessment — Zero Destructive Probing</a:t>
-            </a:r>
-          </a:p>
-          <a:p>
-            <a:pPr>
-              <a:spcBef>
-                <a:spcPts val="400"/>
-              </a:spcBef>
-              <a:defRPr sz="1200">
-                <a:solidFill>
-                  <a:srgbClr val="1E293B"/>
-                </a:solidFill>
-              </a:defRPr>
-            </a:pPr>
-            <a:r>
-              <a:t>• Security Headers (A05:2021): Verifies CSP (frame-ancestors), HSTS, X-Content-Type-Options: nosniff, Referrer-Policy, and Permissions-Policy.</a:t>
-            </a:r>
-          </a:p>
-          <a:p>
-            <a:pPr>
-              <a:spcBef>
-                <a:spcPts val="400"/>
-              </a:spcBef>
-              <a:defRPr sz="1200">
-                <a:solidFill>
-                  <a:srgbClr val="1E293B"/>
-                </a:solidFill>
-              </a:defRPr>
-            </a:pPr>
-            <a:r>
-              <a:t>• Cookie Security Flags (A07:2021): Validates Secure, HttpOnly, and SameSite attributes on all Set-Cookie headers.</a:t>
-            </a:r>
-          </a:p>
-          <a:p>
-            <a:pPr>
-              <a:spcBef>
-                <a:spcPts val="400"/>
-              </a:spcBef>
-              <a:defRPr sz="1200">
-                <a:solidFill>
-                  <a:srgbClr val="1E293B"/>
-                </a:solidFill>
-              </a:defRPr>
-            </a:pPr>
-            <a:r>
-              <a:t>• Mixed Content Detection (A02:2021): Identifies unencrypted HTTP assets, scripts, or form submissions on HTTPS pages.</a:t>
-            </a:r>
-          </a:p>
-          <a:p>
-            <a:pPr>
-              <a:spcBef>
-                <a:spcPts val="400"/>
-              </a:spcBef>
-              <a:defRPr sz="1200">
-                <a:solidFill>
-                  <a:srgbClr val="1E293B"/>
-                </a:solidFill>
-              </a:defRPr>
-            </a:pPr>
-            <a:r>
-              <a:t>• CORS Misconfiguration (A05:2021): Flags wildcard Access-Control-Allow-Origin with credentials or reflected probe origins.</a:t>
-            </a:r>
-          </a:p>
-          <a:p>
-            <a:pPr>
-              <a:spcBef>
-                <a:spcPts val="400"/>
-              </a:spcBef>
-              <a:defRPr sz="1200">
-                <a:solidFill>
-                  <a:srgbClr val="1E293B"/>
-                </a:solidFill>
-              </a:defRPr>
-            </a:pPr>
-            <a:r>
-              <a:t>• Sensitive Data Disclosure (A02/A05): Detects exposed private keys, AWS/GitHub tokens, JWTs in bodies, database strings, and source maps.</a:t>
-            </a:r>
-          </a:p>
-          <a:p>
-            <a:pPr>
-              <a:spcBef>
-                <a:spcPts val="400"/>
-              </a:spcBef>
-              <a:defRPr sz="1200">
-                <a:solidFill>
-                  <a:srgbClr val="1E293B"/>
-                </a:solidFill>
-              </a:defRPr>
-            </a:pPr>
-            <a:r>
-              <a:t>• Error Disclosure (A05:2021): Catches verbose stack traces, server exception dumps, and debug toolbars in responses.</a:t>
-            </a:r>
-          </a:p>
-          <a:p>
-            <a:pPr>
-              <a:spcBef>
-                <a:spcPts val="400"/>
-              </a:spcBef>
-              <a:defRPr sz="1200">
-                <a:solidFill>
-                  <a:srgbClr val="1E293B"/>
-                </a:solidFill>
-              </a:defRPr>
-            </a:pPr>
-            <a:r>
-              <a:t>• Authorization Boundaries (A01:2021): Observes whether protected routes return 200 without valid authentication tokens.</a:t>
-            </a:r>
-          </a:p>
-          <a:p>
-            <a:pPr>
-              <a:spcBef>
-                <a:spcPts val="400"/>
-              </a:spcBef>
-              <a:defRPr sz="1200">
-                <a:solidFill>
-                  <a:srgbClr val="1E293B"/>
-                </a:solidFill>
-              </a:defRPr>
-            </a:pPr>
-            <a:r>
-              <a:t>• Inert Reflection Canary (A03:2021): Injects safe alphanumeric marker (pione_&lt;uuid&gt;) to test output encoding without exploit payloads.</a:t>
+              <a:t>🛡 Enterprise Guarantee: Destructive buttons parked with 100% zero-click safety.</a:t>
+            </a:r>
+          </a:p>
+        </p:txBody>
+      </p:sp>
+      <p:sp>
+        <p:nvSpPr>
+          <p:cNvPr id="6" name="Rounded Rectangle 5"/>
+          <p:cNvSpPr/>
+          <p:nvPr/>
+        </p:nvSpPr>
+        <p:spPr>
+          <a:xfrm>
+            <a:off x="5504688" y="1389888"/>
+            <a:ext cx="5998464" cy="4846320"/>
+          </a:xfrm>
+          <a:prstGeom prst="roundRect">
+            <a:avLst/>
+          </a:prstGeom>
+          <a:solidFill>
+            <a:srgbClr val="FFFFFF"/>
+          </a:solidFill>
+          <a:ln w="19050">
+            <a:solidFill>
+              <a:srgbClr val="2563EB"/>
+            </a:solidFill>
+          </a:ln>
+        </p:spPr>
+        <p:style>
+          <a:lnRef idx="1">
+            <a:schemeClr val="accent1"/>
+          </a:lnRef>
+          <a:fillRef idx="3">
+            <a:schemeClr val="accent1"/>
+          </a:fillRef>
+          <a:effectRef idx="2">
+            <a:schemeClr val="accent1"/>
+          </a:effectRef>
+          <a:fontRef idx="minor">
+            <a:schemeClr val="lt1"/>
+          </a:fontRef>
+        </p:style>
+        <p:txBody>
+          <a:bodyPr rtlCol="0" anchor="ctr"/>
+          <a:lstStyle/>
+          <a:p>
+            <a:pPr algn="ctr"/>
+          </a:p>
+        </p:txBody>
+      </p:sp>
+      <p:pic>
+        <p:nvPicPr>
+          <p:cNvPr id="7" name="Picture 6" descr="04_crawl_telemetry.png"/>
+          <p:cNvPicPr>
+            <a:picLocks noChangeAspect="1"/>
+          </p:cNvPicPr>
+          <p:nvPr/>
+        </p:nvPicPr>
+        <p:blipFill>
+          <a:blip r:embed="rId2"/>
+          <a:stretch>
+            <a:fillRect/>
+          </a:stretch>
+        </p:blipFill>
+        <p:spPr>
+          <a:xfrm>
+            <a:off x="5577840" y="1463040"/>
+            <a:ext cx="5852160" cy="4297680"/>
+          </a:xfrm>
+          <a:prstGeom prst="rect">
+            <a:avLst/>
+          </a:prstGeom>
+        </p:spPr>
+      </p:pic>
+      <p:sp>
+        <p:nvSpPr>
+          <p:cNvPr id="8" name="TextBox 7"/>
+          <p:cNvSpPr txBox="1"/>
+          <p:nvPr/>
+        </p:nvSpPr>
+        <p:spPr>
+          <a:xfrm>
+            <a:off x="5577840" y="5806440"/>
+            <a:ext cx="5852160" cy="365760"/>
+          </a:xfrm>
+          <a:prstGeom prst="rect">
+            <a:avLst/>
+          </a:prstGeom>
+          <a:noFill/>
+        </p:spPr>
+        <p:txBody>
+          <a:bodyPr wrap="none">
+            <a:spAutoFit/>
+          </a:bodyPr>
+          <a:lstStyle/>
+          <a:p>
+            <a:pPr algn="ctr">
+              <a:defRPr sz="950" b="1">
+                <a:solidFill>
+                  <a:srgbClr val="64748B"/>
+                </a:solidFill>
+              </a:defRPr>
+            </a:pPr>
+            <a:r>
+              <a:t>LIVE PRODUCT CAPTURE: STEP 4 DASHBOARD: LIVE MODULE/ROUTE PROGRESS GAUGES &amp; INTERACTIVE CONTROLS</a:t>
             </a:r>
           </a:p>
         </p:txBody>
@@ -7555,8 +8031,8 @@
         </p:nvSpPr>
         <p:spPr>
           <a:xfrm>
-            <a:off x="731520" y="457200"/>
-            <a:ext cx="10698480" cy="365760"/>
+            <a:off x="731520" y="411480"/>
+            <a:ext cx="10698480" cy="320040"/>
           </a:xfrm>
           <a:prstGeom prst="rect">
             <a:avLst/>
@@ -7570,14 +8046,14 @@
           <a:lstStyle/>
           <a:p>
             <a:pPr>
-              <a:defRPr sz="1100" b="1">
+              <a:defRPr sz="1000" b="1">
                 <a:solidFill>
                   <a:srgbClr val="2563EB"/>
                 </a:solidFill>
               </a:defRPr>
             </a:pPr>
             <a:r>
-              <a:t>STEP 7 TEST SYNTHESIS</a:t>
+              <a:t>STEP 5: ANALYZE</a:t>
             </a:r>
           </a:p>
         </p:txBody>
@@ -7590,8 +8066,8 @@
         </p:nvSpPr>
         <p:spPr>
           <a:xfrm>
-            <a:off x="731520" y="777240"/>
-            <a:ext cx="10698480" cy="640080"/>
+            <a:off x="731520" y="685800"/>
+            <a:ext cx="10698480" cy="594360"/>
           </a:xfrm>
           <a:prstGeom prst="rect">
             <a:avLst/>
@@ -7605,14 +8081,14 @@
           <a:lstStyle/>
           <a:p>
             <a:pPr>
-              <a:defRPr sz="2400" b="1">
+              <a:defRPr sz="2200" b="1">
                 <a:solidFill>
                   <a:srgbClr val="0B192C"/>
                 </a:solidFill>
               </a:defRPr>
             </a:pPr>
             <a:r>
-              <a:t>Grounded Multi-Provider AI Test Planning Gateway</a:t>
+              <a:t>Step 5: UI Intelligence Catalog &amp; Route Health Scoring</a:t>
             </a:r>
           </a:p>
         </p:txBody>
@@ -7625,8 +8101,8 @@
         </p:nvSpPr>
         <p:spPr>
           <a:xfrm>
-            <a:off x="731520" y="1645920"/>
-            <a:ext cx="1965960" cy="4389120"/>
+            <a:off x="731520" y="1463040"/>
+            <a:ext cx="4663440" cy="4846320"/>
           </a:xfrm>
           <a:prstGeom prst="roundRect">
             <a:avLst/>
@@ -7670,8 +8146,8 @@
         </p:nvSpPr>
         <p:spPr>
           <a:xfrm>
-            <a:off x="822960" y="1783080"/>
-            <a:ext cx="1783080" cy="4114800"/>
+            <a:off x="914400" y="1645920"/>
+            <a:ext cx="4297680" cy="4480560"/>
           </a:xfrm>
           <a:prstGeom prst="rect">
             <a:avLst/>
@@ -7687,27 +8163,12 @@
             <a:pPr>
               <a:defRPr sz="1600" b="1">
                 <a:solidFill>
-                  <a:srgbClr val="1E293B"/>
-                </a:solidFill>
-              </a:defRPr>
-            </a:pPr>
-            <a:r>
-              <a:t>Deterministic</a:t>
-            </a:r>
-          </a:p>
-          <a:p>
-            <a:pPr>
-              <a:spcBef>
-                <a:spcPts val="200"/>
-              </a:spcBef>
-              <a:defRPr sz="1100" b="1">
-                <a:solidFill>
-                  <a:srgbClr val="64748B"/>
-                </a:solidFill>
-              </a:defRPr>
-            </a:pPr>
-            <a:r>
-              <a:t>100% Offline Rule Engine</a:t>
+                  <a:srgbClr val="0B192C"/>
+                </a:solidFill>
+              </a:defRPr>
+            </a:pPr>
+            <a:r>
+              <a:t>12-Attribute Element Fingerprinting &amp; Route Quality Scoring</a:t>
             </a:r>
           </a:p>
           <a:p>
@@ -7715,14 +8176,74 @@
               <a:spcBef>
                 <a:spcPts val="800"/>
               </a:spcBef>
-              <a:defRPr sz="1100">
+              <a:defRPr sz="1150">
                 <a:solidFill>
                   <a:srgbClr val="1E293B"/>
                 </a:solidFill>
               </a:defRPr>
             </a:pPr>
             <a:r>
-              <a:t>Zero cloud tokens or costs. Synthesizes standard functional navigation &amp; element assertion tests deterministically.</a:t>
+              <a:t>✔ Route Health Scoring: Classifies routes as WORKING (&gt;=70), PARTIAL (40-69), or NON-WORKING (&lt;40).</a:t>
+            </a:r>
+          </a:p>
+          <a:p>
+            <a:pPr>
+              <a:spcBef>
+                <a:spcPts val="800"/>
+              </a:spcBef>
+              <a:defRPr sz="1150">
+                <a:solidFill>
+                  <a:srgbClr val="1E293B"/>
+                </a:solidFill>
+              </a:defRPr>
+            </a:pPr>
+            <a:r>
+              <a:t>✔ 12-Attribute Fingerprinting: Registers Role, ARIA, Text, ID, Name, TestIDs, CSS, XPath, and Coordinates.</a:t>
+            </a:r>
+          </a:p>
+          <a:p>
+            <a:pPr>
+              <a:spcBef>
+                <a:spcPts val="800"/>
+              </a:spcBef>
+              <a:defRPr sz="1150">
+                <a:solidFill>
+                  <a:srgbClr val="1E293B"/>
+                </a:solidFill>
+              </a:defRPr>
+            </a:pPr>
+            <a:r>
+              <a:t>✔ Hierarchical Selector Confidence: Resolves elements using Role &gt; ARIA &gt; ID &gt; Text &gt; CSS &gt; XPath.</a:t>
+            </a:r>
+          </a:p>
+          <a:p>
+            <a:pPr>
+              <a:spcBef>
+                <a:spcPts val="800"/>
+              </a:spcBef>
+              <a:defRPr sz="1150">
+                <a:solidFill>
+                  <a:srgbClr val="1E293B"/>
+                </a:solidFill>
+              </a:defRPr>
+            </a:pPr>
+            <a:r>
+              <a:t>✔ Destructive Parking Lot Review: Inspects all blocked actions with screenshot evidence and selector signatures.</a:t>
+            </a:r>
+          </a:p>
+          <a:p>
+            <a:pPr>
+              <a:spcBef>
+                <a:spcPts val="1400"/>
+              </a:spcBef>
+              <a:defRPr sz="1100" b="1">
+                <a:solidFill>
+                  <a:srgbClr val="2563EB"/>
+                </a:solidFill>
+              </a:defRPr>
+            </a:pPr>
+            <a:r>
+              <a:t>🛡 Enterprise Guarantee: Zero flaky locators; tests survive UI redesigns and CSS refactors.</a:t>
             </a:r>
           </a:p>
         </p:txBody>
@@ -7735,8 +8256,8 @@
         </p:nvSpPr>
         <p:spPr>
           <a:xfrm>
-            <a:off x="2880360" y="1645920"/>
-            <a:ext cx="1965960" cy="4389120"/>
+            <a:off x="5504688" y="1389888"/>
+            <a:ext cx="5998464" cy="4846320"/>
           </a:xfrm>
           <a:prstGeom prst="roundRect">
             <a:avLst/>
@@ -7746,7 +8267,7 @@
           </a:solidFill>
           <a:ln w="19050">
             <a:solidFill>
-              <a:srgbClr val="E2E8F0"/>
+              <a:srgbClr val="2563EB"/>
             </a:solidFill>
           </a:ln>
         </p:spPr>
@@ -7772,16 +8293,40 @@
           </a:p>
         </p:txBody>
       </p:sp>
-      <p:sp>
-        <p:nvSpPr>
-          <p:cNvPr id="7" name="TextBox 6"/>
+      <p:pic>
+        <p:nvPicPr>
+          <p:cNvPr id="7" name="Picture 6" descr="05_route_health_catalog.png"/>
+          <p:cNvPicPr>
+            <a:picLocks noChangeAspect="1"/>
+          </p:cNvPicPr>
+          <p:nvPr/>
+        </p:nvPicPr>
+        <p:blipFill>
+          <a:blip r:embed="rId2"/>
+          <a:stretch>
+            <a:fillRect/>
+          </a:stretch>
+        </p:blipFill>
+        <p:spPr>
+          <a:xfrm>
+            <a:off x="5577840" y="1463040"/>
+            <a:ext cx="5852160" cy="4297680"/>
+          </a:xfrm>
+          <a:prstGeom prst="rect">
+            <a:avLst/>
+          </a:prstGeom>
+        </p:spPr>
+      </p:pic>
+      <p:sp>
+        <p:nvSpPr>
+          <p:cNvPr id="8" name="TextBox 7"/>
           <p:cNvSpPr txBox="1"/>
           <p:nvPr/>
         </p:nvSpPr>
         <p:spPr>
           <a:xfrm>
-            <a:off x="2971800" y="1783080"/>
-            <a:ext cx="1783080" cy="4114800"/>
+            <a:off x="5577840" y="5806440"/>
+            <a:ext cx="5852160" cy="365760"/>
           </a:xfrm>
           <a:prstGeom prst="rect">
             <a:avLst/>
@@ -7789,380 +8334,20 @@
           <a:noFill/>
         </p:spPr>
         <p:txBody>
-          <a:bodyPr wrap="square">
+          <a:bodyPr wrap="none">
             <a:spAutoFit/>
           </a:bodyPr>
           <a:lstStyle/>
           <a:p>
-            <a:pPr>
-              <a:defRPr sz="1600" b="1">
-                <a:solidFill>
-                  <a:srgbClr val="2563EB"/>
-                </a:solidFill>
-              </a:defRPr>
-            </a:pPr>
-            <a:r>
-              <a:t>Ollama</a:t>
-            </a:r>
-          </a:p>
-          <a:p>
-            <a:pPr>
-              <a:spcBef>
-                <a:spcPts val="200"/>
-              </a:spcBef>
-              <a:defRPr sz="1100" b="1">
+            <a:pPr algn="ctr">
+              <a:defRPr sz="950" b="1">
                 <a:solidFill>
                   <a:srgbClr val="64748B"/>
                 </a:solidFill>
               </a:defRPr>
             </a:pPr>
             <a:r>
-              <a:t>Local Open-Weights Models</a:t>
-            </a:r>
-          </a:p>
-          <a:p>
-            <a:pPr>
-              <a:spcBef>
-                <a:spcPts val="800"/>
-              </a:spcBef>
-              <a:defRPr sz="1100">
-                <a:solidFill>
-                  <a:srgbClr val="1E293B"/>
-                </a:solidFill>
-              </a:defRPr>
-            </a:pPr>
-            <a:r>
-              <a:t>Local inference via Llama 3, Mistral, Qwen 2.5 Coder. 100% data confidentiality for air-gapped environments.</a:t>
-            </a:r>
-          </a:p>
-        </p:txBody>
-      </p:sp>
-      <p:sp>
-        <p:nvSpPr>
-          <p:cNvPr id="8" name="Rounded Rectangle 7"/>
-          <p:cNvSpPr/>
-          <p:nvPr/>
-        </p:nvSpPr>
-        <p:spPr>
-          <a:xfrm>
-            <a:off x="5029200" y="1645920"/>
-            <a:ext cx="1965960" cy="4389120"/>
-          </a:xfrm>
-          <a:prstGeom prst="roundRect">
-            <a:avLst/>
-          </a:prstGeom>
-          <a:solidFill>
-            <a:srgbClr val="FFFFFF"/>
-          </a:solidFill>
-          <a:ln w="19050">
-            <a:solidFill>
-              <a:srgbClr val="E2E8F0"/>
-            </a:solidFill>
-          </a:ln>
-        </p:spPr>
-        <p:style>
-          <a:lnRef idx="1">
-            <a:schemeClr val="accent1"/>
-          </a:lnRef>
-          <a:fillRef idx="3">
-            <a:schemeClr val="accent1"/>
-          </a:fillRef>
-          <a:effectRef idx="2">
-            <a:schemeClr val="accent1"/>
-          </a:effectRef>
-          <a:fontRef idx="minor">
-            <a:schemeClr val="lt1"/>
-          </a:fontRef>
-        </p:style>
-        <p:txBody>
-          <a:bodyPr rtlCol="0" anchor="ctr"/>
-          <a:lstStyle/>
-          <a:p>
-            <a:pPr algn="ctr"/>
-          </a:p>
-        </p:txBody>
-      </p:sp>
-      <p:sp>
-        <p:nvSpPr>
-          <p:cNvPr id="9" name="TextBox 8"/>
-          <p:cNvSpPr txBox="1"/>
-          <p:nvPr/>
-        </p:nvSpPr>
-        <p:spPr>
-          <a:xfrm>
-            <a:off x="5120640" y="1783080"/>
-            <a:ext cx="1783080" cy="4114800"/>
-          </a:xfrm>
-          <a:prstGeom prst="rect">
-            <a:avLst/>
-          </a:prstGeom>
-          <a:noFill/>
-        </p:spPr>
-        <p:txBody>
-          <a:bodyPr wrap="square">
-            <a:spAutoFit/>
-          </a:bodyPr>
-          <a:lstStyle/>
-          <a:p>
-            <a:pPr>
-              <a:defRPr sz="1600" b="1">
-                <a:solidFill>
-                  <a:srgbClr val="06B6D4"/>
-                </a:solidFill>
-              </a:defRPr>
-            </a:pPr>
-            <a:r>
-              <a:t>Google Gemini</a:t>
-            </a:r>
-          </a:p>
-          <a:p>
-            <a:pPr>
-              <a:spcBef>
-                <a:spcPts val="200"/>
-              </a:spcBef>
-              <a:defRPr sz="1100" b="1">
-                <a:solidFill>
-                  <a:srgbClr val="64748B"/>
-                </a:solidFill>
-              </a:defRPr>
-            </a:pPr>
-            <a:r>
-              <a:t>Gemini Pro &amp; Flash API</a:t>
-            </a:r>
-          </a:p>
-          <a:p>
-            <a:pPr>
-              <a:spcBef>
-                <a:spcPts val="800"/>
-              </a:spcBef>
-              <a:defRPr sz="1100">
-                <a:solidFill>
-                  <a:srgbClr val="1E293B"/>
-                </a:solidFill>
-              </a:defRPr>
-            </a:pPr>
-            <a:r>
-              <a:t>High-speed multimodal understanding with structured output schema enforcement.</a:t>
-            </a:r>
-          </a:p>
-        </p:txBody>
-      </p:sp>
-      <p:sp>
-        <p:nvSpPr>
-          <p:cNvPr id="10" name="Rounded Rectangle 9"/>
-          <p:cNvSpPr/>
-          <p:nvPr/>
-        </p:nvSpPr>
-        <p:spPr>
-          <a:xfrm>
-            <a:off x="7178040" y="1645920"/>
-            <a:ext cx="1965960" cy="4389120"/>
-          </a:xfrm>
-          <a:prstGeom prst="roundRect">
-            <a:avLst/>
-          </a:prstGeom>
-          <a:solidFill>
-            <a:srgbClr val="FFFFFF"/>
-          </a:solidFill>
-          <a:ln w="19050">
-            <a:solidFill>
-              <a:srgbClr val="E2E8F0"/>
-            </a:solidFill>
-          </a:ln>
-        </p:spPr>
-        <p:style>
-          <a:lnRef idx="1">
-            <a:schemeClr val="accent1"/>
-          </a:lnRef>
-          <a:fillRef idx="3">
-            <a:schemeClr val="accent1"/>
-          </a:fillRef>
-          <a:effectRef idx="2">
-            <a:schemeClr val="accent1"/>
-          </a:effectRef>
-          <a:fontRef idx="minor">
-            <a:schemeClr val="lt1"/>
-          </a:fontRef>
-        </p:style>
-        <p:txBody>
-          <a:bodyPr rtlCol="0" anchor="ctr"/>
-          <a:lstStyle/>
-          <a:p>
-            <a:pPr algn="ctr"/>
-          </a:p>
-        </p:txBody>
-      </p:sp>
-      <p:sp>
-        <p:nvSpPr>
-          <p:cNvPr id="11" name="TextBox 10"/>
-          <p:cNvSpPr txBox="1"/>
-          <p:nvPr/>
-        </p:nvSpPr>
-        <p:spPr>
-          <a:xfrm>
-            <a:off x="7269480" y="1783080"/>
-            <a:ext cx="1783080" cy="4114800"/>
-          </a:xfrm>
-          <a:prstGeom prst="rect">
-            <a:avLst/>
-          </a:prstGeom>
-          <a:noFill/>
-        </p:spPr>
-        <p:txBody>
-          <a:bodyPr wrap="square">
-            <a:spAutoFit/>
-          </a:bodyPr>
-          <a:lstStyle/>
-          <a:p>
-            <a:pPr>
-              <a:defRPr sz="1600" b="1">
-                <a:solidFill>
-                  <a:srgbClr val="10B981"/>
-                </a:solidFill>
-              </a:defRPr>
-            </a:pPr>
-            <a:r>
-              <a:t>Anthropic Claude</a:t>
-            </a:r>
-          </a:p>
-          <a:p>
-            <a:pPr>
-              <a:spcBef>
-                <a:spcPts val="200"/>
-              </a:spcBef>
-              <a:defRPr sz="1100" b="1">
-                <a:solidFill>
-                  <a:srgbClr val="64748B"/>
-                </a:solidFill>
-              </a:defRPr>
-            </a:pPr>
-            <a:r>
-              <a:t>Claude 3.5 Sonnet</a:t>
-            </a:r>
-          </a:p>
-          <a:p>
-            <a:pPr>
-              <a:spcBef>
-                <a:spcPts val="800"/>
-              </a:spcBef>
-              <a:defRPr sz="1100">
-                <a:solidFill>
-                  <a:srgbClr val="1E293B"/>
-                </a:solidFill>
-              </a:defRPr>
-            </a:pPr>
-            <a:r>
-              <a:t>Deep reasoning for complex multi-step user scenarios and edge case generation.</a:t>
-            </a:r>
-          </a:p>
-        </p:txBody>
-      </p:sp>
-      <p:sp>
-        <p:nvSpPr>
-          <p:cNvPr id="12" name="Rounded Rectangle 11"/>
-          <p:cNvSpPr/>
-          <p:nvPr/>
-        </p:nvSpPr>
-        <p:spPr>
-          <a:xfrm>
-            <a:off x="9326880" y="1645920"/>
-            <a:ext cx="1965960" cy="4389120"/>
-          </a:xfrm>
-          <a:prstGeom prst="roundRect">
-            <a:avLst/>
-          </a:prstGeom>
-          <a:solidFill>
-            <a:srgbClr val="FFFFFF"/>
-          </a:solidFill>
-          <a:ln w="19050">
-            <a:solidFill>
-              <a:srgbClr val="E2E8F0"/>
-            </a:solidFill>
-          </a:ln>
-        </p:spPr>
-        <p:style>
-          <a:lnRef idx="1">
-            <a:schemeClr val="accent1"/>
-          </a:lnRef>
-          <a:fillRef idx="3">
-            <a:schemeClr val="accent1"/>
-          </a:fillRef>
-          <a:effectRef idx="2">
-            <a:schemeClr val="accent1"/>
-          </a:effectRef>
-          <a:fontRef idx="minor">
-            <a:schemeClr val="lt1"/>
-          </a:fontRef>
-        </p:style>
-        <p:txBody>
-          <a:bodyPr rtlCol="0" anchor="ctr"/>
-          <a:lstStyle/>
-          <a:p>
-            <a:pPr algn="ctr"/>
-          </a:p>
-        </p:txBody>
-      </p:sp>
-      <p:sp>
-        <p:nvSpPr>
-          <p:cNvPr id="13" name="TextBox 12"/>
-          <p:cNvSpPr txBox="1"/>
-          <p:nvPr/>
-        </p:nvSpPr>
-        <p:spPr>
-          <a:xfrm>
-            <a:off x="9418320" y="1783080"/>
-            <a:ext cx="1783080" cy="4114800"/>
-          </a:xfrm>
-          <a:prstGeom prst="rect">
-            <a:avLst/>
-          </a:prstGeom>
-          <a:noFill/>
-        </p:spPr>
-        <p:txBody>
-          <a:bodyPr wrap="square">
-            <a:spAutoFit/>
-          </a:bodyPr>
-          <a:lstStyle/>
-          <a:p>
-            <a:pPr>
-              <a:defRPr sz="1600" b="1">
-                <a:solidFill>
-                  <a:srgbClr val="F59E0B"/>
-                </a:solidFill>
-              </a:defRPr>
-            </a:pPr>
-            <a:r>
-              <a:t>OpenAI</a:t>
-            </a:r>
-          </a:p>
-          <a:p>
-            <a:pPr>
-              <a:spcBef>
-                <a:spcPts val="200"/>
-              </a:spcBef>
-              <a:defRPr sz="1100" b="1">
-                <a:solidFill>
-                  <a:srgbClr val="64748B"/>
-                </a:solidFill>
-              </a:defRPr>
-            </a:pPr>
-            <a:r>
-              <a:t>GPT-4o &amp; GPT-4o-mini</a:t>
-            </a:r>
-          </a:p>
-          <a:p>
-            <a:pPr>
-              <a:spcBef>
-                <a:spcPts val="800"/>
-              </a:spcBef>
-              <a:defRPr sz="1100">
-                <a:solidFill>
-                  <a:srgbClr val="1E293B"/>
-                </a:solidFill>
-              </a:defRPr>
-            </a:pPr>
-            <a:r>
-              <a:t>Robust test scenario generation with JSON schema validation and persona simulation.</a:t>
+              <a:t>LIVE PRODUCT CAPTURE: STEP 5 DASHBOARD: ROUTE HEALTH SCORING CARDS &amp; SCANNED ROUTES TABLE</a:t>
             </a:r>
           </a:p>
         </p:txBody>
@@ -8193,8 +8378,8 @@
         </p:nvSpPr>
         <p:spPr>
           <a:xfrm>
-            <a:off x="731520" y="457200"/>
-            <a:ext cx="10698480" cy="365760"/>
+            <a:off x="731520" y="411480"/>
+            <a:ext cx="10698480" cy="320040"/>
           </a:xfrm>
           <a:prstGeom prst="rect">
             <a:avLst/>
@@ -8208,14 +8393,14 @@
           <a:lstStyle/>
           <a:p>
             <a:pPr>
-              <a:defRPr sz="1100" b="1">
+              <a:defRPr sz="1000" b="1">
                 <a:solidFill>
                   <a:srgbClr val="2563EB"/>
                 </a:solidFill>
               </a:defRPr>
             </a:pPr>
             <a:r>
-              <a:t>STEP 8 TEST RUNNER</a:t>
+              <a:t>STEP 6: SECURITY REVIEW</a:t>
             </a:r>
           </a:p>
         </p:txBody>
@@ -8228,8 +8413,8 @@
         </p:nvSpPr>
         <p:spPr>
           <a:xfrm>
-            <a:off x="731520" y="777240"/>
-            <a:ext cx="10698480" cy="640080"/>
+            <a:off x="731520" y="685800"/>
+            <a:ext cx="10698480" cy="594360"/>
           </a:xfrm>
           <a:prstGeom prst="rect">
             <a:avLst/>
@@ -8243,14 +8428,14 @@
           <a:lstStyle/>
           <a:p>
             <a:pPr>
-              <a:defRPr sz="2400" b="1">
+              <a:defRPr sz="2200" b="1">
                 <a:solidFill>
                   <a:srgbClr val="0B192C"/>
                 </a:solidFill>
               </a:defRPr>
             </a:pPr>
             <a:r>
-              <a:t>Controlled Test Execution &amp; Per-Step Screenshot Evidence</a:t>
+              <a:t>Step 6: Safe Passive DAST &amp; OWASP Top 10 (2021) Mapping</a:t>
             </a:r>
           </a:p>
         </p:txBody>
@@ -8263,8 +8448,8 @@
         </p:nvSpPr>
         <p:spPr>
           <a:xfrm>
-            <a:off x="731520" y="1645920"/>
-            <a:ext cx="5120640" cy="4572000"/>
+            <a:off x="731520" y="1463040"/>
+            <a:ext cx="4663440" cy="4846320"/>
           </a:xfrm>
           <a:prstGeom prst="roundRect">
             <a:avLst/>
@@ -8308,8 +8493,8 @@
         </p:nvSpPr>
         <p:spPr>
           <a:xfrm>
-            <a:off x="914400" y="1828800"/>
-            <a:ext cx="4754880" cy="4206240"/>
+            <a:off x="914400" y="1645920"/>
+            <a:ext cx="4297680" cy="4480560"/>
           </a:xfrm>
           <a:prstGeom prst="rect">
             <a:avLst/>
@@ -8323,14 +8508,14 @@
           <a:lstStyle/>
           <a:p>
             <a:pPr>
-              <a:defRPr sz="1800" b="1">
+              <a:defRPr sz="1600" b="1">
                 <a:solidFill>
                   <a:srgbClr val="0B192C"/>
                 </a:solidFill>
               </a:defRPr>
             </a:pPr>
             <a:r>
-              <a:t>Audit-Grade Execution Telemetry</a:t>
+              <a:t>Authorized, Passive Security Hygiene Assessment</a:t>
             </a:r>
           </a:p>
           <a:p>
@@ -8338,14 +8523,14 @@
               <a:spcBef>
                 <a:spcPts val="800"/>
               </a:spcBef>
-              <a:defRPr sz="1300">
+              <a:defRPr sz="1150">
                 <a:solidFill>
                   <a:srgbClr val="1E293B"/>
                 </a:solidFill>
               </a:defRPr>
             </a:pPr>
             <a:r>
-              <a:t>✔ Playwright Execution Engine: Drives real browser contexts with restored authenticated session state.</a:t>
+              <a:t>✔ OWASP Top 10 (2021) Mapping: Categorizes findings into A01 Broken Access, A02 Crypto, A05 Misconfig, etc.</a:t>
             </a:r>
           </a:p>
           <a:p>
@@ -8353,14 +8538,14 @@
               <a:spcBef>
                 <a:spcPts val="800"/>
               </a:spcBef>
-              <a:defRPr sz="1300">
+              <a:defRPr sz="1150">
                 <a:solidFill>
                   <a:srgbClr val="1E293B"/>
                 </a:solidFill>
               </a:defRPr>
             </a:pPr>
             <a:r>
-              <a:t>✔ Locator Fallback Hierarchy: Executes tests using Role -&gt; ARIA -&gt; Text -&gt; CSS -&gt; XPath.</a:t>
+              <a:t>✔ Security Headers &amp; Cookies: Checks CSP, HSTS, nosniff, Referrer-Policy, HttpOnly, Secure, and SameSite.</a:t>
             </a:r>
           </a:p>
           <a:p>
@@ -8368,14 +8553,14 @@
               <a:spcBef>
                 <a:spcPts val="800"/>
               </a:spcBef>
-              <a:defRPr sz="1300">
+              <a:defRPr sz="1150">
                 <a:solidFill>
                   <a:srgbClr val="1E293B"/>
                 </a:solidFill>
               </a:defRPr>
             </a:pPr>
             <a:r>
-              <a:t>✔ Per-Step Locator Recording: Logs the exact selector engine that satisfied the step.</a:t>
+              <a:t>✔ CORS &amp; Exposure Signals: Flags wildcard CORS with credentials, exposed JWTs, API keys, and DB URIs.</a:t>
             </a:r>
           </a:p>
           <a:p>
@@ -8383,14 +8568,29 @@
               <a:spcBef>
                 <a:spcPts val="800"/>
               </a:spcBef>
-              <a:defRPr sz="1300">
+              <a:defRPr sz="1150">
                 <a:solidFill>
                   <a:srgbClr val="1E293B"/>
                 </a:solidFill>
               </a:defRPr>
             </a:pPr>
             <a:r>
-              <a:t>✔ Single-Step Rerun: Fast troubleshooting of individual steps without re-executing entire regression suite.</a:t>
+              <a:t>✔ Zero Destructive Actions: Non-intrusive GET requests paced at 1 req/sec; zero brute force or fuzzing.</a:t>
+            </a:r>
+          </a:p>
+          <a:p>
+            <a:pPr>
+              <a:spcBef>
+                <a:spcPts val="1400"/>
+              </a:spcBef>
+              <a:defRPr sz="1100" b="1">
+                <a:solidFill>
+                  <a:srgbClr val="2563EB"/>
+                </a:solidFill>
+              </a:defRPr>
+            </a:pPr>
+            <a:r>
+              <a:t>🛡 Enterprise Guarantee: Multi-format exports in JSON, Markdown, and Excel (.xlsx).</a:t>
             </a:r>
           </a:p>
         </p:txBody>
@@ -8403,8 +8603,8 @@
         </p:nvSpPr>
         <p:spPr>
           <a:xfrm>
-            <a:off x="6309360" y="1645920"/>
-            <a:ext cx="5120640" cy="4572000"/>
+            <a:off x="5504688" y="1389888"/>
+            <a:ext cx="5998464" cy="4846320"/>
           </a:xfrm>
           <a:prstGeom prst="roundRect">
             <a:avLst/>
@@ -8414,7 +8614,7 @@
           </a:solidFill>
           <a:ln w="19050">
             <a:solidFill>
-              <a:srgbClr val="E2E8F0"/>
+              <a:srgbClr val="2563EB"/>
             </a:solidFill>
           </a:ln>
         </p:spPr>
@@ -8440,16 +8640,40 @@
           </a:p>
         </p:txBody>
       </p:sp>
-      <p:sp>
-        <p:nvSpPr>
-          <p:cNvPr id="7" name="TextBox 6"/>
+      <p:pic>
+        <p:nvPicPr>
+          <p:cNvPr id="7" name="Picture 6" descr="06_security_assessment.png"/>
+          <p:cNvPicPr>
+            <a:picLocks noChangeAspect="1"/>
+          </p:cNvPicPr>
+          <p:nvPr/>
+        </p:nvPicPr>
+        <p:blipFill>
+          <a:blip r:embed="rId2"/>
+          <a:stretch>
+            <a:fillRect/>
+          </a:stretch>
+        </p:blipFill>
+        <p:spPr>
+          <a:xfrm>
+            <a:off x="5577840" y="1463040"/>
+            <a:ext cx="5852160" cy="4297680"/>
+          </a:xfrm>
+          <a:prstGeom prst="rect">
+            <a:avLst/>
+          </a:prstGeom>
+        </p:spPr>
+      </p:pic>
+      <p:sp>
+        <p:nvSpPr>
+          <p:cNvPr id="8" name="TextBox 7"/>
           <p:cNvSpPr txBox="1"/>
           <p:nvPr/>
         </p:nvSpPr>
         <p:spPr>
           <a:xfrm>
-            <a:off x="6492240" y="1828800"/>
-            <a:ext cx="4754880" cy="4206240"/>
+            <a:off x="5577840" y="5806440"/>
+            <a:ext cx="5852160" cy="365760"/>
           </a:xfrm>
           <a:prstGeom prst="rect">
             <a:avLst/>
@@ -8457,80 +8681,20 @@
           <a:noFill/>
         </p:spPr>
         <p:txBody>
-          <a:bodyPr wrap="square">
+          <a:bodyPr wrap="none">
             <a:spAutoFit/>
           </a:bodyPr>
           <a:lstStyle/>
           <a:p>
-            <a:pPr>
-              <a:defRPr sz="1800" b="1">
-                <a:solidFill>
-                  <a:srgbClr val="0B192C"/>
-                </a:solidFill>
-              </a:defRPr>
-            </a:pPr>
-            <a:r>
-              <a:t>Evidence &amp; Diagnostic Capture</a:t>
-            </a:r>
-          </a:p>
-          <a:p>
-            <a:pPr>
-              <a:spcBef>
-                <a:spcPts val="800"/>
-              </a:spcBef>
-              <a:defRPr sz="1300">
-                <a:solidFill>
-                  <a:srgbClr val="1E293B"/>
-                </a:solidFill>
-              </a:defRPr>
-            </a:pPr>
-            <a:r>
-              <a:t>✔ Per-Step Screenshots: Automatically captures full-resolution PNG images ({tc_id}_{step_id}.png).</a:t>
-            </a:r>
-          </a:p>
-          <a:p>
-            <a:pPr>
-              <a:spcBef>
-                <a:spcPts val="800"/>
-              </a:spcBef>
-              <a:defRPr sz="1300">
-                <a:solidFill>
-                  <a:srgbClr val="1E293B"/>
-                </a:solidFill>
-              </a:defRPr>
-            </a:pPr>
-            <a:r>
-              <a:t>✔ Inline Evidence Modal: Click any test step thumbnail in the dashboard to review screenshot evidence.</a:t>
-            </a:r>
-          </a:p>
-          <a:p>
-            <a:pPr>
-              <a:spcBef>
-                <a:spcPts val="800"/>
-              </a:spcBef>
-              <a:defRPr sz="1300">
-                <a:solidFill>
-                  <a:srgbClr val="1E293B"/>
-                </a:solidFill>
-              </a:defRPr>
-            </a:pPr>
-            <a:r>
-              <a:t>✔ Console Log Ingestion: Captures uncaught JavaScript errors, warnings, and unhandled promise rejections.</a:t>
-            </a:r>
-          </a:p>
-          <a:p>
-            <a:pPr>
-              <a:spcBef>
-                <a:spcPts val="800"/>
-              </a:spcBef>
-              <a:defRPr sz="1300">
-                <a:solidFill>
-                  <a:srgbClr val="1E293B"/>
-                </a:solidFill>
-              </a:defRPr>
-            </a:pPr>
-            <a:r>
-              <a:t>✔ Network Failure Telemetry: Correlates failing steps with failed HTTP requests (4xx, 5xx, or network drops).</a:t>
+            <a:pPr algn="ctr">
+              <a:defRPr sz="950" b="1">
+                <a:solidFill>
+                  <a:srgbClr val="64748B"/>
+                </a:solidFill>
+              </a:defRPr>
+            </a:pPr>
+            <a:r>
+              <a:t>LIVE PRODUCT CAPTURE: STEP 6 SECURITY PANEL: SEVERITY CARDS, FILTERABLE FINDINGS &amp; EXPORT CONTROLS</a:t>
             </a:r>
           </a:p>
         </p:txBody>

--- a/presentation/pione_testmate_presentation.pptx
+++ b/presentation/pione_testmate_presentation.pptx
@@ -4,29 +4,32 @@
   <p:sldMasterIdLst>
     <p:sldMasterId id="2147483648" r:id="rId1"/>
   </p:sldMasterIdLst>
+  <p:notesMasterIdLst>
+    <p:notesMasterId r:id="rId22"/>
+  </p:notesMasterIdLst>
   <p:sldIdLst>
-    <p:sldId id="256" r:id="rId7"/>
-    <p:sldId id="257" r:id="rId8"/>
-    <p:sldId id="258" r:id="rId9"/>
-    <p:sldId id="259" r:id="rId10"/>
-    <p:sldId id="260" r:id="rId11"/>
-    <p:sldId id="261" r:id="rId12"/>
-    <p:sldId id="262" r:id="rId13"/>
-    <p:sldId id="263" r:id="rId14"/>
-    <p:sldId id="264" r:id="rId15"/>
-    <p:sldId id="265" r:id="rId16"/>
-    <p:sldId id="266" r:id="rId17"/>
-    <p:sldId id="267" r:id="rId18"/>
-    <p:sldId id="268" r:id="rId19"/>
-    <p:sldId id="269" r:id="rId20"/>
-    <p:sldId id="270" r:id="rId21"/>
-    <p:sldId id="271" r:id="rId22"/>
-    <p:sldId id="272" r:id="rId23"/>
-    <p:sldId id="273" r:id="rId24"/>
-    <p:sldId id="274" r:id="rId25"/>
-    <p:sldId id="275" r:id="rId26"/>
+    <p:sldId id="256" r:id="rId2"/>
+    <p:sldId id="257" r:id="rId3"/>
+    <p:sldId id="258" r:id="rId4"/>
+    <p:sldId id="259" r:id="rId5"/>
+    <p:sldId id="260" r:id="rId6"/>
+    <p:sldId id="261" r:id="rId7"/>
+    <p:sldId id="262" r:id="rId8"/>
+    <p:sldId id="263" r:id="rId9"/>
+    <p:sldId id="264" r:id="rId10"/>
+    <p:sldId id="265" r:id="rId11"/>
+    <p:sldId id="266" r:id="rId12"/>
+    <p:sldId id="267" r:id="rId13"/>
+    <p:sldId id="268" r:id="rId14"/>
+    <p:sldId id="269" r:id="rId15"/>
+    <p:sldId id="270" r:id="rId16"/>
+    <p:sldId id="271" r:id="rId17"/>
+    <p:sldId id="272" r:id="rId18"/>
+    <p:sldId id="273" r:id="rId19"/>
+    <p:sldId id="274" r:id="rId20"/>
+    <p:sldId id="275" r:id="rId21"/>
   </p:sldIdLst>
-  <p:sldSz cx="12191695" cy="6858000" type="screen4x3"/>
+  <p:sldSz cx="12192000" cy="6858000"/>
   <p:notesSz cx="6858000" cy="9144000"/>
   <p:defaultTextStyle>
     <a:defPPr>
@@ -123,7 +126,635 @@
       </a:defRPr>
     </a:lvl9pPr>
   </p:defaultTextStyle>
+  <p:extLst>
+    <p:ext uri="{EFAFB233-063F-42B5-8137-9DF3F51BA10A}">
+      <p15:sldGuideLst xmlns:p15="http://schemas.microsoft.com/office/powerpoint/2012/main">
+        <p15:guide id="1" orient="horz" pos="2160">
+          <p15:clr>
+            <a:srgbClr val="A4A3A4"/>
+          </p15:clr>
+        </p15:guide>
+        <p15:guide id="2" pos="2880">
+          <p15:clr>
+            <a:srgbClr val="A4A3A4"/>
+          </p15:clr>
+        </p15:guide>
+      </p15:sldGuideLst>
+    </p:ext>
+  </p:extLst>
 </p:presentation>
+</file>
+
+<file path=ppt/changesInfos/changesInfo1.xml><?xml version="1.0" encoding="utf-8"?>
+<pc:chgInfo xmlns:a="http://schemas.openxmlformats.org/drawingml/2006/main" xmlns:r="http://schemas.openxmlformats.org/officeDocument/2006/relationships" xmlns:ac="http://schemas.microsoft.com/office/drawing/2013/main/command" xmlns:pc="http://schemas.microsoft.com/office/powerpoint/2013/main/command">
+  <pc:docChgLst>
+    <pc:chgData name="Deepak Raj" userId="d6b445e7-9dc4-45ad-ba0f-07fe91c04262" providerId="ADAL" clId="{C9D10BB1-77BE-4FB4-8409-07AF18014593}"/>
+    <pc:docChg chg="custSel modSld sldOrd">
+      <pc:chgData name="Deepak Raj" userId="d6b445e7-9dc4-45ad-ba0f-07fe91c04262" providerId="ADAL" clId="{C9D10BB1-77BE-4FB4-8409-07AF18014593}" dt="2026-10-23T13:12:03.342" v="21"/>
+      <pc:docMkLst>
+        <pc:docMk/>
+      </pc:docMkLst>
+      <pc:sldChg chg="modSp mod">
+        <pc:chgData name="Deepak Raj" userId="d6b445e7-9dc4-45ad-ba0f-07fe91c04262" providerId="ADAL" clId="{C9D10BB1-77BE-4FB4-8409-07AF18014593}" dt="2026-10-23T13:10:02.929" v="3" actId="26606"/>
+        <pc:sldMkLst>
+          <pc:docMk/>
+          <pc:sldMk cId="0" sldId="261"/>
+        </pc:sldMkLst>
+        <pc:picChg chg="mod">
+          <ac:chgData name="Deepak Raj" userId="d6b445e7-9dc4-45ad-ba0f-07fe91c04262" providerId="ADAL" clId="{C9D10BB1-77BE-4FB4-8409-07AF18014593}" dt="2026-10-23T13:10:02.929" v="3" actId="26606"/>
+          <ac:picMkLst>
+            <pc:docMk/>
+            <pc:sldMk cId="0" sldId="261"/>
+            <ac:picMk id="7" creationId="{00000000-0000-0000-0000-000000000000}"/>
+          </ac:picMkLst>
+        </pc:picChg>
+      </pc:sldChg>
+      <pc:sldChg chg="modSp mod">
+        <pc:chgData name="Deepak Raj" userId="d6b445e7-9dc4-45ad-ba0f-07fe91c04262" providerId="ADAL" clId="{C9D10BB1-77BE-4FB4-8409-07AF18014593}" dt="2026-10-23T13:10:02.929" v="3" actId="26606"/>
+        <pc:sldMkLst>
+          <pc:docMk/>
+          <pc:sldMk cId="0" sldId="262"/>
+        </pc:sldMkLst>
+        <pc:picChg chg="mod">
+          <ac:chgData name="Deepak Raj" userId="d6b445e7-9dc4-45ad-ba0f-07fe91c04262" providerId="ADAL" clId="{C9D10BB1-77BE-4FB4-8409-07AF18014593}" dt="2026-10-23T13:10:02.929" v="3" actId="26606"/>
+          <ac:picMkLst>
+            <pc:docMk/>
+            <pc:sldMk cId="0" sldId="262"/>
+            <ac:picMk id="7" creationId="{00000000-0000-0000-0000-000000000000}"/>
+          </ac:picMkLst>
+        </pc:picChg>
+      </pc:sldChg>
+      <pc:sldChg chg="modSp mod">
+        <pc:chgData name="Deepak Raj" userId="d6b445e7-9dc4-45ad-ba0f-07fe91c04262" providerId="ADAL" clId="{C9D10BB1-77BE-4FB4-8409-07AF18014593}" dt="2026-10-23T13:10:02.929" v="3" actId="26606"/>
+        <pc:sldMkLst>
+          <pc:docMk/>
+          <pc:sldMk cId="0" sldId="263"/>
+        </pc:sldMkLst>
+        <pc:picChg chg="mod">
+          <ac:chgData name="Deepak Raj" userId="d6b445e7-9dc4-45ad-ba0f-07fe91c04262" providerId="ADAL" clId="{C9D10BB1-77BE-4FB4-8409-07AF18014593}" dt="2026-10-23T13:10:02.929" v="3" actId="26606"/>
+          <ac:picMkLst>
+            <pc:docMk/>
+            <pc:sldMk cId="0" sldId="263"/>
+            <ac:picMk id="7" creationId="{00000000-0000-0000-0000-000000000000}"/>
+          </ac:picMkLst>
+        </pc:picChg>
+      </pc:sldChg>
+      <pc:sldChg chg="modSp mod">
+        <pc:chgData name="Deepak Raj" userId="d6b445e7-9dc4-45ad-ba0f-07fe91c04262" providerId="ADAL" clId="{C9D10BB1-77BE-4FB4-8409-07AF18014593}" dt="2026-10-23T13:10:02.929" v="3" actId="26606"/>
+        <pc:sldMkLst>
+          <pc:docMk/>
+          <pc:sldMk cId="0" sldId="264"/>
+        </pc:sldMkLst>
+        <pc:picChg chg="mod">
+          <ac:chgData name="Deepak Raj" userId="d6b445e7-9dc4-45ad-ba0f-07fe91c04262" providerId="ADAL" clId="{C9D10BB1-77BE-4FB4-8409-07AF18014593}" dt="2026-10-23T13:10:02.929" v="3" actId="26606"/>
+          <ac:picMkLst>
+            <pc:docMk/>
+            <pc:sldMk cId="0" sldId="264"/>
+            <ac:picMk id="7" creationId="{00000000-0000-0000-0000-000000000000}"/>
+          </ac:picMkLst>
+        </pc:picChg>
+      </pc:sldChg>
+      <pc:sldChg chg="modSp mod">
+        <pc:chgData name="Deepak Raj" userId="d6b445e7-9dc4-45ad-ba0f-07fe91c04262" providerId="ADAL" clId="{C9D10BB1-77BE-4FB4-8409-07AF18014593}" dt="2026-10-23T13:10:02.929" v="3" actId="26606"/>
+        <pc:sldMkLst>
+          <pc:docMk/>
+          <pc:sldMk cId="0" sldId="265"/>
+        </pc:sldMkLst>
+        <pc:picChg chg="mod">
+          <ac:chgData name="Deepak Raj" userId="d6b445e7-9dc4-45ad-ba0f-07fe91c04262" providerId="ADAL" clId="{C9D10BB1-77BE-4FB4-8409-07AF18014593}" dt="2026-10-23T13:10:02.929" v="3" actId="26606"/>
+          <ac:picMkLst>
+            <pc:docMk/>
+            <pc:sldMk cId="0" sldId="265"/>
+            <ac:picMk id="7" creationId="{00000000-0000-0000-0000-000000000000}"/>
+          </ac:picMkLst>
+        </pc:picChg>
+      </pc:sldChg>
+      <pc:sldChg chg="modSp mod">
+        <pc:chgData name="Deepak Raj" userId="d6b445e7-9dc4-45ad-ba0f-07fe91c04262" providerId="ADAL" clId="{C9D10BB1-77BE-4FB4-8409-07AF18014593}" dt="2026-10-23T13:10:02.929" v="3" actId="26606"/>
+        <pc:sldMkLst>
+          <pc:docMk/>
+          <pc:sldMk cId="0" sldId="266"/>
+        </pc:sldMkLst>
+        <pc:picChg chg="mod">
+          <ac:chgData name="Deepak Raj" userId="d6b445e7-9dc4-45ad-ba0f-07fe91c04262" providerId="ADAL" clId="{C9D10BB1-77BE-4FB4-8409-07AF18014593}" dt="2026-10-23T13:10:02.929" v="3" actId="26606"/>
+          <ac:picMkLst>
+            <pc:docMk/>
+            <pc:sldMk cId="0" sldId="266"/>
+            <ac:picMk id="7" creationId="{00000000-0000-0000-0000-000000000000}"/>
+          </ac:picMkLst>
+        </pc:picChg>
+      </pc:sldChg>
+      <pc:sldChg chg="modSp mod">
+        <pc:chgData name="Deepak Raj" userId="d6b445e7-9dc4-45ad-ba0f-07fe91c04262" providerId="ADAL" clId="{C9D10BB1-77BE-4FB4-8409-07AF18014593}" dt="2026-10-23T13:10:02.929" v="3" actId="26606"/>
+        <pc:sldMkLst>
+          <pc:docMk/>
+          <pc:sldMk cId="0" sldId="267"/>
+        </pc:sldMkLst>
+        <pc:picChg chg="mod">
+          <ac:chgData name="Deepak Raj" userId="d6b445e7-9dc4-45ad-ba0f-07fe91c04262" providerId="ADAL" clId="{C9D10BB1-77BE-4FB4-8409-07AF18014593}" dt="2026-10-23T13:10:02.929" v="3" actId="26606"/>
+          <ac:picMkLst>
+            <pc:docMk/>
+            <pc:sldMk cId="0" sldId="267"/>
+            <ac:picMk id="7" creationId="{00000000-0000-0000-0000-000000000000}"/>
+          </ac:picMkLst>
+        </pc:picChg>
+      </pc:sldChg>
+      <pc:sldChg chg="modSp mod">
+        <pc:chgData name="Deepak Raj" userId="d6b445e7-9dc4-45ad-ba0f-07fe91c04262" providerId="ADAL" clId="{C9D10BB1-77BE-4FB4-8409-07AF18014593}" dt="2026-10-23T13:11:51.077" v="17" actId="1037"/>
+        <pc:sldMkLst>
+          <pc:docMk/>
+          <pc:sldMk cId="0" sldId="268"/>
+        </pc:sldMkLst>
+        <pc:picChg chg="mod">
+          <ac:chgData name="Deepak Raj" userId="d6b445e7-9dc4-45ad-ba0f-07fe91c04262" providerId="ADAL" clId="{C9D10BB1-77BE-4FB4-8409-07AF18014593}" dt="2026-10-23T13:11:51.077" v="17" actId="1037"/>
+          <ac:picMkLst>
+            <pc:docMk/>
+            <pc:sldMk cId="0" sldId="268"/>
+            <ac:picMk id="7" creationId="{00000000-0000-0000-0000-000000000000}"/>
+          </ac:picMkLst>
+        </pc:picChg>
+      </pc:sldChg>
+      <pc:sldChg chg="modSp mod ord">
+        <pc:chgData name="Deepak Raj" userId="d6b445e7-9dc4-45ad-ba0f-07fe91c04262" providerId="ADAL" clId="{C9D10BB1-77BE-4FB4-8409-07AF18014593}" dt="2026-10-23T13:12:03.342" v="21"/>
+        <pc:sldMkLst>
+          <pc:docMk/>
+          <pc:sldMk cId="0" sldId="269"/>
+        </pc:sldMkLst>
+        <pc:picChg chg="mod">
+          <ac:chgData name="Deepak Raj" userId="d6b445e7-9dc4-45ad-ba0f-07fe91c04262" providerId="ADAL" clId="{C9D10BB1-77BE-4FB4-8409-07AF18014593}" dt="2026-10-23T13:10:02.929" v="3" actId="26606"/>
+          <ac:picMkLst>
+            <pc:docMk/>
+            <pc:sldMk cId="0" sldId="269"/>
+            <ac:picMk id="7" creationId="{00000000-0000-0000-0000-000000000000}"/>
+          </ac:picMkLst>
+        </pc:picChg>
+      </pc:sldChg>
+      <pc:sldChg chg="modSp mod">
+        <pc:chgData name="Deepak Raj" userId="d6b445e7-9dc4-45ad-ba0f-07fe91c04262" providerId="ADAL" clId="{C9D10BB1-77BE-4FB4-8409-07AF18014593}" dt="2026-10-23T13:10:02.929" v="3" actId="26606"/>
+        <pc:sldMkLst>
+          <pc:docMk/>
+          <pc:sldMk cId="0" sldId="270"/>
+        </pc:sldMkLst>
+        <pc:picChg chg="mod">
+          <ac:chgData name="Deepak Raj" userId="d6b445e7-9dc4-45ad-ba0f-07fe91c04262" providerId="ADAL" clId="{C9D10BB1-77BE-4FB4-8409-07AF18014593}" dt="2026-10-23T13:10:02.929" v="3" actId="26606"/>
+          <ac:picMkLst>
+            <pc:docMk/>
+            <pc:sldMk cId="0" sldId="270"/>
+            <ac:picMk id="7" creationId="{00000000-0000-0000-0000-000000000000}"/>
+          </ac:picMkLst>
+        </pc:picChg>
+      </pc:sldChg>
+      <pc:sldChg chg="modSp mod">
+        <pc:chgData name="Deepak Raj" userId="d6b445e7-9dc4-45ad-ba0f-07fe91c04262" providerId="ADAL" clId="{C9D10BB1-77BE-4FB4-8409-07AF18014593}" dt="2026-10-23T13:10:02.929" v="3" actId="26606"/>
+        <pc:sldMkLst>
+          <pc:docMk/>
+          <pc:sldMk cId="0" sldId="271"/>
+        </pc:sldMkLst>
+        <pc:picChg chg="mod">
+          <ac:chgData name="Deepak Raj" userId="d6b445e7-9dc4-45ad-ba0f-07fe91c04262" providerId="ADAL" clId="{C9D10BB1-77BE-4FB4-8409-07AF18014593}" dt="2026-10-23T13:10:02.929" v="3" actId="26606"/>
+          <ac:picMkLst>
+            <pc:docMk/>
+            <pc:sldMk cId="0" sldId="271"/>
+            <ac:picMk id="7" creationId="{00000000-0000-0000-0000-000000000000}"/>
+          </ac:picMkLst>
+        </pc:picChg>
+      </pc:sldChg>
+    </pc:docChg>
+  </pc:docChgLst>
+</pc:chgInfo>
+</file>
+
+<file path=ppt/notesMasters/notesMaster1.xml><?xml version="1.0" encoding="utf-8"?>
+<p:notesMaster xmlns:a="http://schemas.openxmlformats.org/drawingml/2006/main" xmlns:r="http://schemas.openxmlformats.org/officeDocument/2006/relationships" xmlns:p="http://schemas.openxmlformats.org/presentationml/2006/main">
+  <p:cSld>
+    <p:bg>
+      <p:bgRef idx="1001">
+        <a:schemeClr val="bg1"/>
+      </p:bgRef>
+    </p:bg>
+    <p:spTree>
+      <p:nvGrpSpPr>
+        <p:cNvPr id="1" name=""/>
+        <p:cNvGrpSpPr/>
+        <p:nvPr/>
+      </p:nvGrpSpPr>
+      <p:grpSpPr>
+        <a:xfrm>
+          <a:off x="0" y="0"/>
+          <a:ext cx="0" cy="0"/>
+          <a:chOff x="0" y="0"/>
+          <a:chExt cx="0" cy="0"/>
+        </a:xfrm>
+      </p:grpSpPr>
+      <p:sp>
+        <p:nvSpPr>
+          <p:cNvPr id="2" name="Header Placeholder 1"/>
+          <p:cNvSpPr>
+            <a:spLocks noGrp="1"/>
+          </p:cNvSpPr>
+          <p:nvPr>
+            <p:ph type="hdr" sz="quarter"/>
+          </p:nvPr>
+        </p:nvSpPr>
+        <p:spPr>
+          <a:xfrm>
+            <a:off x="0" y="0"/>
+            <a:ext cx="2971800" cy="458788"/>
+          </a:xfrm>
+          <a:prstGeom prst="rect">
+            <a:avLst/>
+          </a:prstGeom>
+        </p:spPr>
+        <p:txBody>
+          <a:bodyPr vert="horz" lIns="91440" tIns="45720" rIns="91440" bIns="45720" rtlCol="0"/>
+          <a:lstStyle>
+            <a:lvl1pPr algn="l">
+              <a:defRPr sz="1200"/>
+            </a:lvl1pPr>
+          </a:lstStyle>
+          <a:p>
+            <a:endParaRPr lang="en-US"/>
+          </a:p>
+        </p:txBody>
+      </p:sp>
+      <p:sp>
+        <p:nvSpPr>
+          <p:cNvPr id="3" name="Date Placeholder 2"/>
+          <p:cNvSpPr>
+            <a:spLocks noGrp="1"/>
+          </p:cNvSpPr>
+          <p:nvPr>
+            <p:ph type="dt" idx="1"/>
+          </p:nvPr>
+        </p:nvSpPr>
+        <p:spPr>
+          <a:xfrm>
+            <a:off x="3884613" y="0"/>
+            <a:ext cx="2971800" cy="458788"/>
+          </a:xfrm>
+          <a:prstGeom prst="rect">
+            <a:avLst/>
+          </a:prstGeom>
+        </p:spPr>
+        <p:txBody>
+          <a:bodyPr vert="horz" lIns="91440" tIns="45720" rIns="91440" bIns="45720" rtlCol="0"/>
+          <a:lstStyle>
+            <a:lvl1pPr algn="r">
+              <a:defRPr sz="1200"/>
+            </a:lvl1pPr>
+          </a:lstStyle>
+          <a:p>
+            <a:fld id="{63535F24-5DFD-432D-93AF-75040FF3CF90}" type="datetimeFigureOut">
+              <a:rPr lang="en-US" smtClean="0"/>
+              <a:t>10/23/2026</a:t>
+            </a:fld>
+            <a:endParaRPr lang="en-US"/>
+          </a:p>
+        </p:txBody>
+      </p:sp>
+      <p:sp>
+        <p:nvSpPr>
+          <p:cNvPr id="4" name="Slide Image Placeholder 3"/>
+          <p:cNvSpPr>
+            <a:spLocks noGrp="1" noRot="1" noChangeAspect="1"/>
+          </p:cNvSpPr>
+          <p:nvPr>
+            <p:ph type="sldImg" idx="2"/>
+          </p:nvPr>
+        </p:nvSpPr>
+        <p:spPr>
+          <a:xfrm>
+            <a:off x="685800" y="1143000"/>
+            <a:ext cx="5486400" cy="3086100"/>
+          </a:xfrm>
+          <a:prstGeom prst="rect">
+            <a:avLst/>
+          </a:prstGeom>
+          <a:noFill/>
+          <a:ln w="12700">
+            <a:solidFill>
+              <a:prstClr val="black"/>
+            </a:solidFill>
+          </a:ln>
+        </p:spPr>
+        <p:txBody>
+          <a:bodyPr vert="horz" lIns="91440" tIns="45720" rIns="91440" bIns="45720" rtlCol="0" anchor="ctr"/>
+          <a:lstStyle/>
+          <a:p>
+            <a:endParaRPr lang="en-US"/>
+          </a:p>
+        </p:txBody>
+      </p:sp>
+      <p:sp>
+        <p:nvSpPr>
+          <p:cNvPr id="5" name="Notes Placeholder 4"/>
+          <p:cNvSpPr>
+            <a:spLocks noGrp="1"/>
+          </p:cNvSpPr>
+          <p:nvPr>
+            <p:ph type="body" sz="quarter" idx="3"/>
+          </p:nvPr>
+        </p:nvSpPr>
+        <p:spPr>
+          <a:xfrm>
+            <a:off x="685800" y="4400550"/>
+            <a:ext cx="5486400" cy="3600450"/>
+          </a:xfrm>
+          <a:prstGeom prst="rect">
+            <a:avLst/>
+          </a:prstGeom>
+        </p:spPr>
+        <p:txBody>
+          <a:bodyPr vert="horz" lIns="91440" tIns="45720" rIns="91440" bIns="45720" rtlCol="0"/>
+          <a:lstStyle/>
+          <a:p>
+            <a:pPr lvl="0"/>
+            <a:r>
+              <a:rPr lang="en-US"/>
+              <a:t>Click to edit Master text styles</a:t>
+            </a:r>
+          </a:p>
+          <a:p>
+            <a:pPr lvl="1"/>
+            <a:r>
+              <a:rPr lang="en-US"/>
+              <a:t>Second level</a:t>
+            </a:r>
+          </a:p>
+          <a:p>
+            <a:pPr lvl="2"/>
+            <a:r>
+              <a:rPr lang="en-US"/>
+              <a:t>Third level</a:t>
+            </a:r>
+          </a:p>
+          <a:p>
+            <a:pPr lvl="3"/>
+            <a:r>
+              <a:rPr lang="en-US"/>
+              <a:t>Fourth level</a:t>
+            </a:r>
+          </a:p>
+          <a:p>
+            <a:pPr lvl="4"/>
+            <a:r>
+              <a:rPr lang="en-US"/>
+              <a:t>Fifth level</a:t>
+            </a:r>
+          </a:p>
+        </p:txBody>
+      </p:sp>
+      <p:sp>
+        <p:nvSpPr>
+          <p:cNvPr id="6" name="Footer Placeholder 5"/>
+          <p:cNvSpPr>
+            <a:spLocks noGrp="1"/>
+          </p:cNvSpPr>
+          <p:nvPr>
+            <p:ph type="ftr" sz="quarter" idx="4"/>
+          </p:nvPr>
+        </p:nvSpPr>
+        <p:spPr>
+          <a:xfrm>
+            <a:off x="0" y="8685213"/>
+            <a:ext cx="2971800" cy="458787"/>
+          </a:xfrm>
+          <a:prstGeom prst="rect">
+            <a:avLst/>
+          </a:prstGeom>
+        </p:spPr>
+        <p:txBody>
+          <a:bodyPr vert="horz" lIns="91440" tIns="45720" rIns="91440" bIns="45720" rtlCol="0" anchor="b"/>
+          <a:lstStyle>
+            <a:lvl1pPr algn="l">
+              <a:defRPr sz="1200"/>
+            </a:lvl1pPr>
+          </a:lstStyle>
+          <a:p>
+            <a:endParaRPr lang="en-US"/>
+          </a:p>
+        </p:txBody>
+      </p:sp>
+      <p:sp>
+        <p:nvSpPr>
+          <p:cNvPr id="7" name="Slide Number Placeholder 6"/>
+          <p:cNvSpPr>
+            <a:spLocks noGrp="1"/>
+          </p:cNvSpPr>
+          <p:nvPr>
+            <p:ph type="sldNum" sz="quarter" idx="5"/>
+          </p:nvPr>
+        </p:nvSpPr>
+        <p:spPr>
+          <a:xfrm>
+            <a:off x="3884613" y="8685213"/>
+            <a:ext cx="2971800" cy="458787"/>
+          </a:xfrm>
+          <a:prstGeom prst="rect">
+            <a:avLst/>
+          </a:prstGeom>
+        </p:spPr>
+        <p:txBody>
+          <a:bodyPr vert="horz" lIns="91440" tIns="45720" rIns="91440" bIns="45720" rtlCol="0" anchor="b"/>
+          <a:lstStyle>
+            <a:lvl1pPr algn="r">
+              <a:defRPr sz="1200"/>
+            </a:lvl1pPr>
+          </a:lstStyle>
+          <a:p>
+            <a:fld id="{3C953744-B112-4379-8299-2FC74C2341AE}" type="slidenum">
+              <a:rPr lang="en-US" smtClean="0"/>
+              <a:t>‹#›</a:t>
+            </a:fld>
+            <a:endParaRPr lang="en-US"/>
+          </a:p>
+        </p:txBody>
+      </p:sp>
+    </p:spTree>
+    <p:extLst>
+      <p:ext uri="{BB962C8B-B14F-4D97-AF65-F5344CB8AC3E}">
+        <p14:creationId xmlns:p14="http://schemas.microsoft.com/office/powerpoint/2010/main" val="4219052259"/>
+      </p:ext>
+    </p:extLst>
+  </p:cSld>
+  <p:clrMap bg1="lt1" tx1="dk1" bg2="lt2" tx2="dk2" accent1="accent1" accent2="accent2" accent3="accent3" accent4="accent4" accent5="accent5" accent6="accent6" hlink="hlink" folHlink="folHlink"/>
+  <p:notesStyle>
+    <a:lvl1pPr marL="0" algn="l" defTabSz="914400" rtl="0" eaLnBrk="1" latinLnBrk="0" hangingPunct="1">
+      <a:defRPr sz="1200" kern="1200">
+        <a:solidFill>
+          <a:schemeClr val="tx1"/>
+        </a:solidFill>
+        <a:latin typeface="+mn-lt"/>
+        <a:ea typeface="+mn-ea"/>
+        <a:cs typeface="+mn-cs"/>
+      </a:defRPr>
+    </a:lvl1pPr>
+    <a:lvl2pPr marL="457200" algn="l" defTabSz="914400" rtl="0" eaLnBrk="1" latinLnBrk="0" hangingPunct="1">
+      <a:defRPr sz="1200" kern="1200">
+        <a:solidFill>
+          <a:schemeClr val="tx1"/>
+        </a:solidFill>
+        <a:latin typeface="+mn-lt"/>
+        <a:ea typeface="+mn-ea"/>
+        <a:cs typeface="+mn-cs"/>
+      </a:defRPr>
+    </a:lvl2pPr>
+    <a:lvl3pPr marL="914400" algn="l" defTabSz="914400" rtl="0" eaLnBrk="1" latinLnBrk="0" hangingPunct="1">
+      <a:defRPr sz="1200" kern="1200">
+        <a:solidFill>
+          <a:schemeClr val="tx1"/>
+        </a:solidFill>
+        <a:latin typeface="+mn-lt"/>
+        <a:ea typeface="+mn-ea"/>
+        <a:cs typeface="+mn-cs"/>
+      </a:defRPr>
+    </a:lvl3pPr>
+    <a:lvl4pPr marL="1371600" algn="l" defTabSz="914400" rtl="0" eaLnBrk="1" latinLnBrk="0" hangingPunct="1">
+      <a:defRPr sz="1200" kern="1200">
+        <a:solidFill>
+          <a:schemeClr val="tx1"/>
+        </a:solidFill>
+        <a:latin typeface="+mn-lt"/>
+        <a:ea typeface="+mn-ea"/>
+        <a:cs typeface="+mn-cs"/>
+      </a:defRPr>
+    </a:lvl4pPr>
+    <a:lvl5pPr marL="1828800" algn="l" defTabSz="914400" rtl="0" eaLnBrk="1" latinLnBrk="0" hangingPunct="1">
+      <a:defRPr sz="1200" kern="1200">
+        <a:solidFill>
+          <a:schemeClr val="tx1"/>
+        </a:solidFill>
+        <a:latin typeface="+mn-lt"/>
+        <a:ea typeface="+mn-ea"/>
+        <a:cs typeface="+mn-cs"/>
+      </a:defRPr>
+    </a:lvl5pPr>
+    <a:lvl6pPr marL="2286000" algn="l" defTabSz="914400" rtl="0" eaLnBrk="1" latinLnBrk="0" hangingPunct="1">
+      <a:defRPr sz="1200" kern="1200">
+        <a:solidFill>
+          <a:schemeClr val="tx1"/>
+        </a:solidFill>
+        <a:latin typeface="+mn-lt"/>
+        <a:ea typeface="+mn-ea"/>
+        <a:cs typeface="+mn-cs"/>
+      </a:defRPr>
+    </a:lvl6pPr>
+    <a:lvl7pPr marL="2743200" algn="l" defTabSz="914400" rtl="0" eaLnBrk="1" latinLnBrk="0" hangingPunct="1">
+      <a:defRPr sz="1200" kern="1200">
+        <a:solidFill>
+          <a:schemeClr val="tx1"/>
+        </a:solidFill>
+        <a:latin typeface="+mn-lt"/>
+        <a:ea typeface="+mn-ea"/>
+        <a:cs typeface="+mn-cs"/>
+      </a:defRPr>
+    </a:lvl7pPr>
+    <a:lvl8pPr marL="3200400" algn="l" defTabSz="914400" rtl="0" eaLnBrk="1" latinLnBrk="0" hangingPunct="1">
+      <a:defRPr sz="1200" kern="1200">
+        <a:solidFill>
+          <a:schemeClr val="tx1"/>
+        </a:solidFill>
+        <a:latin typeface="+mn-lt"/>
+        <a:ea typeface="+mn-ea"/>
+        <a:cs typeface="+mn-cs"/>
+      </a:defRPr>
+    </a:lvl8pPr>
+    <a:lvl9pPr marL="3657600" algn="l" defTabSz="914400" rtl="0" eaLnBrk="1" latinLnBrk="0" hangingPunct="1">
+      <a:defRPr sz="1200" kern="1200">
+        <a:solidFill>
+          <a:schemeClr val="tx1"/>
+        </a:solidFill>
+        <a:latin typeface="+mn-lt"/>
+        <a:ea typeface="+mn-ea"/>
+        <a:cs typeface="+mn-cs"/>
+      </a:defRPr>
+    </a:lvl9pPr>
+  </p:notesStyle>
+</p:notesMaster>
+</file>
+
+<file path=ppt/notesSlides/notesSlide1.xml><?xml version="1.0" encoding="utf-8"?>
+<p:notes xmlns:a="http://schemas.openxmlformats.org/drawingml/2006/main" xmlns:r="http://schemas.openxmlformats.org/officeDocument/2006/relationships" xmlns:p="http://schemas.openxmlformats.org/presentationml/2006/main">
+  <p:cSld>
+    <p:spTree>
+      <p:nvGrpSpPr>
+        <p:cNvPr id="1" name=""/>
+        <p:cNvGrpSpPr/>
+        <p:nvPr/>
+      </p:nvGrpSpPr>
+      <p:grpSpPr>
+        <a:xfrm>
+          <a:off x="0" y="0"/>
+          <a:ext cx="0" cy="0"/>
+          <a:chOff x="0" y="0"/>
+          <a:chExt cx="0" cy="0"/>
+        </a:xfrm>
+      </p:grpSpPr>
+      <p:sp>
+        <p:nvSpPr>
+          <p:cNvPr id="2" name="Slide Image Placeholder 1"/>
+          <p:cNvSpPr>
+            <a:spLocks noGrp="1" noRot="1" noChangeAspect="1"/>
+          </p:cNvSpPr>
+          <p:nvPr>
+            <p:ph type="sldImg"/>
+          </p:nvPr>
+        </p:nvSpPr>
+        <p:spPr/>
+      </p:sp>
+      <p:sp>
+        <p:nvSpPr>
+          <p:cNvPr id="3" name="Notes Placeholder 2"/>
+          <p:cNvSpPr>
+            <a:spLocks noGrp="1"/>
+          </p:cNvSpPr>
+          <p:nvPr>
+            <p:ph type="body" idx="1"/>
+          </p:nvPr>
+        </p:nvSpPr>
+        <p:spPr/>
+        <p:txBody>
+          <a:bodyPr/>
+          <a:lstStyle/>
+          <a:p>
+            <a:endParaRPr lang="en-US" dirty="0"/>
+          </a:p>
+        </p:txBody>
+      </p:sp>
+      <p:sp>
+        <p:nvSpPr>
+          <p:cNvPr id="4" name="Slide Number Placeholder 3"/>
+          <p:cNvSpPr>
+            <a:spLocks noGrp="1"/>
+          </p:cNvSpPr>
+          <p:nvPr>
+            <p:ph type="sldNum" sz="quarter" idx="5"/>
+          </p:nvPr>
+        </p:nvSpPr>
+        <p:spPr/>
+        <p:txBody>
+          <a:bodyPr/>
+          <a:lstStyle/>
+          <a:p>
+            <a:fld id="{3C953744-B112-4379-8299-2FC74C2341AE}" type="slidenum">
+              <a:rPr lang="en-US" smtClean="0"/>
+              <a:t>13</a:t>
+            </a:fld>
+            <a:endParaRPr lang="en-US"/>
+          </a:p>
+        </p:txBody>
+      </p:sp>
+    </p:spTree>
+    <p:extLst>
+      <p:ext uri="{BB962C8B-B14F-4D97-AF65-F5344CB8AC3E}">
+        <p14:creationId xmlns:p14="http://schemas.microsoft.com/office/powerpoint/2010/main" val="2605789185"/>
+      </p:ext>
+    </p:extLst>
+  </p:cSld>
+  <p:clrMapOvr>
+    <a:masterClrMapping/>
+  </p:clrMapOvr>
+</p:notes>
 </file>
 
 <file path=ppt/slideLayouts/slideLayout1.xml><?xml version="1.0" encoding="utf-8"?>
@@ -164,10 +795,9 @@
           <a:lstStyle/>
           <a:p>
             <a:r>
-              <a:rPr lang="en-US" smtClean="0"/>
+              <a:rPr lang="en-US"/>
               <a:t>Click to edit Master title style</a:t>
             </a:r>
-            <a:endParaRPr lang="en-US"/>
           </a:p>
         </p:txBody>
       </p:sp>
@@ -283,10 +913,9 @@
           </a:lstStyle>
           <a:p>
             <a:r>
-              <a:rPr lang="en-US" smtClean="0"/>
+              <a:rPr lang="en-US"/>
               <a:t>Click to edit Master subtitle style</a:t>
             </a:r>
-            <a:endParaRPr lang="en-US"/>
           </a:p>
         </p:txBody>
       </p:sp>
@@ -307,7 +936,7 @@
           <a:p>
             <a:fld id="{5BCAD085-E8A6-8845-BD4E-CB4CCA059FC4}" type="datetimeFigureOut">
               <a:rPr lang="en-US" smtClean="0"/>
-              <a:t>1/27/13</a:t>
+              <a:t>10/23/2026</a:t>
             </a:fld>
             <a:endParaRPr lang="en-US"/>
           </a:p>
@@ -401,10 +1030,9 @@
           <a:lstStyle/>
           <a:p>
             <a:r>
-              <a:rPr lang="en-US" smtClean="0"/>
+              <a:rPr lang="en-US"/>
               <a:t>Click to edit Master title style</a:t>
             </a:r>
-            <a:endParaRPr lang="en-US"/>
           </a:p>
         </p:txBody>
       </p:sp>
@@ -425,38 +1053,37 @@
           <a:p>
             <a:pPr lvl="0"/>
             <a:r>
-              <a:rPr lang="en-US" smtClean="0"/>
+              <a:rPr lang="en-US"/>
               <a:t>Click to edit Master text styles</a:t>
             </a:r>
           </a:p>
           <a:p>
             <a:pPr lvl="1"/>
             <a:r>
-              <a:rPr lang="en-US" smtClean="0"/>
+              <a:rPr lang="en-US"/>
               <a:t>Second level</a:t>
             </a:r>
           </a:p>
           <a:p>
             <a:pPr lvl="2"/>
             <a:r>
-              <a:rPr lang="en-US" smtClean="0"/>
+              <a:rPr lang="en-US"/>
               <a:t>Third level</a:t>
             </a:r>
           </a:p>
           <a:p>
             <a:pPr lvl="3"/>
             <a:r>
-              <a:rPr lang="en-US" smtClean="0"/>
+              <a:rPr lang="en-US"/>
               <a:t>Fourth level</a:t>
             </a:r>
           </a:p>
           <a:p>
             <a:pPr lvl="4"/>
             <a:r>
-              <a:rPr lang="en-US" smtClean="0"/>
+              <a:rPr lang="en-US"/>
               <a:t>Fifth level</a:t>
             </a:r>
-            <a:endParaRPr lang="en-US"/>
           </a:p>
         </p:txBody>
       </p:sp>
@@ -477,7 +1104,7 @@
           <a:p>
             <a:fld id="{5BCAD085-E8A6-8845-BD4E-CB4CCA059FC4}" type="datetimeFigureOut">
               <a:rPr lang="en-US" smtClean="0"/>
-              <a:t>1/27/13</a:t>
+              <a:t>10/23/2026</a:t>
             </a:fld>
             <a:endParaRPr lang="en-US"/>
           </a:p>
@@ -576,10 +1203,9 @@
           <a:lstStyle/>
           <a:p>
             <a:r>
-              <a:rPr lang="en-US" smtClean="0"/>
+              <a:rPr lang="en-US"/>
               <a:t>Click to edit Master title style</a:t>
             </a:r>
-            <a:endParaRPr lang="en-US"/>
           </a:p>
         </p:txBody>
       </p:sp>
@@ -605,38 +1231,37 @@
           <a:p>
             <a:pPr lvl="0"/>
             <a:r>
-              <a:rPr lang="en-US" smtClean="0"/>
+              <a:rPr lang="en-US"/>
               <a:t>Click to edit Master text styles</a:t>
             </a:r>
           </a:p>
           <a:p>
             <a:pPr lvl="1"/>
             <a:r>
-              <a:rPr lang="en-US" smtClean="0"/>
+              <a:rPr lang="en-US"/>
               <a:t>Second level</a:t>
             </a:r>
           </a:p>
           <a:p>
             <a:pPr lvl="2"/>
             <a:r>
-              <a:rPr lang="en-US" smtClean="0"/>
+              <a:rPr lang="en-US"/>
               <a:t>Third level</a:t>
             </a:r>
           </a:p>
           <a:p>
             <a:pPr lvl="3"/>
             <a:r>
-              <a:rPr lang="en-US" smtClean="0"/>
+              <a:rPr lang="en-US"/>
               <a:t>Fourth level</a:t>
             </a:r>
           </a:p>
           <a:p>
             <a:pPr lvl="4"/>
             <a:r>
-              <a:rPr lang="en-US" smtClean="0"/>
+              <a:rPr lang="en-US"/>
               <a:t>Fifth level</a:t>
             </a:r>
-            <a:endParaRPr lang="en-US"/>
           </a:p>
         </p:txBody>
       </p:sp>
@@ -657,7 +1282,7 @@
           <a:p>
             <a:fld id="{5BCAD085-E8A6-8845-BD4E-CB4CCA059FC4}" type="datetimeFigureOut">
               <a:rPr lang="en-US" smtClean="0"/>
-              <a:t>1/27/13</a:t>
+              <a:t>10/23/2026</a:t>
             </a:fld>
             <a:endParaRPr lang="en-US"/>
           </a:p>
@@ -751,10 +1376,9 @@
           <a:lstStyle/>
           <a:p>
             <a:r>
-              <a:rPr lang="en-US" smtClean="0"/>
+              <a:rPr lang="en-US"/>
               <a:t>Click to edit Master title style</a:t>
             </a:r>
-            <a:endParaRPr lang="en-US"/>
           </a:p>
         </p:txBody>
       </p:sp>
@@ -775,38 +1399,37 @@
           <a:p>
             <a:pPr lvl="0"/>
             <a:r>
-              <a:rPr lang="en-US" smtClean="0"/>
+              <a:rPr lang="en-US"/>
               <a:t>Click to edit Master text styles</a:t>
             </a:r>
           </a:p>
           <a:p>
             <a:pPr lvl="1"/>
             <a:r>
-              <a:rPr lang="en-US" smtClean="0"/>
+              <a:rPr lang="en-US"/>
               <a:t>Second level</a:t>
             </a:r>
           </a:p>
           <a:p>
             <a:pPr lvl="2"/>
             <a:r>
-              <a:rPr lang="en-US" smtClean="0"/>
+              <a:rPr lang="en-US"/>
               <a:t>Third level</a:t>
             </a:r>
           </a:p>
           <a:p>
             <a:pPr lvl="3"/>
             <a:r>
-              <a:rPr lang="en-US" smtClean="0"/>
+              <a:rPr lang="en-US"/>
               <a:t>Fourth level</a:t>
             </a:r>
           </a:p>
           <a:p>
             <a:pPr lvl="4"/>
             <a:r>
-              <a:rPr lang="en-US" smtClean="0"/>
+              <a:rPr lang="en-US"/>
               <a:t>Fifth level</a:t>
             </a:r>
-            <a:endParaRPr lang="en-US"/>
           </a:p>
         </p:txBody>
       </p:sp>
@@ -827,7 +1450,7 @@
           <a:p>
             <a:fld id="{5BCAD085-E8A6-8845-BD4E-CB4CCA059FC4}" type="datetimeFigureOut">
               <a:rPr lang="en-US" smtClean="0"/>
-              <a:t>1/27/13</a:t>
+              <a:t>10/23/2026</a:t>
             </a:fld>
             <a:endParaRPr lang="en-US"/>
           </a:p>
@@ -930,10 +1553,9 @@
           </a:lstStyle>
           <a:p>
             <a:r>
-              <a:rPr lang="en-US" smtClean="0"/>
+              <a:rPr lang="en-US"/>
               <a:t>Click to edit Master title style</a:t>
             </a:r>
-            <a:endParaRPr lang="en-US"/>
           </a:p>
         </p:txBody>
       </p:sp>
@@ -1050,7 +1672,7 @@
           <a:p>
             <a:pPr lvl="0"/>
             <a:r>
-              <a:rPr lang="en-US" smtClean="0"/>
+              <a:rPr lang="en-US"/>
               <a:t>Click to edit Master text styles</a:t>
             </a:r>
           </a:p>
@@ -1073,7 +1695,7 @@
           <a:p>
             <a:fld id="{5BCAD085-E8A6-8845-BD4E-CB4CCA059FC4}" type="datetimeFigureOut">
               <a:rPr lang="en-US" smtClean="0"/>
-              <a:t>1/27/13</a:t>
+              <a:t>10/23/2026</a:t>
             </a:fld>
             <a:endParaRPr lang="en-US"/>
           </a:p>
@@ -1167,10 +1789,9 @@
           <a:lstStyle/>
           <a:p>
             <a:r>
-              <a:rPr lang="en-US" smtClean="0"/>
+              <a:rPr lang="en-US"/>
               <a:t>Click to edit Master title style</a:t>
             </a:r>
-            <a:endParaRPr lang="en-US"/>
           </a:p>
         </p:txBody>
       </p:sp>
@@ -1224,38 +1845,37 @@
           <a:p>
             <a:pPr lvl="0"/>
             <a:r>
-              <a:rPr lang="en-US" smtClean="0"/>
+              <a:rPr lang="en-US"/>
               <a:t>Click to edit Master text styles</a:t>
             </a:r>
           </a:p>
           <a:p>
             <a:pPr lvl="1"/>
             <a:r>
-              <a:rPr lang="en-US" smtClean="0"/>
+              <a:rPr lang="en-US"/>
               <a:t>Second level</a:t>
             </a:r>
           </a:p>
           <a:p>
             <a:pPr lvl="2"/>
             <a:r>
-              <a:rPr lang="en-US" smtClean="0"/>
+              <a:rPr lang="en-US"/>
               <a:t>Third level</a:t>
             </a:r>
           </a:p>
           <a:p>
             <a:pPr lvl="3"/>
             <a:r>
-              <a:rPr lang="en-US" smtClean="0"/>
+              <a:rPr lang="en-US"/>
               <a:t>Fourth level</a:t>
             </a:r>
           </a:p>
           <a:p>
             <a:pPr lvl="4"/>
             <a:r>
-              <a:rPr lang="en-US" smtClean="0"/>
+              <a:rPr lang="en-US"/>
               <a:t>Fifth level</a:t>
             </a:r>
-            <a:endParaRPr lang="en-US"/>
           </a:p>
         </p:txBody>
       </p:sp>
@@ -1309,38 +1929,37 @@
           <a:p>
             <a:pPr lvl="0"/>
             <a:r>
-              <a:rPr lang="en-US" smtClean="0"/>
+              <a:rPr lang="en-US"/>
               <a:t>Click to edit Master text styles</a:t>
             </a:r>
           </a:p>
           <a:p>
             <a:pPr lvl="1"/>
             <a:r>
-              <a:rPr lang="en-US" smtClean="0"/>
+              <a:rPr lang="en-US"/>
               <a:t>Second level</a:t>
             </a:r>
           </a:p>
           <a:p>
             <a:pPr lvl="2"/>
             <a:r>
-              <a:rPr lang="en-US" smtClean="0"/>
+              <a:rPr lang="en-US"/>
               <a:t>Third level</a:t>
             </a:r>
           </a:p>
           <a:p>
             <a:pPr lvl="3"/>
             <a:r>
-              <a:rPr lang="en-US" smtClean="0"/>
+              <a:rPr lang="en-US"/>
               <a:t>Fourth level</a:t>
             </a:r>
           </a:p>
           <a:p>
             <a:pPr lvl="4"/>
             <a:r>
-              <a:rPr lang="en-US" smtClean="0"/>
+              <a:rPr lang="en-US"/>
               <a:t>Fifth level</a:t>
             </a:r>
-            <a:endParaRPr lang="en-US"/>
           </a:p>
         </p:txBody>
       </p:sp>
@@ -1361,7 +1980,7 @@
           <a:p>
             <a:fld id="{5BCAD085-E8A6-8845-BD4E-CB4CCA059FC4}" type="datetimeFigureOut">
               <a:rPr lang="en-US" smtClean="0"/>
-              <a:t>1/27/13</a:t>
+              <a:t>10/23/2026</a:t>
             </a:fld>
             <a:endParaRPr lang="en-US"/>
           </a:p>
@@ -1459,10 +2078,9 @@
           </a:lstStyle>
           <a:p>
             <a:r>
-              <a:rPr lang="en-US" smtClean="0"/>
+              <a:rPr lang="en-US"/>
               <a:t>Click to edit Master title style</a:t>
             </a:r>
-            <a:endParaRPr lang="en-US"/>
           </a:p>
         </p:txBody>
       </p:sp>
@@ -1525,7 +2143,7 @@
           <a:p>
             <a:pPr lvl="0"/>
             <a:r>
-              <a:rPr lang="en-US" smtClean="0"/>
+              <a:rPr lang="en-US"/>
               <a:t>Click to edit Master text styles</a:t>
             </a:r>
           </a:p>
@@ -1581,38 +2199,37 @@
           <a:p>
             <a:pPr lvl="0"/>
             <a:r>
-              <a:rPr lang="en-US" smtClean="0"/>
+              <a:rPr lang="en-US"/>
               <a:t>Click to edit Master text styles</a:t>
             </a:r>
           </a:p>
           <a:p>
             <a:pPr lvl="1"/>
             <a:r>
-              <a:rPr lang="en-US" smtClean="0"/>
+              <a:rPr lang="en-US"/>
               <a:t>Second level</a:t>
             </a:r>
           </a:p>
           <a:p>
             <a:pPr lvl="2"/>
             <a:r>
-              <a:rPr lang="en-US" smtClean="0"/>
+              <a:rPr lang="en-US"/>
               <a:t>Third level</a:t>
             </a:r>
           </a:p>
           <a:p>
             <a:pPr lvl="3"/>
             <a:r>
-              <a:rPr lang="en-US" smtClean="0"/>
+              <a:rPr lang="en-US"/>
               <a:t>Fourth level</a:t>
             </a:r>
           </a:p>
           <a:p>
             <a:pPr lvl="4"/>
             <a:r>
-              <a:rPr lang="en-US" smtClean="0"/>
+              <a:rPr lang="en-US"/>
               <a:t>Fifth level</a:t>
             </a:r>
-            <a:endParaRPr lang="en-US"/>
           </a:p>
         </p:txBody>
       </p:sp>
@@ -1675,7 +2292,7 @@
           <a:p>
             <a:pPr lvl="0"/>
             <a:r>
-              <a:rPr lang="en-US" smtClean="0"/>
+              <a:rPr lang="en-US"/>
               <a:t>Click to edit Master text styles</a:t>
             </a:r>
           </a:p>
@@ -1731,38 +2348,37 @@
           <a:p>
             <a:pPr lvl="0"/>
             <a:r>
-              <a:rPr lang="en-US" smtClean="0"/>
+              <a:rPr lang="en-US"/>
               <a:t>Click to edit Master text styles</a:t>
             </a:r>
           </a:p>
           <a:p>
             <a:pPr lvl="1"/>
             <a:r>
-              <a:rPr lang="en-US" smtClean="0"/>
+              <a:rPr lang="en-US"/>
               <a:t>Second level</a:t>
             </a:r>
           </a:p>
           <a:p>
             <a:pPr lvl="2"/>
             <a:r>
-              <a:rPr lang="en-US" smtClean="0"/>
+              <a:rPr lang="en-US"/>
               <a:t>Third level</a:t>
             </a:r>
           </a:p>
           <a:p>
             <a:pPr lvl="3"/>
             <a:r>
-              <a:rPr lang="en-US" smtClean="0"/>
+              <a:rPr lang="en-US"/>
               <a:t>Fourth level</a:t>
             </a:r>
           </a:p>
           <a:p>
             <a:pPr lvl="4"/>
             <a:r>
-              <a:rPr lang="en-US" smtClean="0"/>
+              <a:rPr lang="en-US"/>
               <a:t>Fifth level</a:t>
             </a:r>
-            <a:endParaRPr lang="en-US"/>
           </a:p>
         </p:txBody>
       </p:sp>
@@ -1783,7 +2399,7 @@
           <a:p>
             <a:fld id="{5BCAD085-E8A6-8845-BD4E-CB4CCA059FC4}" type="datetimeFigureOut">
               <a:rPr lang="en-US" smtClean="0"/>
-              <a:t>1/27/13</a:t>
+              <a:t>10/23/2026</a:t>
             </a:fld>
             <a:endParaRPr lang="en-US"/>
           </a:p>
@@ -1877,10 +2493,9 @@
           <a:lstStyle/>
           <a:p>
             <a:r>
-              <a:rPr lang="en-US" smtClean="0"/>
+              <a:rPr lang="en-US"/>
               <a:t>Click to edit Master title style</a:t>
             </a:r>
-            <a:endParaRPr lang="en-US"/>
           </a:p>
         </p:txBody>
       </p:sp>
@@ -1901,7 +2516,7 @@
           <a:p>
             <a:fld id="{5BCAD085-E8A6-8845-BD4E-CB4CCA059FC4}" type="datetimeFigureOut">
               <a:rPr lang="en-US" smtClean="0"/>
-              <a:t>1/27/13</a:t>
+              <a:t>10/23/2026</a:t>
             </a:fld>
             <a:endParaRPr lang="en-US"/>
           </a:p>
@@ -1996,7 +2611,7 @@
           <a:p>
             <a:fld id="{5BCAD085-E8A6-8845-BD4E-CB4CCA059FC4}" type="datetimeFigureOut">
               <a:rPr lang="en-US" smtClean="0"/>
-              <a:t>1/27/13</a:t>
+              <a:t>10/23/2026</a:t>
             </a:fld>
             <a:endParaRPr lang="en-US"/>
           </a:p>
@@ -2099,10 +2714,9 @@
           </a:lstStyle>
           <a:p>
             <a:r>
-              <a:rPr lang="en-US" smtClean="0"/>
+              <a:rPr lang="en-US"/>
               <a:t>Click to edit Master title style</a:t>
             </a:r>
-            <a:endParaRPr lang="en-US"/>
           </a:p>
         </p:txBody>
       </p:sp>
@@ -2156,38 +2770,37 @@
           <a:p>
             <a:pPr lvl="0"/>
             <a:r>
-              <a:rPr lang="en-US" smtClean="0"/>
+              <a:rPr lang="en-US"/>
               <a:t>Click to edit Master text styles</a:t>
             </a:r>
           </a:p>
           <a:p>
             <a:pPr lvl="1"/>
             <a:r>
-              <a:rPr lang="en-US" smtClean="0"/>
+              <a:rPr lang="en-US"/>
               <a:t>Second level</a:t>
             </a:r>
           </a:p>
           <a:p>
             <a:pPr lvl="2"/>
             <a:r>
-              <a:rPr lang="en-US" smtClean="0"/>
+              <a:rPr lang="en-US"/>
               <a:t>Third level</a:t>
             </a:r>
           </a:p>
           <a:p>
             <a:pPr lvl="3"/>
             <a:r>
-              <a:rPr lang="en-US" smtClean="0"/>
+              <a:rPr lang="en-US"/>
               <a:t>Fourth level</a:t>
             </a:r>
           </a:p>
           <a:p>
             <a:pPr lvl="4"/>
             <a:r>
-              <a:rPr lang="en-US" smtClean="0"/>
+              <a:rPr lang="en-US"/>
               <a:t>Fifth level</a:t>
             </a:r>
-            <a:endParaRPr lang="en-US"/>
           </a:p>
         </p:txBody>
       </p:sp>
@@ -2250,7 +2863,7 @@
           <a:p>
             <a:pPr lvl="0"/>
             <a:r>
-              <a:rPr lang="en-US" smtClean="0"/>
+              <a:rPr lang="en-US"/>
               <a:t>Click to edit Master text styles</a:t>
             </a:r>
           </a:p>
@@ -2273,7 +2886,7 @@
           <a:p>
             <a:fld id="{5BCAD085-E8A6-8845-BD4E-CB4CCA059FC4}" type="datetimeFigureOut">
               <a:rPr lang="en-US" smtClean="0"/>
-              <a:t>1/27/13</a:t>
+              <a:t>10/23/2026</a:t>
             </a:fld>
             <a:endParaRPr lang="en-US"/>
           </a:p>
@@ -2376,10 +2989,9 @@
           </a:lstStyle>
           <a:p>
             <a:r>
-              <a:rPr lang="en-US" smtClean="0"/>
+              <a:rPr lang="en-US"/>
               <a:t>Click to edit Master title style</a:t>
             </a:r>
-            <a:endParaRPr lang="en-US"/>
           </a:p>
         </p:txBody>
       </p:sp>
@@ -2503,7 +3115,7 @@
           <a:p>
             <a:pPr lvl="0"/>
             <a:r>
-              <a:rPr lang="en-US" smtClean="0"/>
+              <a:rPr lang="en-US"/>
               <a:t>Click to edit Master text styles</a:t>
             </a:r>
           </a:p>
@@ -2526,7 +3138,7 @@
           <a:p>
             <a:fld id="{5BCAD085-E8A6-8845-BD4E-CB4CCA059FC4}" type="datetimeFigureOut">
               <a:rPr lang="en-US" smtClean="0"/>
-              <a:t>1/27/13</a:t>
+              <a:t>10/23/2026</a:t>
             </a:fld>
             <a:endParaRPr lang="en-US"/>
           </a:p>
@@ -2635,10 +3247,9 @@
           <a:lstStyle/>
           <a:p>
             <a:r>
-              <a:rPr lang="en-US" smtClean="0"/>
+              <a:rPr lang="en-US"/>
               <a:t>Click to edit Master title style</a:t>
             </a:r>
-            <a:endParaRPr lang="en-US"/>
           </a:p>
         </p:txBody>
       </p:sp>
@@ -2669,38 +3280,37 @@
           <a:p>
             <a:pPr lvl="0"/>
             <a:r>
-              <a:rPr lang="en-US" smtClean="0"/>
+              <a:rPr lang="en-US"/>
               <a:t>Click to edit Master text styles</a:t>
             </a:r>
           </a:p>
           <a:p>
             <a:pPr lvl="1"/>
             <a:r>
-              <a:rPr lang="en-US" smtClean="0"/>
+              <a:rPr lang="en-US"/>
               <a:t>Second level</a:t>
             </a:r>
           </a:p>
           <a:p>
             <a:pPr lvl="2"/>
             <a:r>
-              <a:rPr lang="en-US" smtClean="0"/>
+              <a:rPr lang="en-US"/>
               <a:t>Third level</a:t>
             </a:r>
           </a:p>
           <a:p>
             <a:pPr lvl="3"/>
             <a:r>
-              <a:rPr lang="en-US" smtClean="0"/>
+              <a:rPr lang="en-US"/>
               <a:t>Fourth level</a:t>
             </a:r>
           </a:p>
           <a:p>
             <a:pPr lvl="4"/>
             <a:r>
-              <a:rPr lang="en-US" smtClean="0"/>
+              <a:rPr lang="en-US"/>
               <a:t>Fifth level</a:t>
             </a:r>
-            <a:endParaRPr lang="en-US"/>
           </a:p>
         </p:txBody>
       </p:sp>
@@ -2739,7 +3349,7 @@
           <a:p>
             <a:fld id="{5BCAD085-E8A6-8845-BD4E-CB4CCA059FC4}" type="datetimeFigureOut">
               <a:rPr lang="en-US" smtClean="0"/>
-              <a:t>1/27/13</a:t>
+              <a:t>10/23/2026</a:t>
             </a:fld>
             <a:endParaRPr lang="en-US"/>
           </a:p>
@@ -3098,7 +3708,7 @@
 </file>
 
 <file path=ppt/slides/slide1.xml><?xml version="1.0" encoding="utf-8"?>
-<p:sld xmlns:a="http://schemas.openxmlformats.org/drawingml/2006/main" xmlns:p="http://schemas.openxmlformats.org/presentationml/2006/main" xmlns:r="http://schemas.openxmlformats.org/officeDocument/2006/relationships">
+<p:sld xmlns:a="http://schemas.openxmlformats.org/drawingml/2006/main" xmlns:r="http://schemas.openxmlformats.org/officeDocument/2006/relationships" xmlns:p="http://schemas.openxmlformats.org/presentationml/2006/main">
   <p:cSld>
     <p:bg>
       <p:bgPr>
@@ -3114,7 +3724,14 @@
         <p:cNvGrpSpPr/>
         <p:nvPr/>
       </p:nvGrpSpPr>
-      <p:grpSpPr/>
+      <p:grpSpPr>
+        <a:xfrm>
+          <a:off x="0" y="0"/>
+          <a:ext cx="0" cy="0"/>
+          <a:chOff x="0" y="0"/>
+          <a:chExt cx="0" cy="0"/>
+        </a:xfrm>
+      </p:grpSpPr>
       <p:sp>
         <p:nvSpPr>
           <p:cNvPr id="2" name="Rounded Rectangle 1"/>
@@ -3157,6 +3774,7 @@
           <a:lstStyle/>
           <a:p>
             <a:pPr algn="ctr"/>
+            <a:endParaRPr/>
           </a:p>
         </p:txBody>
       </p:sp>
@@ -3287,6 +3905,7 @@
           <a:lstStyle/>
           <a:p>
             <a:pPr algn="ctr"/>
+            <a:endParaRPr/>
           </a:p>
         </p:txBody>
       </p:sp>
@@ -3382,6 +4001,7 @@
           <a:lstStyle/>
           <a:p>
             <a:pPr algn="ctr"/>
+            <a:endParaRPr/>
           </a:p>
         </p:txBody>
       </p:sp>
@@ -3477,6 +4097,7 @@
           <a:lstStyle/>
           <a:p>
             <a:pPr algn="ctr"/>
+            <a:endParaRPr/>
           </a:p>
         </p:txBody>
       </p:sp>
@@ -3574,7 +4195,7 @@
 </file>
 
 <file path=ppt/slides/slide10.xml><?xml version="1.0" encoding="utf-8"?>
-<p:sld xmlns:a="http://schemas.openxmlformats.org/drawingml/2006/main" xmlns:p="http://schemas.openxmlformats.org/presentationml/2006/main" xmlns:r="http://schemas.openxmlformats.org/officeDocument/2006/relationships">
+<p:sld xmlns:a="http://schemas.openxmlformats.org/drawingml/2006/main" xmlns:r="http://schemas.openxmlformats.org/officeDocument/2006/relationships" xmlns:p="http://schemas.openxmlformats.org/presentationml/2006/main">
   <p:cSld>
     <p:bg>
       <p:bgPr>
@@ -3590,7 +4211,14 @@
         <p:cNvGrpSpPr/>
         <p:nvPr/>
       </p:nvGrpSpPr>
-      <p:grpSpPr/>
+      <p:grpSpPr>
+        <a:xfrm>
+          <a:off x="0" y="0"/>
+          <a:ext cx="0" cy="0"/>
+          <a:chOff x="0" y="0"/>
+          <a:chExt cx="0" cy="0"/>
+        </a:xfrm>
+      </p:grpSpPr>
       <p:sp>
         <p:nvSpPr>
           <p:cNvPr id="2" name="TextBox 1"/>
@@ -3703,6 +4331,7 @@
           <a:lstStyle/>
           <a:p>
             <a:pPr algn="ctr"/>
+            <a:endParaRPr/>
           </a:p>
         </p:txBody>
       </p:sp>
@@ -3873,6 +4502,7 @@
           <a:lstStyle/>
           <a:p>
             <a:pPr algn="ctr"/>
+            <a:endParaRPr/>
           </a:p>
         </p:txBody>
       </p:sp>
@@ -3886,14 +4516,15 @@
         </p:nvPicPr>
         <p:blipFill>
           <a:blip r:embed="rId2"/>
+          <a:srcRect/>
           <a:stretch>
             <a:fillRect/>
           </a:stretch>
         </p:blipFill>
         <p:spPr>
           <a:xfrm>
-            <a:off x="5696712" y="1444752"/>
-            <a:ext cx="5705856" cy="4425696"/>
+            <a:off x="5696712" y="1874520"/>
+            <a:ext cx="5705856" cy="3566160"/>
           </a:xfrm>
           <a:prstGeom prst="rect">
             <a:avLst/>
@@ -3944,7 +4575,7 @@
 </file>
 
 <file path=ppt/slides/slide11.xml><?xml version="1.0" encoding="utf-8"?>
-<p:sld xmlns:a="http://schemas.openxmlformats.org/drawingml/2006/main" xmlns:p="http://schemas.openxmlformats.org/presentationml/2006/main" xmlns:r="http://schemas.openxmlformats.org/officeDocument/2006/relationships">
+<p:sld xmlns:a="http://schemas.openxmlformats.org/drawingml/2006/main" xmlns:r="http://schemas.openxmlformats.org/officeDocument/2006/relationships" xmlns:p="http://schemas.openxmlformats.org/presentationml/2006/main">
   <p:cSld>
     <p:bg>
       <p:bgPr>
@@ -3960,7 +4591,14 @@
         <p:cNvGrpSpPr/>
         <p:nvPr/>
       </p:nvGrpSpPr>
-      <p:grpSpPr/>
+      <p:grpSpPr>
+        <a:xfrm>
+          <a:off x="0" y="0"/>
+          <a:ext cx="0" cy="0"/>
+          <a:chOff x="0" y="0"/>
+          <a:chExt cx="0" cy="0"/>
+        </a:xfrm>
+      </p:grpSpPr>
       <p:sp>
         <p:nvSpPr>
           <p:cNvPr id="2" name="TextBox 1"/>
@@ -4073,6 +4711,7 @@
           <a:lstStyle/>
           <a:p>
             <a:pPr algn="ctr"/>
+            <a:endParaRPr/>
           </a:p>
         </p:txBody>
       </p:sp>
@@ -4243,6 +4882,7 @@
           <a:lstStyle/>
           <a:p>
             <a:pPr algn="ctr"/>
+            <a:endParaRPr/>
           </a:p>
         </p:txBody>
       </p:sp>
@@ -4256,14 +4896,15 @@
         </p:nvPicPr>
         <p:blipFill>
           <a:blip r:embed="rId2"/>
+          <a:srcRect/>
           <a:stretch>
             <a:fillRect/>
           </a:stretch>
         </p:blipFill>
         <p:spPr>
           <a:xfrm>
-            <a:off x="5696712" y="1444752"/>
-            <a:ext cx="5705856" cy="4425696"/>
+            <a:off x="5696712" y="2543175"/>
+            <a:ext cx="5705856" cy="2228850"/>
           </a:xfrm>
           <a:prstGeom prst="rect">
             <a:avLst/>
@@ -4314,7 +4955,7 @@
 </file>
 
 <file path=ppt/slides/slide12.xml><?xml version="1.0" encoding="utf-8"?>
-<p:sld xmlns:a="http://schemas.openxmlformats.org/drawingml/2006/main" xmlns:p="http://schemas.openxmlformats.org/presentationml/2006/main" xmlns:r="http://schemas.openxmlformats.org/officeDocument/2006/relationships">
+<p:sld xmlns:a="http://schemas.openxmlformats.org/drawingml/2006/main" xmlns:r="http://schemas.openxmlformats.org/officeDocument/2006/relationships" xmlns:p="http://schemas.openxmlformats.org/presentationml/2006/main">
   <p:cSld>
     <p:bg>
       <p:bgPr>
@@ -4330,7 +4971,14 @@
         <p:cNvGrpSpPr/>
         <p:nvPr/>
       </p:nvGrpSpPr>
-      <p:grpSpPr/>
+      <p:grpSpPr>
+        <a:xfrm>
+          <a:off x="0" y="0"/>
+          <a:ext cx="0" cy="0"/>
+          <a:chOff x="0" y="0"/>
+          <a:chExt cx="0" cy="0"/>
+        </a:xfrm>
+      </p:grpSpPr>
       <p:sp>
         <p:nvSpPr>
           <p:cNvPr id="2" name="TextBox 1"/>
@@ -4443,6 +5091,7 @@
           <a:lstStyle/>
           <a:p>
             <a:pPr algn="ctr"/>
+            <a:endParaRPr/>
           </a:p>
         </p:txBody>
       </p:sp>
@@ -4613,6 +5262,7 @@
           <a:lstStyle/>
           <a:p>
             <a:pPr algn="ctr"/>
+            <a:endParaRPr/>
           </a:p>
         </p:txBody>
       </p:sp>
@@ -4626,14 +5276,15 @@
         </p:nvPicPr>
         <p:blipFill>
           <a:blip r:embed="rId2"/>
+          <a:srcRect/>
           <a:stretch>
             <a:fillRect/>
           </a:stretch>
         </p:blipFill>
         <p:spPr>
           <a:xfrm>
-            <a:off x="5696712" y="1444752"/>
-            <a:ext cx="5705856" cy="4425696"/>
+            <a:off x="5696712" y="1874520"/>
+            <a:ext cx="5705856" cy="3566160"/>
           </a:xfrm>
           <a:prstGeom prst="rect">
             <a:avLst/>
@@ -4684,7 +5335,7 @@
 </file>
 
 <file path=ppt/slides/slide13.xml><?xml version="1.0" encoding="utf-8"?>
-<p:sld xmlns:a="http://schemas.openxmlformats.org/drawingml/2006/main" xmlns:p="http://schemas.openxmlformats.org/presentationml/2006/main" xmlns:r="http://schemas.openxmlformats.org/officeDocument/2006/relationships">
+<p:sld xmlns:a="http://schemas.openxmlformats.org/drawingml/2006/main" xmlns:r="http://schemas.openxmlformats.org/officeDocument/2006/relationships" xmlns:p="http://schemas.openxmlformats.org/presentationml/2006/main">
   <p:cSld>
     <p:bg>
       <p:bgPr>
@@ -4700,7 +5351,14 @@
         <p:cNvGrpSpPr/>
         <p:nvPr/>
       </p:nvGrpSpPr>
-      <p:grpSpPr/>
+      <p:grpSpPr>
+        <a:xfrm>
+          <a:off x="0" y="0"/>
+          <a:ext cx="0" cy="0"/>
+          <a:chOff x="0" y="0"/>
+          <a:chExt cx="0" cy="0"/>
+        </a:xfrm>
+      </p:grpSpPr>
       <p:sp>
         <p:nvSpPr>
           <p:cNvPr id="2" name="TextBox 1"/>
@@ -4813,6 +5471,7 @@
           <a:lstStyle/>
           <a:p>
             <a:pPr algn="ctr"/>
+            <a:endParaRPr/>
           </a:p>
         </p:txBody>
       </p:sp>
@@ -4983,6 +5642,7 @@
           <a:lstStyle/>
           <a:p>
             <a:pPr algn="ctr"/>
+            <a:endParaRPr/>
           </a:p>
         </p:txBody>
       </p:sp>
@@ -4995,15 +5655,16 @@
           <p:nvPr/>
         </p:nvPicPr>
         <p:blipFill>
-          <a:blip r:embed="rId2"/>
+          <a:blip r:embed="rId3"/>
+          <a:srcRect/>
           <a:stretch>
             <a:fillRect/>
           </a:stretch>
         </p:blipFill>
         <p:spPr>
           <a:xfrm>
-            <a:off x="5696712" y="1444752"/>
-            <a:ext cx="5705856" cy="4425696"/>
+            <a:off x="5685137" y="1909245"/>
+            <a:ext cx="5705856" cy="3566160"/>
           </a:xfrm>
           <a:prstGeom prst="rect">
             <a:avLst/>
@@ -5054,7 +5715,7 @@
 </file>
 
 <file path=ppt/slides/slide14.xml><?xml version="1.0" encoding="utf-8"?>
-<p:sld xmlns:a="http://schemas.openxmlformats.org/drawingml/2006/main" xmlns:p="http://schemas.openxmlformats.org/presentationml/2006/main" xmlns:r="http://schemas.openxmlformats.org/officeDocument/2006/relationships">
+<p:sld xmlns:a="http://schemas.openxmlformats.org/drawingml/2006/main" xmlns:r="http://schemas.openxmlformats.org/officeDocument/2006/relationships" xmlns:p="http://schemas.openxmlformats.org/presentationml/2006/main">
   <p:cSld>
     <p:bg>
       <p:bgPr>
@@ -5070,7 +5731,14 @@
         <p:cNvGrpSpPr/>
         <p:nvPr/>
       </p:nvGrpSpPr>
-      <p:grpSpPr/>
+      <p:grpSpPr>
+        <a:xfrm>
+          <a:off x="0" y="0"/>
+          <a:ext cx="0" cy="0"/>
+          <a:chOff x="0" y="0"/>
+          <a:chExt cx="0" cy="0"/>
+        </a:xfrm>
+      </p:grpSpPr>
       <p:sp>
         <p:nvSpPr>
           <p:cNvPr id="2" name="TextBox 1"/>
@@ -5183,6 +5851,7 @@
           <a:lstStyle/>
           <a:p>
             <a:pPr algn="ctr"/>
+            <a:endParaRPr/>
           </a:p>
         </p:txBody>
       </p:sp>
@@ -5353,6 +6022,7 @@
           <a:lstStyle/>
           <a:p>
             <a:pPr algn="ctr"/>
+            <a:endParaRPr/>
           </a:p>
         </p:txBody>
       </p:sp>
@@ -5366,14 +6036,15 @@
         </p:nvPicPr>
         <p:blipFill>
           <a:blip r:embed="rId2"/>
+          <a:srcRect/>
           <a:stretch>
             <a:fillRect/>
           </a:stretch>
         </p:blipFill>
         <p:spPr>
           <a:xfrm>
-            <a:off x="5696712" y="1444752"/>
-            <a:ext cx="5705856" cy="4425696"/>
+            <a:off x="5696712" y="1874520"/>
+            <a:ext cx="5705856" cy="3566160"/>
           </a:xfrm>
           <a:prstGeom prst="rect">
             <a:avLst/>
@@ -5424,7 +6095,7 @@
 </file>
 
 <file path=ppt/slides/slide15.xml><?xml version="1.0" encoding="utf-8"?>
-<p:sld xmlns:a="http://schemas.openxmlformats.org/drawingml/2006/main" xmlns:p="http://schemas.openxmlformats.org/presentationml/2006/main" xmlns:r="http://schemas.openxmlformats.org/officeDocument/2006/relationships">
+<p:sld xmlns:a="http://schemas.openxmlformats.org/drawingml/2006/main" xmlns:r="http://schemas.openxmlformats.org/officeDocument/2006/relationships" xmlns:p="http://schemas.openxmlformats.org/presentationml/2006/main">
   <p:cSld>
     <p:bg>
       <p:bgPr>
@@ -5440,7 +6111,14 @@
         <p:cNvGrpSpPr/>
         <p:nvPr/>
       </p:nvGrpSpPr>
-      <p:grpSpPr/>
+      <p:grpSpPr>
+        <a:xfrm>
+          <a:off x="0" y="0"/>
+          <a:ext cx="0" cy="0"/>
+          <a:chOff x="0" y="0"/>
+          <a:chExt cx="0" cy="0"/>
+        </a:xfrm>
+      </p:grpSpPr>
       <p:sp>
         <p:nvSpPr>
           <p:cNvPr id="2" name="TextBox 1"/>
@@ -5553,6 +6231,7 @@
           <a:lstStyle/>
           <a:p>
             <a:pPr algn="ctr"/>
+            <a:endParaRPr/>
           </a:p>
         </p:txBody>
       </p:sp>
@@ -5723,6 +6402,7 @@
           <a:lstStyle/>
           <a:p>
             <a:pPr algn="ctr"/>
+            <a:endParaRPr/>
           </a:p>
         </p:txBody>
       </p:sp>
@@ -5736,14 +6416,15 @@
         </p:nvPicPr>
         <p:blipFill>
           <a:blip r:embed="rId2"/>
+          <a:srcRect/>
           <a:stretch>
             <a:fillRect/>
           </a:stretch>
         </p:blipFill>
         <p:spPr>
           <a:xfrm>
-            <a:off x="5696712" y="1444752"/>
-            <a:ext cx="5705856" cy="4425696"/>
+            <a:off x="5696712" y="1874520"/>
+            <a:ext cx="5705856" cy="3566160"/>
           </a:xfrm>
           <a:prstGeom prst="rect">
             <a:avLst/>
@@ -5794,7 +6475,7 @@
 </file>
 
 <file path=ppt/slides/slide16.xml><?xml version="1.0" encoding="utf-8"?>
-<p:sld xmlns:a="http://schemas.openxmlformats.org/drawingml/2006/main" xmlns:p="http://schemas.openxmlformats.org/presentationml/2006/main" xmlns:r="http://schemas.openxmlformats.org/officeDocument/2006/relationships">
+<p:sld xmlns:a="http://schemas.openxmlformats.org/drawingml/2006/main" xmlns:r="http://schemas.openxmlformats.org/officeDocument/2006/relationships" xmlns:p="http://schemas.openxmlformats.org/presentationml/2006/main">
   <p:cSld>
     <p:bg>
       <p:bgPr>
@@ -5810,7 +6491,14 @@
         <p:cNvGrpSpPr/>
         <p:nvPr/>
       </p:nvGrpSpPr>
-      <p:grpSpPr/>
+      <p:grpSpPr>
+        <a:xfrm>
+          <a:off x="0" y="0"/>
+          <a:ext cx="0" cy="0"/>
+          <a:chOff x="0" y="0"/>
+          <a:chExt cx="0" cy="0"/>
+        </a:xfrm>
+      </p:grpSpPr>
       <p:sp>
         <p:nvSpPr>
           <p:cNvPr id="2" name="TextBox 1"/>
@@ -5923,6 +6611,7 @@
           <a:lstStyle/>
           <a:p>
             <a:pPr algn="ctr"/>
+            <a:endParaRPr/>
           </a:p>
         </p:txBody>
       </p:sp>
@@ -6093,6 +6782,7 @@
           <a:lstStyle/>
           <a:p>
             <a:pPr algn="ctr"/>
+            <a:endParaRPr/>
           </a:p>
         </p:txBody>
       </p:sp>
@@ -6106,14 +6796,15 @@
         </p:nvPicPr>
         <p:blipFill>
           <a:blip r:embed="rId2"/>
+          <a:srcRect/>
           <a:stretch>
             <a:fillRect/>
           </a:stretch>
         </p:blipFill>
         <p:spPr>
           <a:xfrm>
-            <a:off x="5696712" y="1444752"/>
-            <a:ext cx="5705856" cy="4425696"/>
+            <a:off x="5696712" y="1874520"/>
+            <a:ext cx="5705856" cy="3566160"/>
           </a:xfrm>
           <a:prstGeom prst="rect">
             <a:avLst/>
@@ -6164,7 +6855,7 @@
 </file>
 
 <file path=ppt/slides/slide17.xml><?xml version="1.0" encoding="utf-8"?>
-<p:sld xmlns:a="http://schemas.openxmlformats.org/drawingml/2006/main" xmlns:p="http://schemas.openxmlformats.org/presentationml/2006/main" xmlns:r="http://schemas.openxmlformats.org/officeDocument/2006/relationships">
+<p:sld xmlns:a="http://schemas.openxmlformats.org/drawingml/2006/main" xmlns:r="http://schemas.openxmlformats.org/officeDocument/2006/relationships" xmlns:p="http://schemas.openxmlformats.org/presentationml/2006/main">
   <p:cSld>
     <p:bg>
       <p:bgPr>
@@ -6180,7 +6871,14 @@
         <p:cNvGrpSpPr/>
         <p:nvPr/>
       </p:nvGrpSpPr>
-      <p:grpSpPr/>
+      <p:grpSpPr>
+        <a:xfrm>
+          <a:off x="0" y="0"/>
+          <a:ext cx="0" cy="0"/>
+          <a:chOff x="0" y="0"/>
+          <a:chExt cx="0" cy="0"/>
+        </a:xfrm>
+      </p:grpSpPr>
       <p:sp>
         <p:nvSpPr>
           <p:cNvPr id="2" name="TextBox 1"/>
@@ -6270,10 +6968,34 @@
                 <a:tableStyleId>{5C22544A-7EE6-4342-B048-85BDC9FD1C3A}</a:tableStyleId>
               </a:tblPr>
               <a:tblGrid>
-                <a:gridCol w="1828800"/>
-                <a:gridCol w="4114800"/>
-                <a:gridCol w="2011680"/>
-                <a:gridCol w="2743200"/>
+                <a:gridCol w="1828800">
+                  <a:extLst>
+                    <a:ext uri="{9D8B030D-6E8A-4147-A177-3AD203B41FA5}">
+                      <a16:colId xmlns:a16="http://schemas.microsoft.com/office/drawing/2014/main" val="20000"/>
+                    </a:ext>
+                  </a:extLst>
+                </a:gridCol>
+                <a:gridCol w="4114800">
+                  <a:extLst>
+                    <a:ext uri="{9D8B030D-6E8A-4147-A177-3AD203B41FA5}">
+                      <a16:colId xmlns:a16="http://schemas.microsoft.com/office/drawing/2014/main" val="20001"/>
+                    </a:ext>
+                  </a:extLst>
+                </a:gridCol>
+                <a:gridCol w="2011680">
+                  <a:extLst>
+                    <a:ext uri="{9D8B030D-6E8A-4147-A177-3AD203B41FA5}">
+                      <a16:colId xmlns:a16="http://schemas.microsoft.com/office/drawing/2014/main" val="20002"/>
+                    </a:ext>
+                  </a:extLst>
+                </a:gridCol>
+                <a:gridCol w="2743200">
+                  <a:extLst>
+                    <a:ext uri="{9D8B030D-6E8A-4147-A177-3AD203B41FA5}">
+                      <a16:colId xmlns:a16="http://schemas.microsoft.com/office/drawing/2014/main" val="20003"/>
+                    </a:ext>
+                  </a:extLst>
+                </a:gridCol>
               </a:tblGrid>
               <a:tr h="418011">
                 <a:tc>
@@ -6368,6 +7090,11 @@
                     </a:solidFill>
                   </a:tcPr>
                 </a:tc>
+                <a:extLst>
+                  <a:ext uri="{0D108BD9-81ED-4DB2-BD59-A6C34878D82A}">
+                    <a16:rowId xmlns:a16="http://schemas.microsoft.com/office/drawing/2014/main" val="10000"/>
+                  </a:ext>
+                </a:extLst>
               </a:tr>
               <a:tr h="418011">
                 <a:tc>
@@ -6462,6 +7189,11 @@
                     </a:solidFill>
                   </a:tcPr>
                 </a:tc>
+                <a:extLst>
+                  <a:ext uri="{0D108BD9-81ED-4DB2-BD59-A6C34878D82A}">
+                    <a16:rowId xmlns:a16="http://schemas.microsoft.com/office/drawing/2014/main" val="10001"/>
+                  </a:ext>
+                </a:extLst>
               </a:tr>
               <a:tr h="418011">
                 <a:tc>
@@ -6556,6 +7288,11 @@
                     </a:solidFill>
                   </a:tcPr>
                 </a:tc>
+                <a:extLst>
+                  <a:ext uri="{0D108BD9-81ED-4DB2-BD59-A6C34878D82A}">
+                    <a16:rowId xmlns:a16="http://schemas.microsoft.com/office/drawing/2014/main" val="10002"/>
+                  </a:ext>
+                </a:extLst>
               </a:tr>
               <a:tr h="418011">
                 <a:tc>
@@ -6650,6 +7387,11 @@
                     </a:solidFill>
                   </a:tcPr>
                 </a:tc>
+                <a:extLst>
+                  <a:ext uri="{0D108BD9-81ED-4DB2-BD59-A6C34878D82A}">
+                    <a16:rowId xmlns:a16="http://schemas.microsoft.com/office/drawing/2014/main" val="10003"/>
+                  </a:ext>
+                </a:extLst>
               </a:tr>
               <a:tr h="418011">
                 <a:tc>
@@ -6744,6 +7486,11 @@
                     </a:solidFill>
                   </a:tcPr>
                 </a:tc>
+                <a:extLst>
+                  <a:ext uri="{0D108BD9-81ED-4DB2-BD59-A6C34878D82A}">
+                    <a16:rowId xmlns:a16="http://schemas.microsoft.com/office/drawing/2014/main" val="10004"/>
+                  </a:ext>
+                </a:extLst>
               </a:tr>
               <a:tr h="418011">
                 <a:tc>
@@ -6838,6 +7585,11 @@
                     </a:solidFill>
                   </a:tcPr>
                 </a:tc>
+                <a:extLst>
+                  <a:ext uri="{0D108BD9-81ED-4DB2-BD59-A6C34878D82A}">
+                    <a16:rowId xmlns:a16="http://schemas.microsoft.com/office/drawing/2014/main" val="10005"/>
+                  </a:ext>
+                </a:extLst>
               </a:tr>
               <a:tr h="418014">
                 <a:tc>
@@ -6932,6 +7684,11 @@
                     </a:solidFill>
                   </a:tcPr>
                 </a:tc>
+                <a:extLst>
+                  <a:ext uri="{0D108BD9-81ED-4DB2-BD59-A6C34878D82A}">
+                    <a16:rowId xmlns:a16="http://schemas.microsoft.com/office/drawing/2014/main" val="10006"/>
+                  </a:ext>
+                </a:extLst>
               </a:tr>
             </a:tbl>
           </a:graphicData>
@@ -6981,7 +7738,7 @@
 </file>
 
 <file path=ppt/slides/slide18.xml><?xml version="1.0" encoding="utf-8"?>
-<p:sld xmlns:a="http://schemas.openxmlformats.org/drawingml/2006/main" xmlns:p="http://schemas.openxmlformats.org/presentationml/2006/main" xmlns:r="http://schemas.openxmlformats.org/officeDocument/2006/relationships">
+<p:sld xmlns:a="http://schemas.openxmlformats.org/drawingml/2006/main" xmlns:r="http://schemas.openxmlformats.org/officeDocument/2006/relationships" xmlns:p="http://schemas.openxmlformats.org/presentationml/2006/main">
   <p:cSld>
     <p:bg>
       <p:bgPr>
@@ -6997,7 +7754,14 @@
         <p:cNvGrpSpPr/>
         <p:nvPr/>
       </p:nvGrpSpPr>
-      <p:grpSpPr/>
+      <p:grpSpPr>
+        <a:xfrm>
+          <a:off x="0" y="0"/>
+          <a:ext cx="0" cy="0"/>
+          <a:chOff x="0" y="0"/>
+          <a:chExt cx="0" cy="0"/>
+        </a:xfrm>
+      </p:grpSpPr>
       <p:sp>
         <p:nvSpPr>
           <p:cNvPr id="2" name="TextBox 1"/>
@@ -7087,10 +7851,34 @@
                 <a:tableStyleId>{5C22544A-7EE6-4342-B048-85BDC9FD1C3A}</a:tableStyleId>
               </a:tblPr>
               <a:tblGrid>
-                <a:gridCol w="1828800"/>
-                <a:gridCol w="3474720"/>
-                <a:gridCol w="3657600"/>
-                <a:gridCol w="1737360"/>
+                <a:gridCol w="1828800">
+                  <a:extLst>
+                    <a:ext uri="{9D8B030D-6E8A-4147-A177-3AD203B41FA5}">
+                      <a16:colId xmlns:a16="http://schemas.microsoft.com/office/drawing/2014/main" val="20000"/>
+                    </a:ext>
+                  </a:extLst>
+                </a:gridCol>
+                <a:gridCol w="3474720">
+                  <a:extLst>
+                    <a:ext uri="{9D8B030D-6E8A-4147-A177-3AD203B41FA5}">
+                      <a16:colId xmlns:a16="http://schemas.microsoft.com/office/drawing/2014/main" val="20001"/>
+                    </a:ext>
+                  </a:extLst>
+                </a:gridCol>
+                <a:gridCol w="3657600">
+                  <a:extLst>
+                    <a:ext uri="{9D8B030D-6E8A-4147-A177-3AD203B41FA5}">
+                      <a16:colId xmlns:a16="http://schemas.microsoft.com/office/drawing/2014/main" val="20002"/>
+                    </a:ext>
+                  </a:extLst>
+                </a:gridCol>
+                <a:gridCol w="1737360">
+                  <a:extLst>
+                    <a:ext uri="{9D8B030D-6E8A-4147-A177-3AD203B41FA5}">
+                      <a16:colId xmlns:a16="http://schemas.microsoft.com/office/drawing/2014/main" val="20003"/>
+                    </a:ext>
+                  </a:extLst>
+                </a:gridCol>
               </a:tblGrid>
               <a:tr h="419100">
                 <a:tc>
@@ -7185,6 +7973,11 @@
                     </a:solidFill>
                   </a:tcPr>
                 </a:tc>
+                <a:extLst>
+                  <a:ext uri="{0D108BD9-81ED-4DB2-BD59-A6C34878D82A}">
+                    <a16:rowId xmlns:a16="http://schemas.microsoft.com/office/drawing/2014/main" val="10000"/>
+                  </a:ext>
+                </a:extLst>
               </a:tr>
               <a:tr h="419100">
                 <a:tc>
@@ -7279,6 +8072,11 @@
                     </a:solidFill>
                   </a:tcPr>
                 </a:tc>
+                <a:extLst>
+                  <a:ext uri="{0D108BD9-81ED-4DB2-BD59-A6C34878D82A}">
+                    <a16:rowId xmlns:a16="http://schemas.microsoft.com/office/drawing/2014/main" val="10001"/>
+                  </a:ext>
+                </a:extLst>
               </a:tr>
               <a:tr h="419100">
                 <a:tc>
@@ -7373,6 +8171,11 @@
                     </a:solidFill>
                   </a:tcPr>
                 </a:tc>
+                <a:extLst>
+                  <a:ext uri="{0D108BD9-81ED-4DB2-BD59-A6C34878D82A}">
+                    <a16:rowId xmlns:a16="http://schemas.microsoft.com/office/drawing/2014/main" val="10002"/>
+                  </a:ext>
+                </a:extLst>
               </a:tr>
               <a:tr h="419100">
                 <a:tc>
@@ -7467,6 +8270,11 @@
                     </a:solidFill>
                   </a:tcPr>
                 </a:tc>
+                <a:extLst>
+                  <a:ext uri="{0D108BD9-81ED-4DB2-BD59-A6C34878D82A}">
+                    <a16:rowId xmlns:a16="http://schemas.microsoft.com/office/drawing/2014/main" val="10003"/>
+                  </a:ext>
+                </a:extLst>
               </a:tr>
               <a:tr h="419100">
                 <a:tc>
@@ -7561,6 +8369,11 @@
                     </a:solidFill>
                   </a:tcPr>
                 </a:tc>
+                <a:extLst>
+                  <a:ext uri="{0D108BD9-81ED-4DB2-BD59-A6C34878D82A}">
+                    <a16:rowId xmlns:a16="http://schemas.microsoft.com/office/drawing/2014/main" val="10004"/>
+                  </a:ext>
+                </a:extLst>
               </a:tr>
               <a:tr h="419100">
                 <a:tc>
@@ -7655,6 +8468,11 @@
                     </a:solidFill>
                   </a:tcPr>
                 </a:tc>
+                <a:extLst>
+                  <a:ext uri="{0D108BD9-81ED-4DB2-BD59-A6C34878D82A}">
+                    <a16:rowId xmlns:a16="http://schemas.microsoft.com/office/drawing/2014/main" val="10005"/>
+                  </a:ext>
+                </a:extLst>
               </a:tr>
             </a:tbl>
           </a:graphicData>
@@ -7704,7 +8522,7 @@
 </file>
 
 <file path=ppt/slides/slide19.xml><?xml version="1.0" encoding="utf-8"?>
-<p:sld xmlns:a="http://schemas.openxmlformats.org/drawingml/2006/main" xmlns:p="http://schemas.openxmlformats.org/presentationml/2006/main" xmlns:r="http://schemas.openxmlformats.org/officeDocument/2006/relationships">
+<p:sld xmlns:a="http://schemas.openxmlformats.org/drawingml/2006/main" xmlns:r="http://schemas.openxmlformats.org/officeDocument/2006/relationships" xmlns:p="http://schemas.openxmlformats.org/presentationml/2006/main">
   <p:cSld>
     <p:bg>
       <p:bgPr>
@@ -7720,7 +8538,14 @@
         <p:cNvGrpSpPr/>
         <p:nvPr/>
       </p:nvGrpSpPr>
-      <p:grpSpPr/>
+      <p:grpSpPr>
+        <a:xfrm>
+          <a:off x="0" y="0"/>
+          <a:ext cx="0" cy="0"/>
+          <a:chOff x="0" y="0"/>
+          <a:chExt cx="0" cy="0"/>
+        </a:xfrm>
+      </p:grpSpPr>
       <p:sp>
         <p:nvSpPr>
           <p:cNvPr id="2" name="TextBox 1"/>
@@ -7810,11 +8635,41 @@
                 <a:tableStyleId>{5C22544A-7EE6-4342-B048-85BDC9FD1C3A}</a:tableStyleId>
               </a:tblPr>
               <a:tblGrid>
-                <a:gridCol w="2194560"/>
-                <a:gridCol w="2286000"/>
-                <a:gridCol w="2011680"/>
-                <a:gridCol w="2011680"/>
-                <a:gridCol w="2194560"/>
+                <a:gridCol w="2194560">
+                  <a:extLst>
+                    <a:ext uri="{9D8B030D-6E8A-4147-A177-3AD203B41FA5}">
+                      <a16:colId xmlns:a16="http://schemas.microsoft.com/office/drawing/2014/main" val="20000"/>
+                    </a:ext>
+                  </a:extLst>
+                </a:gridCol>
+                <a:gridCol w="2286000">
+                  <a:extLst>
+                    <a:ext uri="{9D8B030D-6E8A-4147-A177-3AD203B41FA5}">
+                      <a16:colId xmlns:a16="http://schemas.microsoft.com/office/drawing/2014/main" val="20001"/>
+                    </a:ext>
+                  </a:extLst>
+                </a:gridCol>
+                <a:gridCol w="2011680">
+                  <a:extLst>
+                    <a:ext uri="{9D8B030D-6E8A-4147-A177-3AD203B41FA5}">
+                      <a16:colId xmlns:a16="http://schemas.microsoft.com/office/drawing/2014/main" val="20002"/>
+                    </a:ext>
+                  </a:extLst>
+                </a:gridCol>
+                <a:gridCol w="2011680">
+                  <a:extLst>
+                    <a:ext uri="{9D8B030D-6E8A-4147-A177-3AD203B41FA5}">
+                      <a16:colId xmlns:a16="http://schemas.microsoft.com/office/drawing/2014/main" val="20003"/>
+                    </a:ext>
+                  </a:extLst>
+                </a:gridCol>
+                <a:gridCol w="2194560">
+                  <a:extLst>
+                    <a:ext uri="{9D8B030D-6E8A-4147-A177-3AD203B41FA5}">
+                      <a16:colId xmlns:a16="http://schemas.microsoft.com/office/drawing/2014/main" val="20004"/>
+                    </a:ext>
+                  </a:extLst>
+                </a:gridCol>
               </a:tblGrid>
               <a:tr h="417195">
                 <a:tc>
@@ -7932,6 +8787,11 @@
                     </a:solidFill>
                   </a:tcPr>
                 </a:tc>
+                <a:extLst>
+                  <a:ext uri="{0D108BD9-81ED-4DB2-BD59-A6C34878D82A}">
+                    <a16:rowId xmlns:a16="http://schemas.microsoft.com/office/drawing/2014/main" val="10000"/>
+                  </a:ext>
+                </a:extLst>
               </a:tr>
               <a:tr h="417195">
                 <a:tc>
@@ -8049,6 +8909,11 @@
                     </a:solidFill>
                   </a:tcPr>
                 </a:tc>
+                <a:extLst>
+                  <a:ext uri="{0D108BD9-81ED-4DB2-BD59-A6C34878D82A}">
+                    <a16:rowId xmlns:a16="http://schemas.microsoft.com/office/drawing/2014/main" val="10001"/>
+                  </a:ext>
+                </a:extLst>
               </a:tr>
               <a:tr h="417195">
                 <a:tc>
@@ -8166,6 +9031,11 @@
                     </a:solidFill>
                   </a:tcPr>
                 </a:tc>
+                <a:extLst>
+                  <a:ext uri="{0D108BD9-81ED-4DB2-BD59-A6C34878D82A}">
+                    <a16:rowId xmlns:a16="http://schemas.microsoft.com/office/drawing/2014/main" val="10002"/>
+                  </a:ext>
+                </a:extLst>
               </a:tr>
               <a:tr h="417195">
                 <a:tc>
@@ -8283,6 +9153,11 @@
                     </a:solidFill>
                   </a:tcPr>
                 </a:tc>
+                <a:extLst>
+                  <a:ext uri="{0D108BD9-81ED-4DB2-BD59-A6C34878D82A}">
+                    <a16:rowId xmlns:a16="http://schemas.microsoft.com/office/drawing/2014/main" val="10003"/>
+                  </a:ext>
+                </a:extLst>
               </a:tr>
               <a:tr h="417195">
                 <a:tc>
@@ -8400,6 +9275,11 @@
                     </a:solidFill>
                   </a:tcPr>
                 </a:tc>
+                <a:extLst>
+                  <a:ext uri="{0D108BD9-81ED-4DB2-BD59-A6C34878D82A}">
+                    <a16:rowId xmlns:a16="http://schemas.microsoft.com/office/drawing/2014/main" val="10004"/>
+                  </a:ext>
+                </a:extLst>
               </a:tr>
               <a:tr h="417195">
                 <a:tc>
@@ -8517,6 +9397,11 @@
                     </a:solidFill>
                   </a:tcPr>
                 </a:tc>
+                <a:extLst>
+                  <a:ext uri="{0D108BD9-81ED-4DB2-BD59-A6C34878D82A}">
+                    <a16:rowId xmlns:a16="http://schemas.microsoft.com/office/drawing/2014/main" val="10005"/>
+                  </a:ext>
+                </a:extLst>
               </a:tr>
               <a:tr h="417195">
                 <a:tc>
@@ -8634,6 +9519,11 @@
                     </a:solidFill>
                   </a:tcPr>
                 </a:tc>
+                <a:extLst>
+                  <a:ext uri="{0D108BD9-81ED-4DB2-BD59-A6C34878D82A}">
+                    <a16:rowId xmlns:a16="http://schemas.microsoft.com/office/drawing/2014/main" val="10006"/>
+                  </a:ext>
+                </a:extLst>
               </a:tr>
               <a:tr h="417195">
                 <a:tc>
@@ -8751,6 +9641,11 @@
                     </a:solidFill>
                   </a:tcPr>
                 </a:tc>
+                <a:extLst>
+                  <a:ext uri="{0D108BD9-81ED-4DB2-BD59-A6C34878D82A}">
+                    <a16:rowId xmlns:a16="http://schemas.microsoft.com/office/drawing/2014/main" val="10007"/>
+                  </a:ext>
+                </a:extLst>
               </a:tr>
             </a:tbl>
           </a:graphicData>
@@ -8800,7 +9695,7 @@
 </file>
 
 <file path=ppt/slides/slide2.xml><?xml version="1.0" encoding="utf-8"?>
-<p:sld xmlns:a="http://schemas.openxmlformats.org/drawingml/2006/main" xmlns:p="http://schemas.openxmlformats.org/presentationml/2006/main" xmlns:r="http://schemas.openxmlformats.org/officeDocument/2006/relationships">
+<p:sld xmlns:a="http://schemas.openxmlformats.org/drawingml/2006/main" xmlns:r="http://schemas.openxmlformats.org/officeDocument/2006/relationships" xmlns:p="http://schemas.openxmlformats.org/presentationml/2006/main">
   <p:cSld>
     <p:bg>
       <p:bgPr>
@@ -8816,7 +9711,14 @@
         <p:cNvGrpSpPr/>
         <p:nvPr/>
       </p:nvGrpSpPr>
-      <p:grpSpPr/>
+      <p:grpSpPr>
+        <a:xfrm>
+          <a:off x="0" y="0"/>
+          <a:ext cx="0" cy="0"/>
+          <a:chOff x="0" y="0"/>
+          <a:chExt cx="0" cy="0"/>
+        </a:xfrm>
+      </p:grpSpPr>
       <p:sp>
         <p:nvSpPr>
           <p:cNvPr id="2" name="TextBox 1"/>
@@ -8929,6 +9831,7 @@
           <a:lstStyle/>
           <a:p>
             <a:pPr algn="ctr"/>
+            <a:endParaRPr/>
           </a:p>
         </p:txBody>
       </p:sp>
@@ -9069,6 +9972,7 @@
           <a:lstStyle/>
           <a:p>
             <a:pPr algn="ctr"/>
+            <a:endParaRPr/>
           </a:p>
         </p:txBody>
       </p:sp>
@@ -9209,6 +10113,7 @@
           <a:lstStyle/>
           <a:p>
             <a:pPr algn="ctr"/>
+            <a:endParaRPr/>
           </a:p>
         </p:txBody>
       </p:sp>
@@ -9316,7 +10221,7 @@
 </file>
 
 <file path=ppt/slides/slide20.xml><?xml version="1.0" encoding="utf-8"?>
-<p:sld xmlns:a="http://schemas.openxmlformats.org/drawingml/2006/main" xmlns:p="http://schemas.openxmlformats.org/presentationml/2006/main" xmlns:r="http://schemas.openxmlformats.org/officeDocument/2006/relationships">
+<p:sld xmlns:a="http://schemas.openxmlformats.org/drawingml/2006/main" xmlns:r="http://schemas.openxmlformats.org/officeDocument/2006/relationships" xmlns:p="http://schemas.openxmlformats.org/presentationml/2006/main">
   <p:cSld>
     <p:bg>
       <p:bgPr>
@@ -9332,7 +10237,14 @@
         <p:cNvGrpSpPr/>
         <p:nvPr/>
       </p:nvGrpSpPr>
-      <p:grpSpPr/>
+      <p:grpSpPr>
+        <a:xfrm>
+          <a:off x="0" y="0"/>
+          <a:ext cx="0" cy="0"/>
+          <a:chOff x="0" y="0"/>
+          <a:chExt cx="0" cy="0"/>
+        </a:xfrm>
+      </p:grpSpPr>
       <p:sp>
         <p:nvSpPr>
           <p:cNvPr id="2" name="TextBox 1"/>
@@ -9445,6 +10357,7 @@
           <a:lstStyle/>
           <a:p>
             <a:pPr algn="ctr"/>
+            <a:endParaRPr/>
           </a:p>
         </p:txBody>
       </p:sp>
@@ -9540,6 +10453,7 @@
           <a:lstStyle/>
           <a:p>
             <a:pPr algn="ctr"/>
+            <a:endParaRPr/>
           </a:p>
         </p:txBody>
       </p:sp>
@@ -9635,6 +10549,7 @@
           <a:lstStyle/>
           <a:p>
             <a:pPr algn="ctr"/>
+            <a:endParaRPr/>
           </a:p>
         </p:txBody>
       </p:sp>
@@ -9730,6 +10645,7 @@
           <a:lstStyle/>
           <a:p>
             <a:pPr algn="ctr"/>
+            <a:endParaRPr/>
           </a:p>
         </p:txBody>
       </p:sp>
@@ -9822,7 +10738,7 @@
 </file>
 
 <file path=ppt/slides/slide3.xml><?xml version="1.0" encoding="utf-8"?>
-<p:sld xmlns:a="http://schemas.openxmlformats.org/drawingml/2006/main" xmlns:p="http://schemas.openxmlformats.org/presentationml/2006/main" xmlns:r="http://schemas.openxmlformats.org/officeDocument/2006/relationships">
+<p:sld xmlns:a="http://schemas.openxmlformats.org/drawingml/2006/main" xmlns:r="http://schemas.openxmlformats.org/officeDocument/2006/relationships" xmlns:p="http://schemas.openxmlformats.org/presentationml/2006/main">
   <p:cSld>
     <p:bg>
       <p:bgPr>
@@ -9838,7 +10754,14 @@
         <p:cNvGrpSpPr/>
         <p:nvPr/>
       </p:nvGrpSpPr>
-      <p:grpSpPr/>
+      <p:grpSpPr>
+        <a:xfrm>
+          <a:off x="0" y="0"/>
+          <a:ext cx="0" cy="0"/>
+          <a:chOff x="0" y="0"/>
+          <a:chExt cx="0" cy="0"/>
+        </a:xfrm>
+      </p:grpSpPr>
       <p:sp>
         <p:nvSpPr>
           <p:cNvPr id="2" name="TextBox 1"/>
@@ -9951,6 +10874,7 @@
           <a:lstStyle/>
           <a:p>
             <a:pPr algn="ctr"/>
+            <a:endParaRPr/>
           </a:p>
         </p:txBody>
       </p:sp>
@@ -10046,6 +10970,7 @@
           <a:lstStyle/>
           <a:p>
             <a:pPr algn="ctr"/>
+            <a:endParaRPr/>
           </a:p>
         </p:txBody>
       </p:sp>
@@ -10141,6 +11066,7 @@
           <a:lstStyle/>
           <a:p>
             <a:pPr algn="ctr"/>
+            <a:endParaRPr/>
           </a:p>
         </p:txBody>
       </p:sp>
@@ -10236,6 +11162,7 @@
           <a:lstStyle/>
           <a:p>
             <a:pPr algn="ctr"/>
+            <a:endParaRPr/>
           </a:p>
         </p:txBody>
       </p:sp>
@@ -10331,6 +11258,7 @@
           <a:lstStyle/>
           <a:p>
             <a:pPr algn="ctr"/>
+            <a:endParaRPr/>
           </a:p>
         </p:txBody>
       </p:sp>
@@ -10393,7 +11321,7 @@
 </file>
 
 <file path=ppt/slides/slide4.xml><?xml version="1.0" encoding="utf-8"?>
-<p:sld xmlns:a="http://schemas.openxmlformats.org/drawingml/2006/main" xmlns:p="http://schemas.openxmlformats.org/presentationml/2006/main" xmlns:r="http://schemas.openxmlformats.org/officeDocument/2006/relationships">
+<p:sld xmlns:a="http://schemas.openxmlformats.org/drawingml/2006/main" xmlns:r="http://schemas.openxmlformats.org/officeDocument/2006/relationships" xmlns:p="http://schemas.openxmlformats.org/presentationml/2006/main">
   <p:cSld>
     <p:bg>
       <p:bgPr>
@@ -10409,7 +11337,14 @@
         <p:cNvGrpSpPr/>
         <p:nvPr/>
       </p:nvGrpSpPr>
-      <p:grpSpPr/>
+      <p:grpSpPr>
+        <a:xfrm>
+          <a:off x="0" y="0"/>
+          <a:ext cx="0" cy="0"/>
+          <a:chOff x="0" y="0"/>
+          <a:chExt cx="0" cy="0"/>
+        </a:xfrm>
+      </p:grpSpPr>
       <p:sp>
         <p:nvSpPr>
           <p:cNvPr id="2" name="TextBox 1"/>
@@ -10522,6 +11457,7 @@
           <a:lstStyle/>
           <a:p>
             <a:pPr algn="ctr"/>
+            <a:endParaRPr/>
           </a:p>
         </p:txBody>
       </p:sp>
@@ -10692,6 +11628,7 @@
           <a:lstStyle/>
           <a:p>
             <a:pPr algn="ctr"/>
+            <a:endParaRPr/>
           </a:p>
         </p:txBody>
       </p:sp>
@@ -10862,6 +11799,7 @@
           <a:lstStyle/>
           <a:p>
             <a:pPr algn="ctr"/>
+            <a:endParaRPr/>
           </a:p>
         </p:txBody>
       </p:sp>
@@ -11032,6 +11970,7 @@
           <a:lstStyle/>
           <a:p>
             <a:pPr algn="ctr"/>
+            <a:endParaRPr/>
           </a:p>
         </p:txBody>
       </p:sp>
@@ -11169,7 +12108,7 @@
 </file>
 
 <file path=ppt/slides/slide5.xml><?xml version="1.0" encoding="utf-8"?>
-<p:sld xmlns:a="http://schemas.openxmlformats.org/drawingml/2006/main" xmlns:p="http://schemas.openxmlformats.org/presentationml/2006/main" xmlns:r="http://schemas.openxmlformats.org/officeDocument/2006/relationships">
+<p:sld xmlns:a="http://schemas.openxmlformats.org/drawingml/2006/main" xmlns:r="http://schemas.openxmlformats.org/officeDocument/2006/relationships" xmlns:p="http://schemas.openxmlformats.org/presentationml/2006/main">
   <p:cSld>
     <p:bg>
       <p:bgPr>
@@ -11185,7 +12124,14 @@
         <p:cNvGrpSpPr/>
         <p:nvPr/>
       </p:nvGrpSpPr>
-      <p:grpSpPr/>
+      <p:grpSpPr>
+        <a:xfrm>
+          <a:off x="0" y="0"/>
+          <a:ext cx="0" cy="0"/>
+          <a:chOff x="0" y="0"/>
+          <a:chExt cx="0" cy="0"/>
+        </a:xfrm>
+      </p:grpSpPr>
       <p:sp>
         <p:nvSpPr>
           <p:cNvPr id="2" name="TextBox 1"/>
@@ -11298,6 +12244,7 @@
           <a:lstStyle/>
           <a:p>
             <a:pPr algn="ctr"/>
+            <a:endParaRPr/>
           </a:p>
         </p:txBody>
       </p:sp>
@@ -11408,6 +12355,7 @@
           <a:lstStyle/>
           <a:p>
             <a:pPr algn="ctr"/>
+            <a:endParaRPr/>
           </a:p>
         </p:txBody>
       </p:sp>
@@ -11518,6 +12466,7 @@
           <a:lstStyle/>
           <a:p>
             <a:pPr algn="ctr"/>
+            <a:endParaRPr/>
           </a:p>
         </p:txBody>
       </p:sp>
@@ -11628,6 +12577,7 @@
           <a:lstStyle/>
           <a:p>
             <a:pPr algn="ctr"/>
+            <a:endParaRPr/>
           </a:p>
         </p:txBody>
       </p:sp>
@@ -11738,6 +12688,7 @@
           <a:lstStyle/>
           <a:p>
             <a:pPr algn="ctr"/>
+            <a:endParaRPr/>
           </a:p>
         </p:txBody>
       </p:sp>
@@ -11848,6 +12799,7 @@
           <a:lstStyle/>
           <a:p>
             <a:pPr algn="ctr"/>
+            <a:endParaRPr/>
           </a:p>
         </p:txBody>
       </p:sp>
@@ -11958,6 +12910,7 @@
           <a:lstStyle/>
           <a:p>
             <a:pPr algn="ctr"/>
+            <a:endParaRPr/>
           </a:p>
         </p:txBody>
       </p:sp>
@@ -12068,6 +13021,7 @@
           <a:lstStyle/>
           <a:p>
             <a:pPr algn="ctr"/>
+            <a:endParaRPr/>
           </a:p>
         </p:txBody>
       </p:sp>
@@ -12145,7 +13099,7 @@
 </file>
 
 <file path=ppt/slides/slide6.xml><?xml version="1.0" encoding="utf-8"?>
-<p:sld xmlns:a="http://schemas.openxmlformats.org/drawingml/2006/main" xmlns:p="http://schemas.openxmlformats.org/presentationml/2006/main" xmlns:r="http://schemas.openxmlformats.org/officeDocument/2006/relationships">
+<p:sld xmlns:a="http://schemas.openxmlformats.org/drawingml/2006/main" xmlns:r="http://schemas.openxmlformats.org/officeDocument/2006/relationships" xmlns:p="http://schemas.openxmlformats.org/presentationml/2006/main">
   <p:cSld>
     <p:bg>
       <p:bgPr>
@@ -12161,7 +13115,14 @@
         <p:cNvGrpSpPr/>
         <p:nvPr/>
       </p:nvGrpSpPr>
-      <p:grpSpPr/>
+      <p:grpSpPr>
+        <a:xfrm>
+          <a:off x="0" y="0"/>
+          <a:ext cx="0" cy="0"/>
+          <a:chOff x="0" y="0"/>
+          <a:chExt cx="0" cy="0"/>
+        </a:xfrm>
+      </p:grpSpPr>
       <p:sp>
         <p:nvSpPr>
           <p:cNvPr id="2" name="TextBox 1"/>
@@ -12274,6 +13235,7 @@
           <a:lstStyle/>
           <a:p>
             <a:pPr algn="ctr"/>
+            <a:endParaRPr/>
           </a:p>
         </p:txBody>
       </p:sp>
@@ -12444,6 +13406,7 @@
           <a:lstStyle/>
           <a:p>
             <a:pPr algn="ctr"/>
+            <a:endParaRPr/>
           </a:p>
         </p:txBody>
       </p:sp>
@@ -12457,14 +13420,15 @@
         </p:nvPicPr>
         <p:blipFill>
           <a:blip r:embed="rId2"/>
+          <a:srcRect/>
           <a:stretch>
             <a:fillRect/>
           </a:stretch>
         </p:blipFill>
         <p:spPr>
           <a:xfrm>
-            <a:off x="5696712" y="1444752"/>
-            <a:ext cx="5705856" cy="4425696"/>
+            <a:off x="5696712" y="1874520"/>
+            <a:ext cx="5705856" cy="3566160"/>
           </a:xfrm>
           <a:prstGeom prst="rect">
             <a:avLst/>
@@ -12515,7 +13479,7 @@
 </file>
 
 <file path=ppt/slides/slide7.xml><?xml version="1.0" encoding="utf-8"?>
-<p:sld xmlns:a="http://schemas.openxmlformats.org/drawingml/2006/main" xmlns:p="http://schemas.openxmlformats.org/presentationml/2006/main" xmlns:r="http://schemas.openxmlformats.org/officeDocument/2006/relationships">
+<p:sld xmlns:a="http://schemas.openxmlformats.org/drawingml/2006/main" xmlns:r="http://schemas.openxmlformats.org/officeDocument/2006/relationships" xmlns:p="http://schemas.openxmlformats.org/presentationml/2006/main">
   <p:cSld>
     <p:bg>
       <p:bgPr>
@@ -12531,7 +13495,14 @@
         <p:cNvGrpSpPr/>
         <p:nvPr/>
       </p:nvGrpSpPr>
-      <p:grpSpPr/>
+      <p:grpSpPr>
+        <a:xfrm>
+          <a:off x="0" y="0"/>
+          <a:ext cx="0" cy="0"/>
+          <a:chOff x="0" y="0"/>
+          <a:chExt cx="0" cy="0"/>
+        </a:xfrm>
+      </p:grpSpPr>
       <p:sp>
         <p:nvSpPr>
           <p:cNvPr id="2" name="TextBox 1"/>
@@ -12644,6 +13615,7 @@
           <a:lstStyle/>
           <a:p>
             <a:pPr algn="ctr"/>
+            <a:endParaRPr/>
           </a:p>
         </p:txBody>
       </p:sp>
@@ -12814,6 +13786,7 @@
           <a:lstStyle/>
           <a:p>
             <a:pPr algn="ctr"/>
+            <a:endParaRPr/>
           </a:p>
         </p:txBody>
       </p:sp>
@@ -12827,14 +13800,15 @@
         </p:nvPicPr>
         <p:blipFill>
           <a:blip r:embed="rId2"/>
+          <a:srcRect/>
           <a:stretch>
             <a:fillRect/>
           </a:stretch>
         </p:blipFill>
         <p:spPr>
           <a:xfrm>
-            <a:off x="5696712" y="1444752"/>
-            <a:ext cx="5705856" cy="4425696"/>
+            <a:off x="5696712" y="1874520"/>
+            <a:ext cx="5705856" cy="3566160"/>
           </a:xfrm>
           <a:prstGeom prst="rect">
             <a:avLst/>
@@ -12885,7 +13859,7 @@
 </file>
 
 <file path=ppt/slides/slide8.xml><?xml version="1.0" encoding="utf-8"?>
-<p:sld xmlns:a="http://schemas.openxmlformats.org/drawingml/2006/main" xmlns:p="http://schemas.openxmlformats.org/presentationml/2006/main" xmlns:r="http://schemas.openxmlformats.org/officeDocument/2006/relationships">
+<p:sld xmlns:a="http://schemas.openxmlformats.org/drawingml/2006/main" xmlns:r="http://schemas.openxmlformats.org/officeDocument/2006/relationships" xmlns:p="http://schemas.openxmlformats.org/presentationml/2006/main">
   <p:cSld>
     <p:bg>
       <p:bgPr>
@@ -12901,7 +13875,14 @@
         <p:cNvGrpSpPr/>
         <p:nvPr/>
       </p:nvGrpSpPr>
-      <p:grpSpPr/>
+      <p:grpSpPr>
+        <a:xfrm>
+          <a:off x="0" y="0"/>
+          <a:ext cx="0" cy="0"/>
+          <a:chOff x="0" y="0"/>
+          <a:chExt cx="0" cy="0"/>
+        </a:xfrm>
+      </p:grpSpPr>
       <p:sp>
         <p:nvSpPr>
           <p:cNvPr id="2" name="TextBox 1"/>
@@ -13014,6 +13995,7 @@
           <a:lstStyle/>
           <a:p>
             <a:pPr algn="ctr"/>
+            <a:endParaRPr/>
           </a:p>
         </p:txBody>
       </p:sp>
@@ -13184,6 +14166,7 @@
           <a:lstStyle/>
           <a:p>
             <a:pPr algn="ctr"/>
+            <a:endParaRPr/>
           </a:p>
         </p:txBody>
       </p:sp>
@@ -13197,14 +14180,15 @@
         </p:nvPicPr>
         <p:blipFill>
           <a:blip r:embed="rId2"/>
+          <a:srcRect/>
           <a:stretch>
             <a:fillRect/>
           </a:stretch>
         </p:blipFill>
         <p:spPr>
           <a:xfrm>
-            <a:off x="5696712" y="1444752"/>
-            <a:ext cx="5705856" cy="4425696"/>
+            <a:off x="5696712" y="1874520"/>
+            <a:ext cx="5705856" cy="3566160"/>
           </a:xfrm>
           <a:prstGeom prst="rect">
             <a:avLst/>
@@ -13255,7 +14239,7 @@
 </file>
 
 <file path=ppt/slides/slide9.xml><?xml version="1.0" encoding="utf-8"?>
-<p:sld xmlns:a="http://schemas.openxmlformats.org/drawingml/2006/main" xmlns:p="http://schemas.openxmlformats.org/presentationml/2006/main" xmlns:r="http://schemas.openxmlformats.org/officeDocument/2006/relationships">
+<p:sld xmlns:a="http://schemas.openxmlformats.org/drawingml/2006/main" xmlns:r="http://schemas.openxmlformats.org/officeDocument/2006/relationships" xmlns:p="http://schemas.openxmlformats.org/presentationml/2006/main">
   <p:cSld>
     <p:bg>
       <p:bgPr>
@@ -13271,7 +14255,14 @@
         <p:cNvGrpSpPr/>
         <p:nvPr/>
       </p:nvGrpSpPr>
-      <p:grpSpPr/>
+      <p:grpSpPr>
+        <a:xfrm>
+          <a:off x="0" y="0"/>
+          <a:ext cx="0" cy="0"/>
+          <a:chOff x="0" y="0"/>
+          <a:chExt cx="0" cy="0"/>
+        </a:xfrm>
+      </p:grpSpPr>
       <p:sp>
         <p:nvSpPr>
           <p:cNvPr id="2" name="TextBox 1"/>
@@ -13384,6 +14375,7 @@
           <a:lstStyle/>
           <a:p>
             <a:pPr algn="ctr"/>
+            <a:endParaRPr/>
           </a:p>
         </p:txBody>
       </p:sp>
@@ -13554,6 +14546,7 @@
           <a:lstStyle/>
           <a:p>
             <a:pPr algn="ctr"/>
+            <a:endParaRPr/>
           </a:p>
         </p:txBody>
       </p:sp>
@@ -13567,14 +14560,15 @@
         </p:nvPicPr>
         <p:blipFill>
           <a:blip r:embed="rId2"/>
+          <a:srcRect/>
           <a:stretch>
             <a:fillRect/>
           </a:stretch>
         </p:blipFill>
         <p:spPr>
           <a:xfrm>
-            <a:off x="5696712" y="1444752"/>
-            <a:ext cx="5705856" cy="4425696"/>
+            <a:off x="5696712" y="1874520"/>
+            <a:ext cx="5705856" cy="3566160"/>
           </a:xfrm>
           <a:prstGeom prst="rect">
             <a:avLst/>
@@ -13942,4 +14936,319 @@
   </a:objectDefaults>
   <a:extraClrSchemeLst/>
 </a:theme>
+</file>
+
+<file path=ppt/theme/theme2.xml><?xml version="1.0" encoding="utf-8"?>
+<a:theme xmlns:a="http://schemas.openxmlformats.org/drawingml/2006/main" name="Office Theme">
+  <a:themeElements>
+    <a:clrScheme name="Office">
+      <a:dk1>
+        <a:sysClr val="windowText" lastClr="000000"/>
+      </a:dk1>
+      <a:lt1>
+        <a:sysClr val="window" lastClr="FFFFFF"/>
+      </a:lt1>
+      <a:dk2>
+        <a:srgbClr val="0E2841"/>
+      </a:dk2>
+      <a:lt2>
+        <a:srgbClr val="E8E8E8"/>
+      </a:lt2>
+      <a:accent1>
+        <a:srgbClr val="156082"/>
+      </a:accent1>
+      <a:accent2>
+        <a:srgbClr val="E97132"/>
+      </a:accent2>
+      <a:accent3>
+        <a:srgbClr val="196B24"/>
+      </a:accent3>
+      <a:accent4>
+        <a:srgbClr val="0F9ED5"/>
+      </a:accent4>
+      <a:accent5>
+        <a:srgbClr val="A02B93"/>
+      </a:accent5>
+      <a:accent6>
+        <a:srgbClr val="4EA72E"/>
+      </a:accent6>
+      <a:hlink>
+        <a:srgbClr val="467886"/>
+      </a:hlink>
+      <a:folHlink>
+        <a:srgbClr val="96607D"/>
+      </a:folHlink>
+    </a:clrScheme>
+    <a:fontScheme name="Office">
+      <a:majorFont>
+        <a:latin typeface="Aptos Display" panose="02110004020202020204"/>
+        <a:ea typeface=""/>
+        <a:cs typeface=""/>
+        <a:font script="Jpan" typeface="游ゴシック Light"/>
+        <a:font script="Hang" typeface="맑은 고딕"/>
+        <a:font script="Hans" typeface="等线 Light"/>
+        <a:font script="Hant" typeface="新細明體"/>
+        <a:font script="Arab" typeface="Times New Roman"/>
+        <a:font script="Hebr" typeface="Times New Roman"/>
+        <a:font script="Thai" typeface="Angsana New"/>
+        <a:font script="Ethi" typeface="Nyala"/>
+        <a:font script="Beng" typeface="Vrinda"/>
+        <a:font script="Gujr" typeface="Shruti"/>
+        <a:font script="Khmr" typeface="MoolBoran"/>
+        <a:font script="Knda" typeface="Tunga"/>
+        <a:font script="Guru" typeface="Raavi"/>
+        <a:font script="Cans" typeface="Euphemia"/>
+        <a:font script="Cher" typeface="Plantagenet Cherokee"/>
+        <a:font script="Yiii" typeface="Microsoft Yi Baiti"/>
+        <a:font script="Tibt" typeface="Microsoft Himalaya"/>
+        <a:font script="Thaa" typeface="MV Boli"/>
+        <a:font script="Deva" typeface="Mangal"/>
+        <a:font script="Telu" typeface="Gautami"/>
+        <a:font script="Taml" typeface="Latha"/>
+        <a:font script="Syrc" typeface="Estrangelo Edessa"/>
+        <a:font script="Orya" typeface="Kalinga"/>
+        <a:font script="Mlym" typeface="Kartika"/>
+        <a:font script="Laoo" typeface="DokChampa"/>
+        <a:font script="Sinh" typeface="Iskoola Pota"/>
+        <a:font script="Mong" typeface="Mongolian Baiti"/>
+        <a:font script="Viet" typeface="Times New Roman"/>
+        <a:font script="Uigh" typeface="Microsoft Uighur"/>
+        <a:font script="Geor" typeface="Sylfaen"/>
+        <a:font script="Armn" typeface="Arial"/>
+        <a:font script="Bugi" typeface="Leelawadee UI"/>
+        <a:font script="Bopo" typeface="Microsoft JhengHei"/>
+        <a:font script="Java" typeface="Javanese Text"/>
+        <a:font script="Lisu" typeface="Segoe UI"/>
+        <a:font script="Mymr" typeface="Myanmar Text"/>
+        <a:font script="Nkoo" typeface="Ebrima"/>
+        <a:font script="Olck" typeface="Nirmala UI"/>
+        <a:font script="Osma" typeface="Ebrima"/>
+        <a:font script="Phag" typeface="Phagspa"/>
+        <a:font script="Syrn" typeface="Estrangelo Edessa"/>
+        <a:font script="Syrj" typeface="Estrangelo Edessa"/>
+        <a:font script="Syre" typeface="Estrangelo Edessa"/>
+        <a:font script="Sora" typeface="Nirmala UI"/>
+        <a:font script="Tale" typeface="Microsoft Tai Le"/>
+        <a:font script="Talu" typeface="Microsoft New Tai Lue"/>
+        <a:font script="Tfng" typeface="Ebrima"/>
+      </a:majorFont>
+      <a:minorFont>
+        <a:latin typeface="Aptos" panose="02110004020202020204"/>
+        <a:ea typeface=""/>
+        <a:cs typeface=""/>
+        <a:font script="Jpan" typeface="游ゴシック"/>
+        <a:font script="Hang" typeface="맑은 고딕"/>
+        <a:font script="Hans" typeface="等线"/>
+        <a:font script="Hant" typeface="新細明體"/>
+        <a:font script="Arab" typeface="Arial"/>
+        <a:font script="Hebr" typeface="Arial"/>
+        <a:font script="Thai" typeface="Cordia New"/>
+        <a:font script="Ethi" typeface="Nyala"/>
+        <a:font script="Beng" typeface="Vrinda"/>
+        <a:font script="Gujr" typeface="Shruti"/>
+        <a:font script="Khmr" typeface="DaunPenh"/>
+        <a:font script="Knda" typeface="Tunga"/>
+        <a:font script="Guru" typeface="Raavi"/>
+        <a:font script="Cans" typeface="Euphemia"/>
+        <a:font script="Cher" typeface="Plantagenet Cherokee"/>
+        <a:font script="Yiii" typeface="Microsoft Yi Baiti"/>
+        <a:font script="Tibt" typeface="Microsoft Himalaya"/>
+        <a:font script="Thaa" typeface="MV Boli"/>
+        <a:font script="Deva" typeface="Mangal"/>
+        <a:font script="Telu" typeface="Gautami"/>
+        <a:font script="Taml" typeface="Latha"/>
+        <a:font script="Syrc" typeface="Estrangelo Edessa"/>
+        <a:font script="Orya" typeface="Kalinga"/>
+        <a:font script="Mlym" typeface="Kartika"/>
+        <a:font script="Laoo" typeface="DokChampa"/>
+        <a:font script="Sinh" typeface="Iskoola Pota"/>
+        <a:font script="Mong" typeface="Mongolian Baiti"/>
+        <a:font script="Viet" typeface="Arial"/>
+        <a:font script="Uigh" typeface="Microsoft Uighur"/>
+        <a:font script="Geor" typeface="Sylfaen"/>
+        <a:font script="Armn" typeface="Arial"/>
+        <a:font script="Bugi" typeface="Leelawadee UI"/>
+        <a:font script="Bopo" typeface="Microsoft JhengHei"/>
+        <a:font script="Java" typeface="Javanese Text"/>
+        <a:font script="Lisu" typeface="Segoe UI"/>
+        <a:font script="Mymr" typeface="Myanmar Text"/>
+        <a:font script="Nkoo" typeface="Ebrima"/>
+        <a:font script="Olck" typeface="Nirmala UI"/>
+        <a:font script="Osma" typeface="Ebrima"/>
+        <a:font script="Phag" typeface="Phagspa"/>
+        <a:font script="Syrn" typeface="Estrangelo Edessa"/>
+        <a:font script="Syrj" typeface="Estrangelo Edessa"/>
+        <a:font script="Syre" typeface="Estrangelo Edessa"/>
+        <a:font script="Sora" typeface="Nirmala UI"/>
+        <a:font script="Tale" typeface="Microsoft Tai Le"/>
+        <a:font script="Talu" typeface="Microsoft New Tai Lue"/>
+        <a:font script="Tfng" typeface="Ebrima"/>
+      </a:minorFont>
+    </a:fontScheme>
+    <a:fmtScheme name="Office">
+      <a:fillStyleLst>
+        <a:solidFill>
+          <a:schemeClr val="phClr"/>
+        </a:solidFill>
+        <a:gradFill rotWithShape="1">
+          <a:gsLst>
+            <a:gs pos="0">
+              <a:schemeClr val="phClr">
+                <a:lumMod val="110000"/>
+                <a:satMod val="105000"/>
+                <a:tint val="67000"/>
+              </a:schemeClr>
+            </a:gs>
+            <a:gs pos="50000">
+              <a:schemeClr val="phClr">
+                <a:lumMod val="105000"/>
+                <a:satMod val="103000"/>
+                <a:tint val="73000"/>
+              </a:schemeClr>
+            </a:gs>
+            <a:gs pos="100000">
+              <a:schemeClr val="phClr">
+                <a:lumMod val="105000"/>
+                <a:satMod val="109000"/>
+                <a:tint val="81000"/>
+              </a:schemeClr>
+            </a:gs>
+          </a:gsLst>
+          <a:lin ang="5400000" scaled="0"/>
+        </a:gradFill>
+        <a:gradFill rotWithShape="1">
+          <a:gsLst>
+            <a:gs pos="0">
+              <a:schemeClr val="phClr">
+                <a:satMod val="103000"/>
+                <a:lumMod val="102000"/>
+                <a:tint val="94000"/>
+              </a:schemeClr>
+            </a:gs>
+            <a:gs pos="50000">
+              <a:schemeClr val="phClr">
+                <a:satMod val="110000"/>
+                <a:lumMod val="100000"/>
+                <a:shade val="100000"/>
+              </a:schemeClr>
+            </a:gs>
+            <a:gs pos="100000">
+              <a:schemeClr val="phClr">
+                <a:lumMod val="99000"/>
+                <a:satMod val="120000"/>
+                <a:shade val="78000"/>
+              </a:schemeClr>
+            </a:gs>
+          </a:gsLst>
+          <a:lin ang="5400000" scaled="0"/>
+        </a:gradFill>
+      </a:fillStyleLst>
+      <a:lnStyleLst>
+        <a:ln w="12700" cap="flat" cmpd="sng" algn="ctr">
+          <a:solidFill>
+            <a:schemeClr val="phClr"/>
+          </a:solidFill>
+          <a:prstDash val="solid"/>
+          <a:miter lim="800000"/>
+        </a:ln>
+        <a:ln w="19050" cap="flat" cmpd="sng" algn="ctr">
+          <a:solidFill>
+            <a:schemeClr val="phClr"/>
+          </a:solidFill>
+          <a:prstDash val="solid"/>
+          <a:miter lim="800000"/>
+        </a:ln>
+        <a:ln w="25400" cap="flat" cmpd="sng" algn="ctr">
+          <a:solidFill>
+            <a:schemeClr val="phClr"/>
+          </a:solidFill>
+          <a:prstDash val="solid"/>
+          <a:miter lim="800000"/>
+        </a:ln>
+      </a:lnStyleLst>
+      <a:effectStyleLst>
+        <a:effectStyle>
+          <a:effectLst/>
+        </a:effectStyle>
+        <a:effectStyle>
+          <a:effectLst/>
+        </a:effectStyle>
+        <a:effectStyle>
+          <a:effectLst>
+            <a:outerShdw blurRad="57150" dist="19050" dir="5400000" algn="ctr" rotWithShape="0">
+              <a:srgbClr val="000000">
+                <a:alpha val="63000"/>
+              </a:srgbClr>
+            </a:outerShdw>
+          </a:effectLst>
+        </a:effectStyle>
+      </a:effectStyleLst>
+      <a:bgFillStyleLst>
+        <a:solidFill>
+          <a:schemeClr val="phClr"/>
+        </a:solidFill>
+        <a:solidFill>
+          <a:schemeClr val="phClr">
+            <a:tint val="95000"/>
+            <a:satMod val="170000"/>
+          </a:schemeClr>
+        </a:solidFill>
+        <a:gradFill rotWithShape="1">
+          <a:gsLst>
+            <a:gs pos="0">
+              <a:schemeClr val="phClr">
+                <a:tint val="93000"/>
+                <a:satMod val="150000"/>
+                <a:shade val="98000"/>
+                <a:lumMod val="102000"/>
+              </a:schemeClr>
+            </a:gs>
+            <a:gs pos="50000">
+              <a:schemeClr val="phClr">
+                <a:tint val="98000"/>
+                <a:satMod val="130000"/>
+                <a:shade val="90000"/>
+                <a:lumMod val="103000"/>
+              </a:schemeClr>
+            </a:gs>
+            <a:gs pos="100000">
+              <a:schemeClr val="phClr">
+                <a:shade val="63000"/>
+                <a:satMod val="120000"/>
+              </a:schemeClr>
+            </a:gs>
+          </a:gsLst>
+          <a:lin ang="5400000" scaled="0"/>
+        </a:gradFill>
+      </a:bgFillStyleLst>
+    </a:fmtScheme>
+  </a:themeElements>
+  <a:objectDefaults>
+    <a:lnDef>
+      <a:spPr/>
+      <a:bodyPr/>
+      <a:lstStyle/>
+      <a:style>
+        <a:lnRef idx="2">
+          <a:schemeClr val="accent1"/>
+        </a:lnRef>
+        <a:fillRef idx="0">
+          <a:schemeClr val="accent1"/>
+        </a:fillRef>
+        <a:effectRef idx="1">
+          <a:schemeClr val="accent1"/>
+        </a:effectRef>
+        <a:fontRef idx="minor">
+          <a:schemeClr val="tx1"/>
+        </a:fontRef>
+      </a:style>
+    </a:lnDef>
+  </a:objectDefaults>
+  <a:extraClrSchemeLst/>
+  <a:extLst>
+    <a:ext uri="{05A4C25C-085E-4340-85A3-A5531E510DB2}">
+      <thm15:themeFamily xmlns:thm15="http://schemas.microsoft.com/office/thememl/2012/main" name="Office Theme" id="{2E142A2C-CD16-42D6-873A-C26D2A0506FA}" vid="{1BDDFF52-6CD6-40A5-AB3C-68EB2F1E4D0A}"/>
+    </a:ext>
+  </a:extLst>
+</a:theme>
 </file>